--- a/docs/PROYECTO DEEP LEARNING.pptx
+++ b/docs/PROYECTO DEEP LEARNING.pptx
@@ -5,25 +5,30 @@
     <p:sldMasterId id="2147483648" r:id="rId4"/>
   </p:sldMasterIdLst>
   <p:notesMasterIdLst>
-    <p:notesMasterId r:id="rId21"/>
+    <p:notesMasterId r:id="rId26"/>
   </p:notesMasterIdLst>
   <p:sldIdLst>
     <p:sldId id="517" r:id="rId5"/>
     <p:sldId id="386" r:id="rId6"/>
-    <p:sldId id="518" r:id="rId7"/>
-    <p:sldId id="519" r:id="rId8"/>
-    <p:sldId id="520" r:id="rId9"/>
-    <p:sldId id="521" r:id="rId10"/>
-    <p:sldId id="522" r:id="rId11"/>
-    <p:sldId id="523" r:id="rId12"/>
-    <p:sldId id="527" r:id="rId13"/>
-    <p:sldId id="524" r:id="rId14"/>
-    <p:sldId id="528" r:id="rId15"/>
-    <p:sldId id="525" r:id="rId16"/>
-    <p:sldId id="529" r:id="rId17"/>
-    <p:sldId id="526" r:id="rId18"/>
-    <p:sldId id="530" r:id="rId19"/>
-    <p:sldId id="531" r:id="rId20"/>
+    <p:sldId id="546" r:id="rId7"/>
+    <p:sldId id="518" r:id="rId8"/>
+    <p:sldId id="519" r:id="rId9"/>
+    <p:sldId id="520" r:id="rId10"/>
+    <p:sldId id="547" r:id="rId11"/>
+    <p:sldId id="521" r:id="rId12"/>
+    <p:sldId id="522" r:id="rId13"/>
+    <p:sldId id="523" r:id="rId14"/>
+    <p:sldId id="527" r:id="rId15"/>
+    <p:sldId id="524" r:id="rId16"/>
+    <p:sldId id="528" r:id="rId17"/>
+    <p:sldId id="525" r:id="rId18"/>
+    <p:sldId id="529" r:id="rId19"/>
+    <p:sldId id="526" r:id="rId20"/>
+    <p:sldId id="530" r:id="rId21"/>
+    <p:sldId id="531" r:id="rId22"/>
+    <p:sldId id="548" r:id="rId23"/>
+    <p:sldId id="549" r:id="rId24"/>
+    <p:sldId id="550" r:id="rId25"/>
   </p:sldIdLst>
   <p:sldSz cx="12192000" cy="6858000"/>
   <p:notesSz cx="7315200" cy="9601200"/>
@@ -237,7 +242,7 @@
           <a:p>
             <a:fld id="{478E539C-DDF3-AC46-8B9D-2E762AE448C0}" type="datetimeFigureOut">
               <a:rPr lang="es-ES_tradnl" smtClean="0"/>
-              <a:t>24/05/2026</a:t>
+              <a:t>25/05/2026</a:t>
             </a:fld>
             <a:endParaRPr lang="es-ES_tradnl"/>
           </a:p>
@@ -633,7 +638,7 @@
           <a:p>
             <a:fld id="{B7A280E0-7F35-E648-A499-767250BB567F}" type="datetimeFigureOut">
               <a:rPr lang="es-ES_tradnl" smtClean="0"/>
-              <a:t>24/05/2026</a:t>
+              <a:t>25/05/2026</a:t>
             </a:fld>
             <a:endParaRPr lang="es-ES_tradnl"/>
           </a:p>
@@ -801,7 +806,7 @@
           <a:p>
             <a:fld id="{B7A280E0-7F35-E648-A499-767250BB567F}" type="datetimeFigureOut">
               <a:rPr lang="es-ES_tradnl" smtClean="0"/>
-              <a:t>24/05/2026</a:t>
+              <a:t>25/05/2026</a:t>
             </a:fld>
             <a:endParaRPr lang="es-ES_tradnl"/>
           </a:p>
@@ -979,7 +984,7 @@
           <a:p>
             <a:fld id="{B7A280E0-7F35-E648-A499-767250BB567F}" type="datetimeFigureOut">
               <a:rPr lang="es-ES_tradnl" smtClean="0"/>
-              <a:t>24/05/2026</a:t>
+              <a:t>25/05/2026</a:t>
             </a:fld>
             <a:endParaRPr lang="es-ES_tradnl"/>
           </a:p>
@@ -1147,7 +1152,7 @@
           <a:p>
             <a:fld id="{B7A280E0-7F35-E648-A499-767250BB567F}" type="datetimeFigureOut">
               <a:rPr lang="es-ES_tradnl" smtClean="0"/>
-              <a:t>24/05/2026</a:t>
+              <a:t>25/05/2026</a:t>
             </a:fld>
             <a:endParaRPr lang="es-ES_tradnl"/>
           </a:p>
@@ -1392,7 +1397,7 @@
           <a:p>
             <a:fld id="{B7A280E0-7F35-E648-A499-767250BB567F}" type="datetimeFigureOut">
               <a:rPr lang="es-ES_tradnl" smtClean="0"/>
-              <a:t>24/05/2026</a:t>
+              <a:t>25/05/2026</a:t>
             </a:fld>
             <a:endParaRPr lang="es-ES_tradnl"/>
           </a:p>
@@ -1621,7 +1626,7 @@
           <a:p>
             <a:fld id="{B7A280E0-7F35-E648-A499-767250BB567F}" type="datetimeFigureOut">
               <a:rPr lang="es-ES_tradnl" smtClean="0"/>
-              <a:t>24/05/2026</a:t>
+              <a:t>25/05/2026</a:t>
             </a:fld>
             <a:endParaRPr lang="es-ES_tradnl"/>
           </a:p>
@@ -1985,7 +1990,7 @@
           <a:p>
             <a:fld id="{B7A280E0-7F35-E648-A499-767250BB567F}" type="datetimeFigureOut">
               <a:rPr lang="es-ES_tradnl" smtClean="0"/>
-              <a:t>24/05/2026</a:t>
+              <a:t>25/05/2026</a:t>
             </a:fld>
             <a:endParaRPr lang="es-ES_tradnl"/>
           </a:p>
@@ -2102,7 +2107,7 @@
           <a:p>
             <a:fld id="{B7A280E0-7F35-E648-A499-767250BB567F}" type="datetimeFigureOut">
               <a:rPr lang="es-ES_tradnl" smtClean="0"/>
-              <a:t>24/05/2026</a:t>
+              <a:t>25/05/2026</a:t>
             </a:fld>
             <a:endParaRPr lang="es-ES_tradnl"/>
           </a:p>
@@ -2197,7 +2202,7 @@
           <a:p>
             <a:fld id="{B7A280E0-7F35-E648-A499-767250BB567F}" type="datetimeFigureOut">
               <a:rPr lang="es-ES_tradnl" smtClean="0"/>
-              <a:t>24/05/2026</a:t>
+              <a:t>25/05/2026</a:t>
             </a:fld>
             <a:endParaRPr lang="es-ES_tradnl"/>
           </a:p>
@@ -2472,7 +2477,7 @@
           <a:p>
             <a:fld id="{B7A280E0-7F35-E648-A499-767250BB567F}" type="datetimeFigureOut">
               <a:rPr lang="es-ES_tradnl" smtClean="0"/>
-              <a:t>24/05/2026</a:t>
+              <a:t>25/05/2026</a:t>
             </a:fld>
             <a:endParaRPr lang="es-ES_tradnl"/>
           </a:p>
@@ -2724,7 +2729,7 @@
           <a:p>
             <a:fld id="{B7A280E0-7F35-E648-A499-767250BB567F}" type="datetimeFigureOut">
               <a:rPr lang="es-ES_tradnl" smtClean="0"/>
-              <a:t>24/05/2026</a:t>
+              <a:t>25/05/2026</a:t>
             </a:fld>
             <a:endParaRPr lang="es-ES_tradnl"/>
           </a:p>
@@ -2935,7 +2940,7 @@
           <a:p>
             <a:fld id="{B7A280E0-7F35-E648-A499-767250BB567F}" type="datetimeFigureOut">
               <a:rPr lang="es-ES_tradnl" smtClean="0"/>
-              <a:t>24/05/2026</a:t>
+              <a:t>25/05/2026</a:t>
             </a:fld>
             <a:endParaRPr lang="es-ES_tradnl"/>
           </a:p>
@@ -3643,6 +3648,1601 @@
         <p:cNvPr id="1" name="">
           <a:extLst>
             <a:ext uri="{FF2B5EF4-FFF2-40B4-BE49-F238E27FC236}">
+              <a16:creationId xmlns:a16="http://schemas.microsoft.com/office/drawing/2014/main" id="{7C45A64A-FE20-029D-C8B7-692D2207ED19}"/>
+            </a:ext>
+          </a:extLst>
+        </p:cNvPr>
+        <p:cNvGrpSpPr/>
+        <p:nvPr/>
+      </p:nvGrpSpPr>
+      <p:grpSpPr>
+        <a:xfrm>
+          <a:off x="0" y="0"/>
+          <a:ext cx="0" cy="0"/>
+          <a:chOff x="0" y="0"/>
+          <a:chExt cx="0" cy="0"/>
+        </a:xfrm>
+      </p:grpSpPr>
+      <p:pic>
+        <p:nvPicPr>
+          <p:cNvPr id="4" name="Marcador de contenido 3">
+            <a:extLst>
+              <a:ext uri="{FF2B5EF4-FFF2-40B4-BE49-F238E27FC236}">
+                <a16:creationId xmlns:a16="http://schemas.microsoft.com/office/drawing/2014/main" id="{E3DF2B21-DAB3-AB93-D6A6-AF79F7F38115}"/>
+              </a:ext>
+            </a:extLst>
+          </p:cNvPr>
+          <p:cNvPicPr>
+            <a:picLocks noGrp="1" noChangeAspect="1"/>
+          </p:cNvPicPr>
+          <p:nvPr>
+            <p:ph idx="1"/>
+          </p:nvPr>
+        </p:nvPicPr>
+        <p:blipFill>
+          <a:blip r:embed="rId2">
+            <a:extLst>
+              <a:ext uri="{28A0092B-C50C-407E-A947-70E740481C1C}">
+                <a14:useLocalDpi xmlns:a14="http://schemas.microsoft.com/office/drawing/2010/main" val="0"/>
+              </a:ext>
+            </a:extLst>
+          </a:blip>
+          <a:stretch>
+            <a:fillRect/>
+          </a:stretch>
+        </p:blipFill>
+        <p:spPr>
+          <a:xfrm>
+            <a:off x="0" y="0"/>
+            <a:ext cx="12201128" cy="6863135"/>
+          </a:xfrm>
+        </p:spPr>
+      </p:pic>
+      <p:sp>
+        <p:nvSpPr>
+          <p:cNvPr id="31" name="Rectángulo 30">
+            <a:extLst>
+              <a:ext uri="{FF2B5EF4-FFF2-40B4-BE49-F238E27FC236}">
+                <a16:creationId xmlns:a16="http://schemas.microsoft.com/office/drawing/2014/main" id="{5A14C184-FE17-4DDB-42C9-1F517F4106D8}"/>
+              </a:ext>
+            </a:extLst>
+          </p:cNvPr>
+          <p:cNvSpPr/>
+          <p:nvPr/>
+        </p:nvSpPr>
+        <p:spPr>
+          <a:xfrm>
+            <a:off x="877078" y="583285"/>
+            <a:ext cx="7625655" cy="461665"/>
+          </a:xfrm>
+          <a:prstGeom prst="rect">
+            <a:avLst/>
+          </a:prstGeom>
+        </p:spPr>
+        <p:txBody>
+          <a:bodyPr wrap="square">
+            <a:spAutoFit/>
+          </a:bodyPr>
+          <a:lstStyle/>
+          <a:p>
+            <a:pPr algn="ctr"/>
+            <a:r>
+              <a:rPr lang="es-MX" sz="2400" b="1" dirty="0">
+                <a:solidFill>
+                  <a:schemeClr val="bg1"/>
+                </a:solidFill>
+                <a:latin typeface="Arial" charset="0"/>
+                <a:cs typeface="Arial" charset="0"/>
+              </a:rPr>
+              <a:t>Modelo Clásico 1 — LSTM Unidireccional </a:t>
+            </a:r>
+            <a:endParaRPr lang="es-ES_tradnl" sz="2400" b="1" dirty="0">
+              <a:solidFill>
+                <a:schemeClr val="bg1"/>
+              </a:solidFill>
+              <a:latin typeface="Arial" charset="0"/>
+              <a:cs typeface="Arial" charset="0"/>
+            </a:endParaRPr>
+          </a:p>
+        </p:txBody>
+      </p:sp>
+      <p:graphicFrame>
+        <p:nvGraphicFramePr>
+          <p:cNvPr id="3" name="Tabla 2">
+            <a:extLst>
+              <a:ext uri="{FF2B5EF4-FFF2-40B4-BE49-F238E27FC236}">
+                <a16:creationId xmlns:a16="http://schemas.microsoft.com/office/drawing/2014/main" id="{3F9C8900-793E-EBD8-E4BA-5296782D8E78}"/>
+              </a:ext>
+            </a:extLst>
+          </p:cNvPr>
+          <p:cNvGraphicFramePr>
+            <a:graphicFrameLocks noGrp="1"/>
+          </p:cNvGraphicFramePr>
+          <p:nvPr>
+            <p:extLst>
+              <p:ext uri="{D42A27DB-BD31-4B8C-83A1-F6EECF244321}">
+                <p14:modId xmlns:p14="http://schemas.microsoft.com/office/powerpoint/2010/main" val="1174582248"/>
+              </p:ext>
+            </p:extLst>
+          </p:nvPr>
+        </p:nvGraphicFramePr>
+        <p:xfrm>
+          <a:off x="1012682" y="2009208"/>
+          <a:ext cx="9792167" cy="1524000"/>
+        </p:xfrm>
+        <a:graphic>
+          <a:graphicData uri="http://schemas.openxmlformats.org/drawingml/2006/table">
+            <a:tbl>
+              <a:tblPr>
+                <a:tableStyleId>{8EC20E35-A176-4012-BC5E-935CFFF8708E}</a:tableStyleId>
+              </a:tblPr>
+              <a:tblGrid>
+                <a:gridCol w="763705">
+                  <a:extLst>
+                    <a:ext uri="{9D8B030D-6E8A-4147-A177-3AD203B41FA5}">
+                      <a16:colId xmlns:a16="http://schemas.microsoft.com/office/drawing/2014/main" val="4228599379"/>
+                    </a:ext>
+                  </a:extLst>
+                </a:gridCol>
+                <a:gridCol w="1663413">
+                  <a:extLst>
+                    <a:ext uri="{9D8B030D-6E8A-4147-A177-3AD203B41FA5}">
+                      <a16:colId xmlns:a16="http://schemas.microsoft.com/office/drawing/2014/main" val="4265681645"/>
+                    </a:ext>
+                  </a:extLst>
+                </a:gridCol>
+                <a:gridCol w="2279608">
+                  <a:extLst>
+                    <a:ext uri="{9D8B030D-6E8A-4147-A177-3AD203B41FA5}">
+                      <a16:colId xmlns:a16="http://schemas.microsoft.com/office/drawing/2014/main" val="1293582237"/>
+                    </a:ext>
+                  </a:extLst>
+                </a:gridCol>
+                <a:gridCol w="5085441">
+                  <a:extLst>
+                    <a:ext uri="{9D8B030D-6E8A-4147-A177-3AD203B41FA5}">
+                      <a16:colId xmlns:a16="http://schemas.microsoft.com/office/drawing/2014/main" val="2915196035"/>
+                    </a:ext>
+                  </a:extLst>
+                </a:gridCol>
+              </a:tblGrid>
+              <a:tr h="0">
+                <a:tc>
+                  <a:txBody>
+                    <a:bodyPr/>
+                    <a:lstStyle/>
+                    <a:p>
+                      <a:pPr algn="ctr">
+                        <a:buNone/>
+                      </a:pPr>
+                      <a:r>
+                        <a:rPr lang="es-CO" sz="1000">
+                          <a:effectLst/>
+                        </a:rPr>
+                        <a:t>Capa</a:t>
+                      </a:r>
+                      <a:endParaRPr lang="es-CO" sz="1100">
+                        <a:effectLst/>
+                        <a:latin typeface="Arial" panose="020B0604020202020204" pitchFamily="34" charset="0"/>
+                        <a:ea typeface="Arial" panose="020B0604020202020204" pitchFamily="34" charset="0"/>
+                      </a:endParaRPr>
+                    </a:p>
+                  </a:txBody>
+                  <a:tcPr marL="76200" marR="76200" marT="50800" marB="50800" anchor="ctr"/>
+                </a:tc>
+                <a:tc>
+                  <a:txBody>
+                    <a:bodyPr/>
+                    <a:lstStyle/>
+                    <a:p>
+                      <a:pPr algn="ctr">
+                        <a:buNone/>
+                      </a:pPr>
+                      <a:r>
+                        <a:rPr lang="es-CO" sz="1000">
+                          <a:effectLst/>
+                        </a:rPr>
+                        <a:t>Tipo</a:t>
+                      </a:r>
+                      <a:endParaRPr lang="es-CO" sz="1100">
+                        <a:effectLst/>
+                        <a:latin typeface="Arial" panose="020B0604020202020204" pitchFamily="34" charset="0"/>
+                        <a:ea typeface="Arial" panose="020B0604020202020204" pitchFamily="34" charset="0"/>
+                      </a:endParaRPr>
+                    </a:p>
+                  </a:txBody>
+                  <a:tcPr marL="76200" marR="76200" marT="50800" marB="50800" anchor="ctr"/>
+                </a:tc>
+                <a:tc>
+                  <a:txBody>
+                    <a:bodyPr/>
+                    <a:lstStyle/>
+                    <a:p>
+                      <a:pPr algn="ctr">
+                        <a:buNone/>
+                      </a:pPr>
+                      <a:r>
+                        <a:rPr lang="es-CO" sz="1000">
+                          <a:effectLst/>
+                        </a:rPr>
+                        <a:t>Dimensiones</a:t>
+                      </a:r>
+                      <a:endParaRPr lang="es-CO" sz="1100">
+                        <a:effectLst/>
+                        <a:latin typeface="Arial" panose="020B0604020202020204" pitchFamily="34" charset="0"/>
+                        <a:ea typeface="Arial" panose="020B0604020202020204" pitchFamily="34" charset="0"/>
+                      </a:endParaRPr>
+                    </a:p>
+                  </a:txBody>
+                  <a:tcPr marL="76200" marR="76200" marT="50800" marB="50800" anchor="ctr"/>
+                </a:tc>
+                <a:tc>
+                  <a:txBody>
+                    <a:bodyPr/>
+                    <a:lstStyle/>
+                    <a:p>
+                      <a:pPr algn="ctr">
+                        <a:buNone/>
+                      </a:pPr>
+                      <a:r>
+                        <a:rPr lang="es-CO" sz="1000">
+                          <a:effectLst/>
+                        </a:rPr>
+                        <a:t>Descripción</a:t>
+                      </a:r>
+                      <a:endParaRPr lang="es-CO" sz="1100">
+                        <a:effectLst/>
+                        <a:latin typeface="Arial" panose="020B0604020202020204" pitchFamily="34" charset="0"/>
+                        <a:ea typeface="Arial" panose="020B0604020202020204" pitchFamily="34" charset="0"/>
+                      </a:endParaRPr>
+                    </a:p>
+                  </a:txBody>
+                  <a:tcPr marL="76200" marR="76200" marT="50800" marB="50800" anchor="ctr"/>
+                </a:tc>
+                <a:extLst>
+                  <a:ext uri="{0D108BD9-81ED-4DB2-BD59-A6C34878D82A}">
+                    <a16:rowId xmlns:a16="http://schemas.microsoft.com/office/drawing/2014/main" val="1463678229"/>
+                  </a:ext>
+                </a:extLst>
+              </a:tr>
+              <a:tr h="0">
+                <a:tc>
+                  <a:txBody>
+                    <a:bodyPr/>
+                    <a:lstStyle/>
+                    <a:p>
+                      <a:pPr>
+                        <a:buNone/>
+                      </a:pPr>
+                      <a:r>
+                        <a:rPr lang="es-CO" sz="1000">
+                          <a:effectLst/>
+                        </a:rPr>
+                        <a:t>1</a:t>
+                      </a:r>
+                      <a:endParaRPr lang="es-CO" sz="1100">
+                        <a:effectLst/>
+                        <a:latin typeface="Arial" panose="020B0604020202020204" pitchFamily="34" charset="0"/>
+                        <a:ea typeface="Arial" panose="020B0604020202020204" pitchFamily="34" charset="0"/>
+                      </a:endParaRPr>
+                    </a:p>
+                  </a:txBody>
+                  <a:tcPr marL="76200" marR="76200" marT="50800" marB="50800"/>
+                </a:tc>
+                <a:tc>
+                  <a:txBody>
+                    <a:bodyPr/>
+                    <a:lstStyle/>
+                    <a:p>
+                      <a:pPr algn="ctr">
+                        <a:buNone/>
+                      </a:pPr>
+                      <a:r>
+                        <a:rPr lang="es-CO" sz="1000">
+                          <a:effectLst/>
+                        </a:rPr>
+                        <a:t>Embedding</a:t>
+                      </a:r>
+                      <a:endParaRPr lang="es-CO" sz="1100">
+                        <a:effectLst/>
+                        <a:latin typeface="Arial" panose="020B0604020202020204" pitchFamily="34" charset="0"/>
+                        <a:ea typeface="Arial" panose="020B0604020202020204" pitchFamily="34" charset="0"/>
+                      </a:endParaRPr>
+                    </a:p>
+                  </a:txBody>
+                  <a:tcPr marL="76200" marR="76200" marT="50800" marB="50800"/>
+                </a:tc>
+                <a:tc>
+                  <a:txBody>
+                    <a:bodyPr/>
+                    <a:lstStyle/>
+                    <a:p>
+                      <a:pPr algn="ctr">
+                        <a:buNone/>
+                      </a:pPr>
+                      <a:r>
+                        <a:rPr lang="es-CO" sz="1000">
+                          <a:effectLst/>
+                        </a:rPr>
+                        <a:t>20,002 × 128</a:t>
+                      </a:r>
+                      <a:endParaRPr lang="es-CO" sz="1100">
+                        <a:effectLst/>
+                        <a:latin typeface="Arial" panose="020B0604020202020204" pitchFamily="34" charset="0"/>
+                        <a:ea typeface="Arial" panose="020B0604020202020204" pitchFamily="34" charset="0"/>
+                      </a:endParaRPr>
+                    </a:p>
+                  </a:txBody>
+                  <a:tcPr marL="76200" marR="76200" marT="50800" marB="50800"/>
+                </a:tc>
+                <a:tc>
+                  <a:txBody>
+                    <a:bodyPr/>
+                    <a:lstStyle/>
+                    <a:p>
+                      <a:pPr algn="ctr">
+                        <a:buNone/>
+                      </a:pPr>
+                      <a:r>
+                        <a:rPr lang="es-CO" sz="1000">
+                          <a:effectLst/>
+                        </a:rPr>
+                        <a:t>Entrenables desde cero. padding_idx=0 para ignorar tokens de relleno</a:t>
+                      </a:r>
+                      <a:endParaRPr lang="es-CO" sz="1100">
+                        <a:effectLst/>
+                        <a:latin typeface="Arial" panose="020B0604020202020204" pitchFamily="34" charset="0"/>
+                        <a:ea typeface="Arial" panose="020B0604020202020204" pitchFamily="34" charset="0"/>
+                      </a:endParaRPr>
+                    </a:p>
+                  </a:txBody>
+                  <a:tcPr marL="76200" marR="76200" marT="50800" marB="50800"/>
+                </a:tc>
+                <a:extLst>
+                  <a:ext uri="{0D108BD9-81ED-4DB2-BD59-A6C34878D82A}">
+                    <a16:rowId xmlns:a16="http://schemas.microsoft.com/office/drawing/2014/main" val="2097924961"/>
+                  </a:ext>
+                </a:extLst>
+              </a:tr>
+              <a:tr h="0">
+                <a:tc>
+                  <a:txBody>
+                    <a:bodyPr/>
+                    <a:lstStyle/>
+                    <a:p>
+                      <a:pPr>
+                        <a:buNone/>
+                      </a:pPr>
+                      <a:r>
+                        <a:rPr lang="es-CO" sz="1000">
+                          <a:effectLst/>
+                        </a:rPr>
+                        <a:t>2</a:t>
+                      </a:r>
+                      <a:endParaRPr lang="es-CO" sz="1100">
+                        <a:effectLst/>
+                        <a:latin typeface="Arial" panose="020B0604020202020204" pitchFamily="34" charset="0"/>
+                        <a:ea typeface="Arial" panose="020B0604020202020204" pitchFamily="34" charset="0"/>
+                      </a:endParaRPr>
+                    </a:p>
+                  </a:txBody>
+                  <a:tcPr marL="76200" marR="76200" marT="50800" marB="50800"/>
+                </a:tc>
+                <a:tc>
+                  <a:txBody>
+                    <a:bodyPr/>
+                    <a:lstStyle/>
+                    <a:p>
+                      <a:pPr algn="ctr">
+                        <a:buNone/>
+                      </a:pPr>
+                      <a:r>
+                        <a:rPr lang="es-CO" sz="1000">
+                          <a:effectLst/>
+                        </a:rPr>
+                        <a:t>LSTM</a:t>
+                      </a:r>
+                      <a:endParaRPr lang="es-CO" sz="1100">
+                        <a:effectLst/>
+                        <a:latin typeface="Arial" panose="020B0604020202020204" pitchFamily="34" charset="0"/>
+                        <a:ea typeface="Arial" panose="020B0604020202020204" pitchFamily="34" charset="0"/>
+                      </a:endParaRPr>
+                    </a:p>
+                  </a:txBody>
+                  <a:tcPr marL="76200" marR="76200" marT="50800" marB="50800"/>
+                </a:tc>
+                <a:tc>
+                  <a:txBody>
+                    <a:bodyPr/>
+                    <a:lstStyle/>
+                    <a:p>
+                      <a:pPr algn="ctr">
+                        <a:buNone/>
+                      </a:pPr>
+                      <a:r>
+                        <a:rPr lang="es-CO" sz="1000">
+                          <a:effectLst/>
+                        </a:rPr>
+                        <a:t>128 → 128 (1 capa)</a:t>
+                      </a:r>
+                      <a:endParaRPr lang="es-CO" sz="1100">
+                        <a:effectLst/>
+                        <a:latin typeface="Arial" panose="020B0604020202020204" pitchFamily="34" charset="0"/>
+                        <a:ea typeface="Arial" panose="020B0604020202020204" pitchFamily="34" charset="0"/>
+                      </a:endParaRPr>
+                    </a:p>
+                  </a:txBody>
+                  <a:tcPr marL="76200" marR="76200" marT="50800" marB="50800"/>
+                </a:tc>
+                <a:tc>
+                  <a:txBody>
+                    <a:bodyPr/>
+                    <a:lstStyle/>
+                    <a:p>
+                      <a:pPr algn="ctr">
+                        <a:buNone/>
+                      </a:pPr>
+                      <a:r>
+                        <a:rPr lang="es-CO" sz="1000">
+                          <a:effectLst/>
+                        </a:rPr>
+                        <a:t>Unidireccional. Se toma el hidden state del último token no-padding</a:t>
+                      </a:r>
+                      <a:endParaRPr lang="es-CO" sz="1100">
+                        <a:effectLst/>
+                        <a:latin typeface="Arial" panose="020B0604020202020204" pitchFamily="34" charset="0"/>
+                        <a:ea typeface="Arial" panose="020B0604020202020204" pitchFamily="34" charset="0"/>
+                      </a:endParaRPr>
+                    </a:p>
+                  </a:txBody>
+                  <a:tcPr marL="76200" marR="76200" marT="50800" marB="50800"/>
+                </a:tc>
+                <a:extLst>
+                  <a:ext uri="{0D108BD9-81ED-4DB2-BD59-A6C34878D82A}">
+                    <a16:rowId xmlns:a16="http://schemas.microsoft.com/office/drawing/2014/main" val="2179560515"/>
+                  </a:ext>
+                </a:extLst>
+              </a:tr>
+              <a:tr h="0">
+                <a:tc>
+                  <a:txBody>
+                    <a:bodyPr/>
+                    <a:lstStyle/>
+                    <a:p>
+                      <a:pPr>
+                        <a:buNone/>
+                      </a:pPr>
+                      <a:r>
+                        <a:rPr lang="es-CO" sz="1000">
+                          <a:effectLst/>
+                        </a:rPr>
+                        <a:t>3</a:t>
+                      </a:r>
+                      <a:endParaRPr lang="es-CO" sz="1100">
+                        <a:effectLst/>
+                        <a:latin typeface="Arial" panose="020B0604020202020204" pitchFamily="34" charset="0"/>
+                        <a:ea typeface="Arial" panose="020B0604020202020204" pitchFamily="34" charset="0"/>
+                      </a:endParaRPr>
+                    </a:p>
+                  </a:txBody>
+                  <a:tcPr marL="76200" marR="76200" marT="50800" marB="50800"/>
+                </a:tc>
+                <a:tc>
+                  <a:txBody>
+                    <a:bodyPr/>
+                    <a:lstStyle/>
+                    <a:p>
+                      <a:pPr algn="ctr">
+                        <a:buNone/>
+                      </a:pPr>
+                      <a:r>
+                        <a:rPr lang="es-CO" sz="1000">
+                          <a:effectLst/>
+                        </a:rPr>
+                        <a:t>Linear + ReLU</a:t>
+                      </a:r>
+                      <a:endParaRPr lang="es-CO" sz="1100">
+                        <a:effectLst/>
+                        <a:latin typeface="Arial" panose="020B0604020202020204" pitchFamily="34" charset="0"/>
+                        <a:ea typeface="Arial" panose="020B0604020202020204" pitchFamily="34" charset="0"/>
+                      </a:endParaRPr>
+                    </a:p>
+                  </a:txBody>
+                  <a:tcPr marL="76200" marR="76200" marT="50800" marB="50800"/>
+                </a:tc>
+                <a:tc>
+                  <a:txBody>
+                    <a:bodyPr/>
+                    <a:lstStyle/>
+                    <a:p>
+                      <a:pPr algn="ctr">
+                        <a:buNone/>
+                      </a:pPr>
+                      <a:r>
+                        <a:rPr lang="es-CO" sz="1000">
+                          <a:effectLst/>
+                        </a:rPr>
+                        <a:t>128 → 64</a:t>
+                      </a:r>
+                      <a:endParaRPr lang="es-CO" sz="1100">
+                        <a:effectLst/>
+                        <a:latin typeface="Arial" panose="020B0604020202020204" pitchFamily="34" charset="0"/>
+                        <a:ea typeface="Arial" panose="020B0604020202020204" pitchFamily="34" charset="0"/>
+                      </a:endParaRPr>
+                    </a:p>
+                  </a:txBody>
+                  <a:tcPr marL="76200" marR="76200" marT="50800" marB="50800"/>
+                </a:tc>
+                <a:tc>
+                  <a:txBody>
+                    <a:bodyPr/>
+                    <a:lstStyle/>
+                    <a:p>
+                      <a:pPr algn="ctr">
+                        <a:buNone/>
+                      </a:pPr>
+                      <a:r>
+                        <a:rPr lang="es-CO" sz="1000">
+                          <a:effectLst/>
+                        </a:rPr>
+                        <a:t>Capa de reducción con activación ReLU</a:t>
+                      </a:r>
+                      <a:endParaRPr lang="es-CO" sz="1100">
+                        <a:effectLst/>
+                        <a:latin typeface="Arial" panose="020B0604020202020204" pitchFamily="34" charset="0"/>
+                        <a:ea typeface="Arial" panose="020B0604020202020204" pitchFamily="34" charset="0"/>
+                      </a:endParaRPr>
+                    </a:p>
+                  </a:txBody>
+                  <a:tcPr marL="76200" marR="76200" marT="50800" marB="50800"/>
+                </a:tc>
+                <a:extLst>
+                  <a:ext uri="{0D108BD9-81ED-4DB2-BD59-A6C34878D82A}">
+                    <a16:rowId xmlns:a16="http://schemas.microsoft.com/office/drawing/2014/main" val="97985812"/>
+                  </a:ext>
+                </a:extLst>
+              </a:tr>
+              <a:tr h="0">
+                <a:tc>
+                  <a:txBody>
+                    <a:bodyPr/>
+                    <a:lstStyle/>
+                    <a:p>
+                      <a:pPr>
+                        <a:buNone/>
+                      </a:pPr>
+                      <a:r>
+                        <a:rPr lang="es-CO" sz="1000">
+                          <a:effectLst/>
+                        </a:rPr>
+                        <a:t>4</a:t>
+                      </a:r>
+                      <a:endParaRPr lang="es-CO" sz="1100">
+                        <a:effectLst/>
+                        <a:latin typeface="Arial" panose="020B0604020202020204" pitchFamily="34" charset="0"/>
+                        <a:ea typeface="Arial" panose="020B0604020202020204" pitchFamily="34" charset="0"/>
+                      </a:endParaRPr>
+                    </a:p>
+                  </a:txBody>
+                  <a:tcPr marL="76200" marR="76200" marT="50800" marB="50800"/>
+                </a:tc>
+                <a:tc>
+                  <a:txBody>
+                    <a:bodyPr/>
+                    <a:lstStyle/>
+                    <a:p>
+                      <a:pPr algn="ctr">
+                        <a:buNone/>
+                      </a:pPr>
+                      <a:r>
+                        <a:rPr lang="es-CO" sz="1000">
+                          <a:effectLst/>
+                        </a:rPr>
+                        <a:t>Dropout</a:t>
+                      </a:r>
+                      <a:endParaRPr lang="es-CO" sz="1100">
+                        <a:effectLst/>
+                        <a:latin typeface="Arial" panose="020B0604020202020204" pitchFamily="34" charset="0"/>
+                        <a:ea typeface="Arial" panose="020B0604020202020204" pitchFamily="34" charset="0"/>
+                      </a:endParaRPr>
+                    </a:p>
+                  </a:txBody>
+                  <a:tcPr marL="76200" marR="76200" marT="50800" marB="50800"/>
+                </a:tc>
+                <a:tc>
+                  <a:txBody>
+                    <a:bodyPr/>
+                    <a:lstStyle/>
+                    <a:p>
+                      <a:pPr algn="ctr">
+                        <a:buNone/>
+                      </a:pPr>
+                      <a:r>
+                        <a:rPr lang="es-CO" sz="1000">
+                          <a:effectLst/>
+                        </a:rPr>
+                        <a:t>p=0.3</a:t>
+                      </a:r>
+                      <a:endParaRPr lang="es-CO" sz="1100">
+                        <a:effectLst/>
+                        <a:latin typeface="Arial" panose="020B0604020202020204" pitchFamily="34" charset="0"/>
+                        <a:ea typeface="Arial" panose="020B0604020202020204" pitchFamily="34" charset="0"/>
+                      </a:endParaRPr>
+                    </a:p>
+                  </a:txBody>
+                  <a:tcPr marL="76200" marR="76200" marT="50800" marB="50800"/>
+                </a:tc>
+                <a:tc>
+                  <a:txBody>
+                    <a:bodyPr/>
+                    <a:lstStyle/>
+                    <a:p>
+                      <a:pPr algn="ctr">
+                        <a:buNone/>
+                      </a:pPr>
+                      <a:r>
+                        <a:rPr lang="es-CO" sz="1000">
+                          <a:effectLst/>
+                        </a:rPr>
+                        <a:t>Regularización para prevenir overfitting</a:t>
+                      </a:r>
+                      <a:endParaRPr lang="es-CO" sz="1100">
+                        <a:effectLst/>
+                        <a:latin typeface="Arial" panose="020B0604020202020204" pitchFamily="34" charset="0"/>
+                        <a:ea typeface="Arial" panose="020B0604020202020204" pitchFamily="34" charset="0"/>
+                      </a:endParaRPr>
+                    </a:p>
+                  </a:txBody>
+                  <a:tcPr marL="76200" marR="76200" marT="50800" marB="50800"/>
+                </a:tc>
+                <a:extLst>
+                  <a:ext uri="{0D108BD9-81ED-4DB2-BD59-A6C34878D82A}">
+                    <a16:rowId xmlns:a16="http://schemas.microsoft.com/office/drawing/2014/main" val="811060634"/>
+                  </a:ext>
+                </a:extLst>
+              </a:tr>
+              <a:tr h="0">
+                <a:tc>
+                  <a:txBody>
+                    <a:bodyPr/>
+                    <a:lstStyle/>
+                    <a:p>
+                      <a:pPr>
+                        <a:buNone/>
+                      </a:pPr>
+                      <a:r>
+                        <a:rPr lang="es-CO" sz="1000">
+                          <a:effectLst/>
+                        </a:rPr>
+                        <a:t>5</a:t>
+                      </a:r>
+                      <a:endParaRPr lang="es-CO" sz="1100">
+                        <a:effectLst/>
+                        <a:latin typeface="Arial" panose="020B0604020202020204" pitchFamily="34" charset="0"/>
+                        <a:ea typeface="Arial" panose="020B0604020202020204" pitchFamily="34" charset="0"/>
+                      </a:endParaRPr>
+                    </a:p>
+                  </a:txBody>
+                  <a:tcPr marL="76200" marR="76200" marT="50800" marB="50800"/>
+                </a:tc>
+                <a:tc>
+                  <a:txBody>
+                    <a:bodyPr/>
+                    <a:lstStyle/>
+                    <a:p>
+                      <a:pPr algn="ctr">
+                        <a:buNone/>
+                      </a:pPr>
+                      <a:r>
+                        <a:rPr lang="es-CO" sz="1000">
+                          <a:effectLst/>
+                        </a:rPr>
+                        <a:t>Linear (logits)</a:t>
+                      </a:r>
+                      <a:endParaRPr lang="es-CO" sz="1100">
+                        <a:effectLst/>
+                        <a:latin typeface="Arial" panose="020B0604020202020204" pitchFamily="34" charset="0"/>
+                        <a:ea typeface="Arial" panose="020B0604020202020204" pitchFamily="34" charset="0"/>
+                      </a:endParaRPr>
+                    </a:p>
+                  </a:txBody>
+                  <a:tcPr marL="76200" marR="76200" marT="50800" marB="50800"/>
+                </a:tc>
+                <a:tc>
+                  <a:txBody>
+                    <a:bodyPr/>
+                    <a:lstStyle/>
+                    <a:p>
+                      <a:pPr algn="ctr">
+                        <a:buNone/>
+                      </a:pPr>
+                      <a:r>
+                        <a:rPr lang="es-CO" sz="1000">
+                          <a:effectLst/>
+                        </a:rPr>
+                        <a:t>64 → 5</a:t>
+                      </a:r>
+                      <a:endParaRPr lang="es-CO" sz="1100">
+                        <a:effectLst/>
+                        <a:latin typeface="Arial" panose="020B0604020202020204" pitchFamily="34" charset="0"/>
+                        <a:ea typeface="Arial" panose="020B0604020202020204" pitchFamily="34" charset="0"/>
+                      </a:endParaRPr>
+                    </a:p>
+                  </a:txBody>
+                  <a:tcPr marL="76200" marR="76200" marT="50800" marB="50800"/>
+                </a:tc>
+                <a:tc>
+                  <a:txBody>
+                    <a:bodyPr/>
+                    <a:lstStyle/>
+                    <a:p>
+                      <a:pPr algn="ctr">
+                        <a:buNone/>
+                      </a:pPr>
+                      <a:r>
+                        <a:rPr lang="es-CO" sz="1000" dirty="0">
+                          <a:effectLst/>
+                        </a:rPr>
+                        <a:t>Capa de clasificación final</a:t>
+                      </a:r>
+                      <a:endParaRPr lang="es-CO" sz="1100" dirty="0">
+                        <a:effectLst/>
+                        <a:latin typeface="Arial" panose="020B0604020202020204" pitchFamily="34" charset="0"/>
+                        <a:ea typeface="Arial" panose="020B0604020202020204" pitchFamily="34" charset="0"/>
+                      </a:endParaRPr>
+                    </a:p>
+                  </a:txBody>
+                  <a:tcPr marL="76200" marR="76200" marT="50800" marB="50800"/>
+                </a:tc>
+                <a:extLst>
+                  <a:ext uri="{0D108BD9-81ED-4DB2-BD59-A6C34878D82A}">
+                    <a16:rowId xmlns:a16="http://schemas.microsoft.com/office/drawing/2014/main" val="3341753289"/>
+                  </a:ext>
+                </a:extLst>
+              </a:tr>
+            </a:tbl>
+          </a:graphicData>
+        </a:graphic>
+      </p:graphicFrame>
+      <p:graphicFrame>
+        <p:nvGraphicFramePr>
+          <p:cNvPr id="5" name="Tabla 4">
+            <a:extLst>
+              <a:ext uri="{FF2B5EF4-FFF2-40B4-BE49-F238E27FC236}">
+                <a16:creationId xmlns:a16="http://schemas.microsoft.com/office/drawing/2014/main" id="{9ECBF916-2564-0D3B-6E16-D2B78DE4BCE4}"/>
+              </a:ext>
+            </a:extLst>
+          </p:cNvPr>
+          <p:cNvGraphicFramePr>
+            <a:graphicFrameLocks noGrp="1"/>
+          </p:cNvGraphicFramePr>
+          <p:nvPr>
+            <p:extLst>
+              <p:ext uri="{D42A27DB-BD31-4B8C-83A1-F6EECF244321}">
+                <p14:modId xmlns:p14="http://schemas.microsoft.com/office/powerpoint/2010/main" val="365668460"/>
+              </p:ext>
+            </p:extLst>
+          </p:nvPr>
+        </p:nvGraphicFramePr>
+        <p:xfrm>
+          <a:off x="1012681" y="3733298"/>
+          <a:ext cx="9792168" cy="2794000"/>
+        </p:xfrm>
+        <a:graphic>
+          <a:graphicData uri="http://schemas.openxmlformats.org/drawingml/2006/table">
+            <a:tbl>
+              <a:tblPr>
+                <a:tableStyleId>{8EC20E35-A176-4012-BC5E-935CFFF8708E}</a:tableStyleId>
+              </a:tblPr>
+              <a:tblGrid>
+                <a:gridCol w="4896084">
+                  <a:extLst>
+                    <a:ext uri="{9D8B030D-6E8A-4147-A177-3AD203B41FA5}">
+                      <a16:colId xmlns:a16="http://schemas.microsoft.com/office/drawing/2014/main" val="3188416917"/>
+                    </a:ext>
+                  </a:extLst>
+                </a:gridCol>
+                <a:gridCol w="4896084">
+                  <a:extLst>
+                    <a:ext uri="{9D8B030D-6E8A-4147-A177-3AD203B41FA5}">
+                      <a16:colId xmlns:a16="http://schemas.microsoft.com/office/drawing/2014/main" val="2155380259"/>
+                    </a:ext>
+                  </a:extLst>
+                </a:gridCol>
+              </a:tblGrid>
+              <a:tr h="0">
+                <a:tc>
+                  <a:txBody>
+                    <a:bodyPr/>
+                    <a:lstStyle/>
+                    <a:p>
+                      <a:pPr algn="ctr">
+                        <a:buNone/>
+                      </a:pPr>
+                      <a:r>
+                        <a:rPr lang="es-CO" sz="1000">
+                          <a:effectLst/>
+                        </a:rPr>
+                        <a:t>Hiperparámetro</a:t>
+                      </a:r>
+                      <a:endParaRPr lang="es-CO" sz="1100">
+                        <a:effectLst/>
+                        <a:latin typeface="Arial" panose="020B0604020202020204" pitchFamily="34" charset="0"/>
+                        <a:ea typeface="Arial" panose="020B0604020202020204" pitchFamily="34" charset="0"/>
+                      </a:endParaRPr>
+                    </a:p>
+                  </a:txBody>
+                  <a:tcPr marL="76200" marR="76200" marT="50800" marB="50800" anchor="ctr"/>
+                </a:tc>
+                <a:tc>
+                  <a:txBody>
+                    <a:bodyPr/>
+                    <a:lstStyle/>
+                    <a:p>
+                      <a:pPr algn="ctr">
+                        <a:buNone/>
+                      </a:pPr>
+                      <a:r>
+                        <a:rPr lang="es-CO" sz="1000">
+                          <a:effectLst/>
+                        </a:rPr>
+                        <a:t>Valor (versión definitiva)</a:t>
+                      </a:r>
+                      <a:endParaRPr lang="es-CO" sz="1100">
+                        <a:effectLst/>
+                        <a:latin typeface="Arial" panose="020B0604020202020204" pitchFamily="34" charset="0"/>
+                        <a:ea typeface="Arial" panose="020B0604020202020204" pitchFamily="34" charset="0"/>
+                      </a:endParaRPr>
+                    </a:p>
+                  </a:txBody>
+                  <a:tcPr marL="76200" marR="76200" marT="50800" marB="50800" anchor="ctr"/>
+                </a:tc>
+                <a:extLst>
+                  <a:ext uri="{0D108BD9-81ED-4DB2-BD59-A6C34878D82A}">
+                    <a16:rowId xmlns:a16="http://schemas.microsoft.com/office/drawing/2014/main" val="2684361449"/>
+                  </a:ext>
+                </a:extLst>
+              </a:tr>
+              <a:tr h="0">
+                <a:tc>
+                  <a:txBody>
+                    <a:bodyPr/>
+                    <a:lstStyle/>
+                    <a:p>
+                      <a:pPr>
+                        <a:buNone/>
+                      </a:pPr>
+                      <a:r>
+                        <a:rPr lang="es-CO" sz="1000">
+                          <a:effectLst/>
+                        </a:rPr>
+                        <a:t>Embedding dim</a:t>
+                      </a:r>
+                      <a:endParaRPr lang="es-CO" sz="1100">
+                        <a:effectLst/>
+                        <a:latin typeface="Arial" panose="020B0604020202020204" pitchFamily="34" charset="0"/>
+                        <a:ea typeface="Arial" panose="020B0604020202020204" pitchFamily="34" charset="0"/>
+                      </a:endParaRPr>
+                    </a:p>
+                  </a:txBody>
+                  <a:tcPr marL="76200" marR="76200" marT="50800" marB="50800"/>
+                </a:tc>
+                <a:tc>
+                  <a:txBody>
+                    <a:bodyPr/>
+                    <a:lstStyle/>
+                    <a:p>
+                      <a:pPr algn="ctr">
+                        <a:buNone/>
+                      </a:pPr>
+                      <a:r>
+                        <a:rPr lang="es-CO" sz="1000">
+                          <a:effectLst/>
+                        </a:rPr>
+                        <a:t>128</a:t>
+                      </a:r>
+                      <a:endParaRPr lang="es-CO" sz="1100">
+                        <a:effectLst/>
+                        <a:latin typeface="Arial" panose="020B0604020202020204" pitchFamily="34" charset="0"/>
+                        <a:ea typeface="Arial" panose="020B0604020202020204" pitchFamily="34" charset="0"/>
+                      </a:endParaRPr>
+                    </a:p>
+                  </a:txBody>
+                  <a:tcPr marL="76200" marR="76200" marT="50800" marB="50800"/>
+                </a:tc>
+                <a:extLst>
+                  <a:ext uri="{0D108BD9-81ED-4DB2-BD59-A6C34878D82A}">
+                    <a16:rowId xmlns:a16="http://schemas.microsoft.com/office/drawing/2014/main" val="140633709"/>
+                  </a:ext>
+                </a:extLst>
+              </a:tr>
+              <a:tr h="0">
+                <a:tc>
+                  <a:txBody>
+                    <a:bodyPr/>
+                    <a:lstStyle/>
+                    <a:p>
+                      <a:pPr>
+                        <a:buNone/>
+                      </a:pPr>
+                      <a:r>
+                        <a:rPr lang="es-CO" sz="1000" dirty="0">
+                          <a:effectLst/>
+                        </a:rPr>
+                        <a:t>Hidden </a:t>
+                      </a:r>
+                      <a:r>
+                        <a:rPr lang="es-CO" sz="1000" dirty="0" err="1">
+                          <a:effectLst/>
+                        </a:rPr>
+                        <a:t>size</a:t>
+                      </a:r>
+                      <a:endParaRPr lang="es-CO" sz="1100" dirty="0">
+                        <a:effectLst/>
+                        <a:latin typeface="Arial" panose="020B0604020202020204" pitchFamily="34" charset="0"/>
+                        <a:ea typeface="Arial" panose="020B0604020202020204" pitchFamily="34" charset="0"/>
+                      </a:endParaRPr>
+                    </a:p>
+                  </a:txBody>
+                  <a:tcPr marL="76200" marR="76200" marT="50800" marB="50800"/>
+                </a:tc>
+                <a:tc>
+                  <a:txBody>
+                    <a:bodyPr/>
+                    <a:lstStyle/>
+                    <a:p>
+                      <a:pPr algn="ctr">
+                        <a:buNone/>
+                      </a:pPr>
+                      <a:r>
+                        <a:rPr lang="es-CO" sz="1000">
+                          <a:effectLst/>
+                        </a:rPr>
+                        <a:t>128</a:t>
+                      </a:r>
+                      <a:endParaRPr lang="es-CO" sz="1100">
+                        <a:effectLst/>
+                        <a:latin typeface="Arial" panose="020B0604020202020204" pitchFamily="34" charset="0"/>
+                        <a:ea typeface="Arial" panose="020B0604020202020204" pitchFamily="34" charset="0"/>
+                      </a:endParaRPr>
+                    </a:p>
+                  </a:txBody>
+                  <a:tcPr marL="76200" marR="76200" marT="50800" marB="50800"/>
+                </a:tc>
+                <a:extLst>
+                  <a:ext uri="{0D108BD9-81ED-4DB2-BD59-A6C34878D82A}">
+                    <a16:rowId xmlns:a16="http://schemas.microsoft.com/office/drawing/2014/main" val="2265269115"/>
+                  </a:ext>
+                </a:extLst>
+              </a:tr>
+              <a:tr h="0">
+                <a:tc>
+                  <a:txBody>
+                    <a:bodyPr/>
+                    <a:lstStyle/>
+                    <a:p>
+                      <a:pPr>
+                        <a:buNone/>
+                      </a:pPr>
+                      <a:r>
+                        <a:rPr lang="es-CO" sz="1000">
+                          <a:effectLst/>
+                        </a:rPr>
+                        <a:t>Dropout</a:t>
+                      </a:r>
+                      <a:endParaRPr lang="es-CO" sz="1100">
+                        <a:effectLst/>
+                        <a:latin typeface="Arial" panose="020B0604020202020204" pitchFamily="34" charset="0"/>
+                        <a:ea typeface="Arial" panose="020B0604020202020204" pitchFamily="34" charset="0"/>
+                      </a:endParaRPr>
+                    </a:p>
+                  </a:txBody>
+                  <a:tcPr marL="76200" marR="76200" marT="50800" marB="50800"/>
+                </a:tc>
+                <a:tc>
+                  <a:txBody>
+                    <a:bodyPr/>
+                    <a:lstStyle/>
+                    <a:p>
+                      <a:pPr algn="ctr">
+                        <a:buNone/>
+                      </a:pPr>
+                      <a:r>
+                        <a:rPr lang="es-CO" sz="1000">
+                          <a:effectLst/>
+                        </a:rPr>
+                        <a:t>0.3</a:t>
+                      </a:r>
+                      <a:endParaRPr lang="es-CO" sz="1100">
+                        <a:effectLst/>
+                        <a:latin typeface="Arial" panose="020B0604020202020204" pitchFamily="34" charset="0"/>
+                        <a:ea typeface="Arial" panose="020B0604020202020204" pitchFamily="34" charset="0"/>
+                      </a:endParaRPr>
+                    </a:p>
+                  </a:txBody>
+                  <a:tcPr marL="76200" marR="76200" marT="50800" marB="50800"/>
+                </a:tc>
+                <a:extLst>
+                  <a:ext uri="{0D108BD9-81ED-4DB2-BD59-A6C34878D82A}">
+                    <a16:rowId xmlns:a16="http://schemas.microsoft.com/office/drawing/2014/main" val="3422328683"/>
+                  </a:ext>
+                </a:extLst>
+              </a:tr>
+              <a:tr h="0">
+                <a:tc>
+                  <a:txBody>
+                    <a:bodyPr/>
+                    <a:lstStyle/>
+                    <a:p>
+                      <a:pPr>
+                        <a:buNone/>
+                      </a:pPr>
+                      <a:r>
+                        <a:rPr lang="es-CO" sz="1000">
+                          <a:effectLst/>
+                        </a:rPr>
+                        <a:t>Learning rate</a:t>
+                      </a:r>
+                      <a:endParaRPr lang="es-CO" sz="1100">
+                        <a:effectLst/>
+                        <a:latin typeface="Arial" panose="020B0604020202020204" pitchFamily="34" charset="0"/>
+                        <a:ea typeface="Arial" panose="020B0604020202020204" pitchFamily="34" charset="0"/>
+                      </a:endParaRPr>
+                    </a:p>
+                  </a:txBody>
+                  <a:tcPr marL="76200" marR="76200" marT="50800" marB="50800"/>
+                </a:tc>
+                <a:tc>
+                  <a:txBody>
+                    <a:bodyPr/>
+                    <a:lstStyle/>
+                    <a:p>
+                      <a:pPr algn="ctr">
+                        <a:buNone/>
+                      </a:pPr>
+                      <a:r>
+                        <a:rPr lang="es-CO" sz="1000">
+                          <a:effectLst/>
+                        </a:rPr>
+                        <a:t>3e-4</a:t>
+                      </a:r>
+                      <a:endParaRPr lang="es-CO" sz="1100">
+                        <a:effectLst/>
+                        <a:latin typeface="Arial" panose="020B0604020202020204" pitchFamily="34" charset="0"/>
+                        <a:ea typeface="Arial" panose="020B0604020202020204" pitchFamily="34" charset="0"/>
+                      </a:endParaRPr>
+                    </a:p>
+                  </a:txBody>
+                  <a:tcPr marL="76200" marR="76200" marT="50800" marB="50800"/>
+                </a:tc>
+                <a:extLst>
+                  <a:ext uri="{0D108BD9-81ED-4DB2-BD59-A6C34878D82A}">
+                    <a16:rowId xmlns:a16="http://schemas.microsoft.com/office/drawing/2014/main" val="289188683"/>
+                  </a:ext>
+                </a:extLst>
+              </a:tr>
+              <a:tr h="0">
+                <a:tc>
+                  <a:txBody>
+                    <a:bodyPr/>
+                    <a:lstStyle/>
+                    <a:p>
+                      <a:pPr>
+                        <a:buNone/>
+                      </a:pPr>
+                      <a:r>
+                        <a:rPr lang="es-CO" sz="1000">
+                          <a:effectLst/>
+                        </a:rPr>
+                        <a:t>MAX_LEN</a:t>
+                      </a:r>
+                      <a:endParaRPr lang="es-CO" sz="1100">
+                        <a:effectLst/>
+                        <a:latin typeface="Arial" panose="020B0604020202020204" pitchFamily="34" charset="0"/>
+                        <a:ea typeface="Arial" panose="020B0604020202020204" pitchFamily="34" charset="0"/>
+                      </a:endParaRPr>
+                    </a:p>
+                  </a:txBody>
+                  <a:tcPr marL="76200" marR="76200" marT="50800" marB="50800"/>
+                </a:tc>
+                <a:tc>
+                  <a:txBody>
+                    <a:bodyPr/>
+                    <a:lstStyle/>
+                    <a:p>
+                      <a:pPr algn="ctr">
+                        <a:buNone/>
+                      </a:pPr>
+                      <a:r>
+                        <a:rPr lang="es-CO" sz="1000">
+                          <a:effectLst/>
+                        </a:rPr>
+                        <a:t>150</a:t>
+                      </a:r>
+                      <a:endParaRPr lang="es-CO" sz="1100">
+                        <a:effectLst/>
+                        <a:latin typeface="Arial" panose="020B0604020202020204" pitchFamily="34" charset="0"/>
+                        <a:ea typeface="Arial" panose="020B0604020202020204" pitchFamily="34" charset="0"/>
+                      </a:endParaRPr>
+                    </a:p>
+                  </a:txBody>
+                  <a:tcPr marL="76200" marR="76200" marT="50800" marB="50800"/>
+                </a:tc>
+                <a:extLst>
+                  <a:ext uri="{0D108BD9-81ED-4DB2-BD59-A6C34878D82A}">
+                    <a16:rowId xmlns:a16="http://schemas.microsoft.com/office/drawing/2014/main" val="3287636937"/>
+                  </a:ext>
+                </a:extLst>
+              </a:tr>
+              <a:tr h="0">
+                <a:tc>
+                  <a:txBody>
+                    <a:bodyPr/>
+                    <a:lstStyle/>
+                    <a:p>
+                      <a:pPr>
+                        <a:buNone/>
+                      </a:pPr>
+                      <a:r>
+                        <a:rPr lang="es-CO" sz="1000">
+                          <a:effectLst/>
+                        </a:rPr>
+                        <a:t>Class weights</a:t>
+                      </a:r>
+                      <a:endParaRPr lang="es-CO" sz="1100">
+                        <a:effectLst/>
+                        <a:latin typeface="Arial" panose="020B0604020202020204" pitchFamily="34" charset="0"/>
+                        <a:ea typeface="Arial" panose="020B0604020202020204" pitchFamily="34" charset="0"/>
+                      </a:endParaRPr>
+                    </a:p>
+                  </a:txBody>
+                  <a:tcPr marL="76200" marR="76200" marT="50800" marB="50800"/>
+                </a:tc>
+                <a:tc>
+                  <a:txBody>
+                    <a:bodyPr/>
+                    <a:lstStyle/>
+                    <a:p>
+                      <a:pPr algn="ctr">
+                        <a:buNone/>
+                      </a:pPr>
+                      <a:r>
+                        <a:rPr lang="es-CO" sz="1000">
+                          <a:effectLst/>
+                        </a:rPr>
+                        <a:t>No</a:t>
+                      </a:r>
+                      <a:endParaRPr lang="es-CO" sz="1100">
+                        <a:effectLst/>
+                        <a:latin typeface="Arial" panose="020B0604020202020204" pitchFamily="34" charset="0"/>
+                        <a:ea typeface="Arial" panose="020B0604020202020204" pitchFamily="34" charset="0"/>
+                      </a:endParaRPr>
+                    </a:p>
+                  </a:txBody>
+                  <a:tcPr marL="76200" marR="76200" marT="50800" marB="50800"/>
+                </a:tc>
+                <a:extLst>
+                  <a:ext uri="{0D108BD9-81ED-4DB2-BD59-A6C34878D82A}">
+                    <a16:rowId xmlns:a16="http://schemas.microsoft.com/office/drawing/2014/main" val="1613163192"/>
+                  </a:ext>
+                </a:extLst>
+              </a:tr>
+              <a:tr h="0">
+                <a:tc>
+                  <a:txBody>
+                    <a:bodyPr/>
+                    <a:lstStyle/>
+                    <a:p>
+                      <a:pPr>
+                        <a:buNone/>
+                      </a:pPr>
+                      <a:r>
+                        <a:rPr lang="es-CO" sz="1000">
+                          <a:effectLst/>
+                        </a:rPr>
+                        <a:t>Épocas ejecutadas</a:t>
+                      </a:r>
+                      <a:endParaRPr lang="es-CO" sz="1100">
+                        <a:effectLst/>
+                        <a:latin typeface="Arial" panose="020B0604020202020204" pitchFamily="34" charset="0"/>
+                        <a:ea typeface="Arial" panose="020B0604020202020204" pitchFamily="34" charset="0"/>
+                      </a:endParaRPr>
+                    </a:p>
+                  </a:txBody>
+                  <a:tcPr marL="76200" marR="76200" marT="50800" marB="50800"/>
+                </a:tc>
+                <a:tc>
+                  <a:txBody>
+                    <a:bodyPr/>
+                    <a:lstStyle/>
+                    <a:p>
+                      <a:pPr algn="ctr">
+                        <a:buNone/>
+                      </a:pPr>
+                      <a:r>
+                        <a:rPr lang="es-CO" sz="1000">
+                          <a:effectLst/>
+                        </a:rPr>
+                        <a:t>24</a:t>
+                      </a:r>
+                      <a:endParaRPr lang="es-CO" sz="1100">
+                        <a:effectLst/>
+                        <a:latin typeface="Arial" panose="020B0604020202020204" pitchFamily="34" charset="0"/>
+                        <a:ea typeface="Arial" panose="020B0604020202020204" pitchFamily="34" charset="0"/>
+                      </a:endParaRPr>
+                    </a:p>
+                  </a:txBody>
+                  <a:tcPr marL="76200" marR="76200" marT="50800" marB="50800"/>
+                </a:tc>
+                <a:extLst>
+                  <a:ext uri="{0D108BD9-81ED-4DB2-BD59-A6C34878D82A}">
+                    <a16:rowId xmlns:a16="http://schemas.microsoft.com/office/drawing/2014/main" val="977724792"/>
+                  </a:ext>
+                </a:extLst>
+              </a:tr>
+              <a:tr h="0">
+                <a:tc>
+                  <a:txBody>
+                    <a:bodyPr/>
+                    <a:lstStyle/>
+                    <a:p>
+                      <a:pPr>
+                        <a:buNone/>
+                      </a:pPr>
+                      <a:r>
+                        <a:rPr lang="es-CO" sz="1000">
+                          <a:effectLst/>
+                        </a:rPr>
+                        <a:t>Mejor época</a:t>
+                      </a:r>
+                      <a:endParaRPr lang="es-CO" sz="1100">
+                        <a:effectLst/>
+                        <a:latin typeface="Arial" panose="020B0604020202020204" pitchFamily="34" charset="0"/>
+                        <a:ea typeface="Arial" panose="020B0604020202020204" pitchFamily="34" charset="0"/>
+                      </a:endParaRPr>
+                    </a:p>
+                  </a:txBody>
+                  <a:tcPr marL="76200" marR="76200" marT="50800" marB="50800"/>
+                </a:tc>
+                <a:tc>
+                  <a:txBody>
+                    <a:bodyPr/>
+                    <a:lstStyle/>
+                    <a:p>
+                      <a:pPr algn="ctr">
+                        <a:buNone/>
+                      </a:pPr>
+                      <a:r>
+                        <a:rPr lang="es-CO" sz="1000">
+                          <a:effectLst/>
+                        </a:rPr>
+                        <a:t>19</a:t>
+                      </a:r>
+                      <a:endParaRPr lang="es-CO" sz="1100">
+                        <a:effectLst/>
+                        <a:latin typeface="Arial" panose="020B0604020202020204" pitchFamily="34" charset="0"/>
+                        <a:ea typeface="Arial" panose="020B0604020202020204" pitchFamily="34" charset="0"/>
+                      </a:endParaRPr>
+                    </a:p>
+                  </a:txBody>
+                  <a:tcPr marL="76200" marR="76200" marT="50800" marB="50800"/>
+                </a:tc>
+                <a:extLst>
+                  <a:ext uri="{0D108BD9-81ED-4DB2-BD59-A6C34878D82A}">
+                    <a16:rowId xmlns:a16="http://schemas.microsoft.com/office/drawing/2014/main" val="1518633011"/>
+                  </a:ext>
+                </a:extLst>
+              </a:tr>
+              <a:tr h="0">
+                <a:tc>
+                  <a:txBody>
+                    <a:bodyPr/>
+                    <a:lstStyle/>
+                    <a:p>
+                      <a:pPr>
+                        <a:buNone/>
+                      </a:pPr>
+                      <a:r>
+                        <a:rPr lang="es-CO" sz="1000">
+                          <a:effectLst/>
+                        </a:rPr>
+                        <a:t>Tiempo</a:t>
+                      </a:r>
+                      <a:endParaRPr lang="es-CO" sz="1100">
+                        <a:effectLst/>
+                        <a:latin typeface="Arial" panose="020B0604020202020204" pitchFamily="34" charset="0"/>
+                        <a:ea typeface="Arial" panose="020B0604020202020204" pitchFamily="34" charset="0"/>
+                      </a:endParaRPr>
+                    </a:p>
+                  </a:txBody>
+                  <a:tcPr marL="76200" marR="76200" marT="50800" marB="50800"/>
+                </a:tc>
+                <a:tc>
+                  <a:txBody>
+                    <a:bodyPr/>
+                    <a:lstStyle/>
+                    <a:p>
+                      <a:pPr algn="ctr">
+                        <a:buNone/>
+                      </a:pPr>
+                      <a:r>
+                        <a:rPr lang="es-CO" sz="1000">
+                          <a:effectLst/>
+                        </a:rPr>
+                        <a:t>321.2 s</a:t>
+                      </a:r>
+                      <a:endParaRPr lang="es-CO" sz="1100">
+                        <a:effectLst/>
+                        <a:latin typeface="Arial" panose="020B0604020202020204" pitchFamily="34" charset="0"/>
+                        <a:ea typeface="Arial" panose="020B0604020202020204" pitchFamily="34" charset="0"/>
+                      </a:endParaRPr>
+                    </a:p>
+                  </a:txBody>
+                  <a:tcPr marL="76200" marR="76200" marT="50800" marB="50800"/>
+                </a:tc>
+                <a:extLst>
+                  <a:ext uri="{0D108BD9-81ED-4DB2-BD59-A6C34878D82A}">
+                    <a16:rowId xmlns:a16="http://schemas.microsoft.com/office/drawing/2014/main" val="1177769815"/>
+                  </a:ext>
+                </a:extLst>
+              </a:tr>
+              <a:tr h="0">
+                <a:tc>
+                  <a:txBody>
+                    <a:bodyPr/>
+                    <a:lstStyle/>
+                    <a:p>
+                      <a:pPr>
+                        <a:buNone/>
+                      </a:pPr>
+                      <a:r>
+                        <a:rPr lang="es-CO" sz="1000">
+                          <a:effectLst/>
+                        </a:rPr>
+                        <a:t>Parámetros</a:t>
+                      </a:r>
+                      <a:endParaRPr lang="es-CO" sz="1100">
+                        <a:effectLst/>
+                        <a:latin typeface="Arial" panose="020B0604020202020204" pitchFamily="34" charset="0"/>
+                        <a:ea typeface="Arial" panose="020B0604020202020204" pitchFamily="34" charset="0"/>
+                      </a:endParaRPr>
+                    </a:p>
+                  </a:txBody>
+                  <a:tcPr marL="76200" marR="76200" marT="50800" marB="50800"/>
+                </a:tc>
+                <a:tc>
+                  <a:txBody>
+                    <a:bodyPr/>
+                    <a:lstStyle/>
+                    <a:p>
+                      <a:pPr algn="ctr">
+                        <a:buNone/>
+                      </a:pPr>
+                      <a:r>
+                        <a:rPr lang="es-CO" sz="1000" dirty="0">
+                          <a:effectLst/>
+                        </a:rPr>
+                        <a:t>2,700,933</a:t>
+                      </a:r>
+                      <a:endParaRPr lang="es-CO" sz="1100" dirty="0">
+                        <a:effectLst/>
+                        <a:latin typeface="Arial" panose="020B0604020202020204" pitchFamily="34" charset="0"/>
+                        <a:ea typeface="Arial" panose="020B0604020202020204" pitchFamily="34" charset="0"/>
+                      </a:endParaRPr>
+                    </a:p>
+                  </a:txBody>
+                  <a:tcPr marL="76200" marR="76200" marT="50800" marB="50800"/>
+                </a:tc>
+                <a:extLst>
+                  <a:ext uri="{0D108BD9-81ED-4DB2-BD59-A6C34878D82A}">
+                    <a16:rowId xmlns:a16="http://schemas.microsoft.com/office/drawing/2014/main" val="2868292860"/>
+                  </a:ext>
+                </a:extLst>
+              </a:tr>
+            </a:tbl>
+          </a:graphicData>
+        </a:graphic>
+      </p:graphicFrame>
+    </p:spTree>
+    <p:extLst>
+      <p:ext uri="{BB962C8B-B14F-4D97-AF65-F5344CB8AC3E}">
+        <p14:creationId xmlns:p14="http://schemas.microsoft.com/office/powerpoint/2010/main" val="144129432"/>
+      </p:ext>
+    </p:extLst>
+  </p:cSld>
+  <p:clrMapOvr>
+    <a:masterClrMapping/>
+  </p:clrMapOvr>
+</p:sld>
+</file>
+
+<file path=ppt/slides/slide11.xml><?xml version="1.0" encoding="utf-8"?>
+<p:sld xmlns:a="http://schemas.openxmlformats.org/drawingml/2006/main" xmlns:r="http://schemas.openxmlformats.org/officeDocument/2006/relationships" xmlns:p="http://schemas.openxmlformats.org/presentationml/2006/main">
+  <p:cSld>
+    <p:spTree>
+      <p:nvGrpSpPr>
+        <p:cNvPr id="1" name="">
+          <a:extLst>
+            <a:ext uri="{FF2B5EF4-FFF2-40B4-BE49-F238E27FC236}">
+              <a16:creationId xmlns:a16="http://schemas.microsoft.com/office/drawing/2014/main" id="{6F853475-B41F-601F-C8AF-5A2C9C6E396D}"/>
+            </a:ext>
+          </a:extLst>
+        </p:cNvPr>
+        <p:cNvGrpSpPr/>
+        <p:nvPr/>
+      </p:nvGrpSpPr>
+      <p:grpSpPr>
+        <a:xfrm>
+          <a:off x="0" y="0"/>
+          <a:ext cx="0" cy="0"/>
+          <a:chOff x="0" y="0"/>
+          <a:chExt cx="0" cy="0"/>
+        </a:xfrm>
+      </p:grpSpPr>
+      <p:pic>
+        <p:nvPicPr>
+          <p:cNvPr id="4" name="Marcador de contenido 3">
+            <a:extLst>
+              <a:ext uri="{FF2B5EF4-FFF2-40B4-BE49-F238E27FC236}">
+                <a16:creationId xmlns:a16="http://schemas.microsoft.com/office/drawing/2014/main" id="{5F6E331B-5413-9C62-55A7-01243B9A6EA9}"/>
+              </a:ext>
+            </a:extLst>
+          </p:cNvPr>
+          <p:cNvPicPr>
+            <a:picLocks noGrp="1" noChangeAspect="1"/>
+          </p:cNvPicPr>
+          <p:nvPr>
+            <p:ph idx="1"/>
+          </p:nvPr>
+        </p:nvPicPr>
+        <p:blipFill>
+          <a:blip r:embed="rId2">
+            <a:extLst>
+              <a:ext uri="{28A0092B-C50C-407E-A947-70E740481C1C}">
+                <a14:useLocalDpi xmlns:a14="http://schemas.microsoft.com/office/drawing/2010/main" val="0"/>
+              </a:ext>
+            </a:extLst>
+          </a:blip>
+          <a:stretch>
+            <a:fillRect/>
+          </a:stretch>
+        </p:blipFill>
+        <p:spPr>
+          <a:xfrm>
+            <a:off x="0" y="0"/>
+            <a:ext cx="12201128" cy="6863135"/>
+          </a:xfrm>
+        </p:spPr>
+      </p:pic>
+      <p:sp>
+        <p:nvSpPr>
+          <p:cNvPr id="31" name="Rectángulo 30">
+            <a:extLst>
+              <a:ext uri="{FF2B5EF4-FFF2-40B4-BE49-F238E27FC236}">
+                <a16:creationId xmlns:a16="http://schemas.microsoft.com/office/drawing/2014/main" id="{FC2E64D1-AA65-F47B-C67A-6F1E1558775A}"/>
+              </a:ext>
+            </a:extLst>
+          </p:cNvPr>
+          <p:cNvSpPr/>
+          <p:nvPr/>
+        </p:nvSpPr>
+        <p:spPr>
+          <a:xfrm>
+            <a:off x="877078" y="583285"/>
+            <a:ext cx="7625655" cy="461665"/>
+          </a:xfrm>
+          <a:prstGeom prst="rect">
+            <a:avLst/>
+          </a:prstGeom>
+        </p:spPr>
+        <p:txBody>
+          <a:bodyPr wrap="square">
+            <a:spAutoFit/>
+          </a:bodyPr>
+          <a:lstStyle/>
+          <a:p>
+            <a:pPr algn="ctr"/>
+            <a:r>
+              <a:rPr lang="es-MX" sz="2400" b="1" dirty="0">
+                <a:solidFill>
+                  <a:schemeClr val="bg1"/>
+                </a:solidFill>
+                <a:latin typeface="Arial" charset="0"/>
+                <a:cs typeface="Arial" charset="0"/>
+              </a:rPr>
+              <a:t>Modelo Clásico 1 — LSTM Unidireccional </a:t>
+            </a:r>
+            <a:endParaRPr lang="es-ES_tradnl" sz="2400" b="1" dirty="0">
+              <a:solidFill>
+                <a:schemeClr val="bg1"/>
+              </a:solidFill>
+              <a:latin typeface="Arial" charset="0"/>
+              <a:cs typeface="Arial" charset="0"/>
+            </a:endParaRPr>
+          </a:p>
+        </p:txBody>
+      </p:sp>
+      <p:pic>
+        <p:nvPicPr>
+          <p:cNvPr id="2" name="image4.png" descr="Figura 10. Curvas de entrenamiento LSTM v3 (versión definitiva, lr=3e-4, MAX_LEN=150). El val_loss se estabiliza alrededor de la época 19.">
+            <a:extLst>
+              <a:ext uri="{FF2B5EF4-FFF2-40B4-BE49-F238E27FC236}">
+                <a16:creationId xmlns:a16="http://schemas.microsoft.com/office/drawing/2014/main" id="{FF025C04-5BCD-C681-30AD-F08218011797}"/>
+              </a:ext>
+            </a:extLst>
+          </p:cNvPr>
+          <p:cNvPicPr/>
+          <p:nvPr/>
+        </p:nvPicPr>
+        <p:blipFill>
+          <a:blip r:embed="rId3"/>
+          <a:srcRect/>
+          <a:stretch>
+            <a:fillRect/>
+          </a:stretch>
+        </p:blipFill>
+        <p:spPr>
+          <a:xfrm>
+            <a:off x="286848" y="1552621"/>
+            <a:ext cx="7551233" cy="3088389"/>
+          </a:xfrm>
+          <a:prstGeom prst="rect">
+            <a:avLst/>
+          </a:prstGeom>
+          <a:ln/>
+        </p:spPr>
+      </p:pic>
+      <p:pic>
+        <p:nvPicPr>
+          <p:cNvPr id="6" name="image10.png" descr="Figura 11. Matriz de confusión LSTM v3. El modelo clasifica bien 1★ y 5★ pero presenta F1≈0 en clase 4★ (casi todo predito como 5★).">
+            <a:extLst>
+              <a:ext uri="{FF2B5EF4-FFF2-40B4-BE49-F238E27FC236}">
+                <a16:creationId xmlns:a16="http://schemas.microsoft.com/office/drawing/2014/main" id="{69B637E7-7EFC-5CAB-220B-BE4DA491F332}"/>
+              </a:ext>
+            </a:extLst>
+          </p:cNvPr>
+          <p:cNvPicPr/>
+          <p:nvPr/>
+        </p:nvPicPr>
+        <p:blipFill>
+          <a:blip r:embed="rId4"/>
+          <a:srcRect/>
+          <a:stretch>
+            <a:fillRect/>
+          </a:stretch>
+        </p:blipFill>
+        <p:spPr>
+          <a:xfrm>
+            <a:off x="8124929" y="1667053"/>
+            <a:ext cx="3848535" cy="3586433"/>
+          </a:xfrm>
+          <a:prstGeom prst="rect">
+            <a:avLst/>
+          </a:prstGeom>
+          <a:ln/>
+        </p:spPr>
+      </p:pic>
+    </p:spTree>
+    <p:extLst>
+      <p:ext uri="{BB962C8B-B14F-4D97-AF65-F5344CB8AC3E}">
+        <p14:creationId xmlns:p14="http://schemas.microsoft.com/office/powerpoint/2010/main" val="805762893"/>
+      </p:ext>
+    </p:extLst>
+  </p:cSld>
+  <p:clrMapOvr>
+    <a:masterClrMapping/>
+  </p:clrMapOvr>
+</p:sld>
+</file>
+
+<file path=ppt/slides/slide12.xml><?xml version="1.0" encoding="utf-8"?>
+<p:sld xmlns:a="http://schemas.openxmlformats.org/drawingml/2006/main" xmlns:r="http://schemas.openxmlformats.org/officeDocument/2006/relationships" xmlns:p="http://schemas.openxmlformats.org/presentationml/2006/main">
+  <p:cSld>
+    <p:spTree>
+      <p:nvGrpSpPr>
+        <p:cNvPr id="1" name="">
+          <a:extLst>
+            <a:ext uri="{FF2B5EF4-FFF2-40B4-BE49-F238E27FC236}">
               <a16:creationId xmlns:a16="http://schemas.microsoft.com/office/drawing/2014/main" id="{81313DEF-100D-7D7C-A3D9-5384CCBBBEB6}"/>
             </a:ext>
           </a:extLst>
@@ -4940,7 +6540,7 @@
                         <a:rPr lang="es-CO" sz="1000">
                           <a:effectLst/>
                         </a:rPr>
-                        <a:t>Sí: [2.167, 3.655, 1.598, 0.861, 0.404]</a:t>
+                        <a:t>No</a:t>
                       </a:r>
                       <a:endParaRPr lang="es-CO" sz="1100">
                         <a:effectLst/>
@@ -5046,7 +6646,7 @@
                         <a:rPr lang="es-CO" sz="1000">
                           <a:effectLst/>
                         </a:rPr>
-                        <a:t>9</a:t>
+                        <a:t>8</a:t>
                       </a:r>
                       <a:endParaRPr lang="es-CO" sz="1100">
                         <a:effectLst/>
@@ -5099,7 +6699,7 @@
                         <a:rPr lang="es-CO" sz="1000">
                           <a:effectLst/>
                         </a:rPr>
-                        <a:t>5</a:t>
+                        <a:t>4</a:t>
                       </a:r>
                       <a:endParaRPr lang="es-CO" sz="1100">
                         <a:effectLst/>
@@ -5152,7 +6752,7 @@
                         <a:rPr lang="es-CO" sz="1000">
                           <a:effectLst/>
                         </a:rPr>
-                        <a:t>1,792.3 s (CPU)</a:t>
+                        <a:t>27,685.9 s (CPU)</a:t>
                       </a:r>
                       <a:endParaRPr lang="es-CO" sz="1100">
                         <a:effectLst/>
@@ -5239,7 +6839,7 @@
 </p:sld>
 </file>
 
-<file path=ppt/slides/slide11.xml><?xml version="1.0" encoding="utf-8"?>
+<file path=ppt/slides/slide13.xml><?xml version="1.0" encoding="utf-8"?>
 <p:sld xmlns:a="http://schemas.openxmlformats.org/drawingml/2006/main" xmlns:r="http://schemas.openxmlformats.org/officeDocument/2006/relationships" xmlns:p="http://schemas.openxmlformats.org/presentationml/2006/main">
   <p:cSld>
     <p:spTree>
@@ -5441,7 +7041,7 @@
 </p:sld>
 </file>
 
-<file path=ppt/slides/slide12.xml><?xml version="1.0" encoding="utf-8"?>
+<file path=ppt/slides/slide14.xml><?xml version="1.0" encoding="utf-8"?>
 <p:sld xmlns:a="http://schemas.openxmlformats.org/drawingml/2006/main" xmlns:r="http://schemas.openxmlformats.org/officeDocument/2006/relationships" xmlns:p="http://schemas.openxmlformats.org/presentationml/2006/main">
   <p:cSld>
     <p:spTree>
@@ -6980,7 +8580,7 @@
 </p:sld>
 </file>
 
-<file path=ppt/slides/slide13.xml><?xml version="1.0" encoding="utf-8"?>
+<file path=ppt/slides/slide15.xml><?xml version="1.0" encoding="utf-8"?>
 <p:sld xmlns:a="http://schemas.openxmlformats.org/drawingml/2006/main" xmlns:r="http://schemas.openxmlformats.org/officeDocument/2006/relationships" xmlns:p="http://schemas.openxmlformats.org/presentationml/2006/main">
   <p:cSld>
     <p:spTree>
@@ -7171,7 +8771,7 @@
 </p:sld>
 </file>
 
-<file path=ppt/slides/slide14.xml><?xml version="1.0" encoding="utf-8"?>
+<file path=ppt/slides/slide16.xml><?xml version="1.0" encoding="utf-8"?>
 <p:sld xmlns:a="http://schemas.openxmlformats.org/drawingml/2006/main" xmlns:r="http://schemas.openxmlformats.org/officeDocument/2006/relationships" xmlns:p="http://schemas.openxmlformats.org/presentationml/2006/main">
   <p:cSld>
     <p:spTree>
@@ -8165,7 +9765,7 @@
                         <a:rPr lang="es-CO" sz="1000">
                           <a:effectLst/>
                         </a:rPr>
-                        <a:t>BiLSTM v2 ✓</a:t>
+                        <a:t>BiLSTM v1 ✓</a:t>
                       </a:r>
                       <a:endParaRPr lang="es-CO" sz="1100">
                         <a:effectLst/>
@@ -8188,7 +9788,7 @@
                         <a:rPr lang="es-CO" sz="1000">
                           <a:effectLst/>
                         </a:rPr>
-                        <a:t>0.5989</a:t>
+                        <a:t>0.5749</a:t>
                       </a:r>
                       <a:endParaRPr lang="es-CO" sz="1100">
                         <a:effectLst/>
@@ -8211,7 +9811,7 @@
                         <a:rPr lang="es-CO" sz="1000">
                           <a:effectLst/>
                         </a:rPr>
-                        <a:t>0.6453</a:t>
+                        <a:t>0.6871</a:t>
                       </a:r>
                       <a:endParaRPr lang="es-CO" sz="1100">
                         <a:effectLst/>
@@ -8303,7 +9903,7 @@
                         <a:rPr lang="es-CO" sz="1000">
                           <a:effectLst/>
                         </a:rPr>
-                        <a:t>1,792s CPU</a:t>
+                        <a:t>27,686s CPU</a:t>
                       </a:r>
                       <a:endParaRPr lang="es-CO" sz="1100">
                         <a:effectLst/>
@@ -8678,7 +10278,7 @@
                         <a:rPr lang="es-CO" sz="1000">
                           <a:effectLst/>
                         </a:rPr>
-                        <a:t>BiLSTM v2</a:t>
+                        <a:t>BiLSTM v1</a:t>
                       </a:r>
                       <a:endParaRPr lang="es-CO" sz="1100">
                         <a:effectLst/>
@@ -8846,7 +10446,7 @@
                         <a:rPr lang="es-CO" sz="1000">
                           <a:effectLst/>
                         </a:rPr>
-                        <a:t>0.733</a:t>
+                        <a:t>0.716</a:t>
                       </a:r>
                       <a:endParaRPr lang="es-CO" sz="1100">
                         <a:effectLst/>
@@ -9014,7 +10614,7 @@
                         <a:rPr lang="es-CO" sz="1000">
                           <a:effectLst/>
                         </a:rPr>
-                        <a:t>0.459</a:t>
+                        <a:t>0.202</a:t>
                       </a:r>
                       <a:endParaRPr lang="es-CO" sz="1100">
                         <a:effectLst/>
@@ -9182,7 +10782,7 @@
                         <a:rPr lang="es-CO" sz="1000">
                           <a:effectLst/>
                         </a:rPr>
-                        <a:t>0.549</a:t>
+                        <a:t>0.564</a:t>
                       </a:r>
                       <a:endParaRPr lang="es-CO" sz="1100">
                         <a:effectLst/>
@@ -9350,7 +10950,7 @@
                         <a:rPr lang="es-CO" sz="1000">
                           <a:effectLst/>
                         </a:rPr>
-                        <a:t>0.484</a:t>
+                        <a:t>0.572</a:t>
                       </a:r>
                       <a:endParaRPr lang="es-CO" sz="1100">
                         <a:effectLst/>
@@ -9518,7 +11118,7 @@
                         <a:rPr lang="es-CO" sz="1000">
                           <a:effectLst/>
                         </a:rPr>
-                        <a:t>0.771</a:t>
+                        <a:t>0.821</a:t>
                       </a:r>
                       <a:endParaRPr lang="es-CO" sz="1100">
                         <a:effectLst/>
@@ -9686,7 +11286,7 @@
                         <a:rPr lang="es-CO" sz="1000">
                           <a:effectLst/>
                         </a:rPr>
-                        <a:t>0.5989</a:t>
+                        <a:t>0.5749</a:t>
                       </a:r>
                       <a:endParaRPr lang="es-CO" sz="1100">
                         <a:effectLst/>
@@ -9840,7 +11440,7 @@
 </p:sld>
 </file>
 
-<file path=ppt/slides/slide15.xml><?xml version="1.0" encoding="utf-8"?>
+<file path=ppt/slides/slide17.xml><?xml version="1.0" encoding="utf-8"?>
 <p:sld xmlns:a="http://schemas.openxmlformats.org/drawingml/2006/main" xmlns:r="http://schemas.openxmlformats.org/officeDocument/2006/relationships" xmlns:p="http://schemas.openxmlformats.org/presentationml/2006/main">
   <p:cSld>
     <p:spTree>
@@ -10220,7 +11820,7 @@
                 <a:latin typeface="Arial" charset="0"/>
                 <a:cs typeface="Arial" charset="0"/>
               </a:rPr>
-              <a:t>: se congelaron todas las capas excepto encoder.layer.11 + </a:t>
+              <a:t>: se congelaron capas 0-8 y se descongelaron encoder.layer.9, 10, 11 + </a:t>
             </a:r>
             <a:r>
               <a:rPr lang="es-CO" sz="1600" b="0" dirty="0" err="1">
@@ -10254,7 +11854,7 @@
                 <a:latin typeface="Arial" charset="0"/>
                 <a:cs typeface="Arial" charset="0"/>
               </a:rPr>
-              <a:t>•  Capas descongeladas: 7.0% de los parámetros totales (7,706,885 de 109,854,725)</a:t>
+              <a:t>•  Capas descongeladas: 19.9% de los parámetros totales (21,858,053 de 109,854,725)</a:t>
             </a:r>
           </a:p>
           <a:p>
@@ -10355,7 +11955,7 @@
         </p:nvGraphicFramePr>
         <p:xfrm>
           <a:off x="7225443" y="1799203"/>
-          <a:ext cx="4200506" cy="4009923"/>
+          <a:ext cx="4200506" cy="4066949"/>
         </p:xfrm>
         <a:graphic>
           <a:graphicData uri="http://schemas.openxmlformats.org/drawingml/2006/table">
@@ -10521,7 +12121,7 @@
                         <a:rPr lang="es-CO" sz="900">
                           <a:effectLst/>
                         </a:rPr>
-                        <a:t>encoder.layer.11, pooler, classifier</a:t>
+                        <a:t>encoder.layer.9, 10, 11, pooler, classifier</a:t>
                       </a:r>
                       <a:endParaRPr lang="es-CO" sz="1000">
                         <a:effectLst/>
@@ -10680,7 +12280,7 @@
                         <a:rPr lang="es-CO" sz="900">
                           <a:effectLst/>
                         </a:rPr>
-                        <a:t>2 × 10⁻⁵</a:t>
+                        <a:t>Discriminativo: 2e-6 / 1e-5 / 2e-5</a:t>
                       </a:r>
                       <a:endParaRPr lang="es-CO" sz="1000">
                         <a:effectLst/>
@@ -10786,7 +12386,7 @@
                         <a:rPr lang="es-CO" sz="900">
                           <a:effectLst/>
                         </a:rPr>
-                        <a:t>5</a:t>
+                        <a:t>11 (early stop en 11, mejor=8)</a:t>
                       </a:r>
                       <a:endParaRPr lang="es-CO" sz="1000">
                         <a:effectLst/>
@@ -10892,7 +12492,7 @@
                         <a:rPr lang="es-CO" sz="900">
                           <a:effectLst/>
                         </a:rPr>
-                        <a:t>CrossEntropyLoss con class weights</a:t>
+                        <a:t>CrossEntropyLoss con sqrt(balanced) weights</a:t>
                       </a:r>
                       <a:endParaRPr lang="es-CO" sz="1000">
                         <a:effectLst/>
@@ -11044,7 +12644,7 @@
 </p:sld>
 </file>
 
-<file path=ppt/slides/slide16.xml><?xml version="1.0" encoding="utf-8"?>
+<file path=ppt/slides/slide18.xml><?xml version="1.0" encoding="utf-8"?>
 <p:sld xmlns:a="http://schemas.openxmlformats.org/drawingml/2006/main" xmlns:r="http://schemas.openxmlformats.org/officeDocument/2006/relationships" xmlns:p="http://schemas.openxmlformats.org/presentationml/2006/main">
   <p:cSld>
     <p:spTree>
@@ -11603,7 +13203,7 @@
                         <a:rPr lang="es-CO" sz="900">
                           <a:effectLst/>
                         </a:rPr>
-                        <a:t>0,5989</a:t>
+                        <a:t>0,5749</a:t>
                       </a:r>
                       <a:endParaRPr lang="es-CO" sz="1000">
                         <a:effectLst/>
@@ -11626,7 +13226,7 @@
                         <a:rPr lang="es-CO" sz="900">
                           <a:effectLst/>
                         </a:rPr>
-                        <a:t>0,6453</a:t>
+                        <a:t>0,6871</a:t>
                       </a:r>
                       <a:endParaRPr lang="es-CO" sz="1000">
                         <a:effectLst/>
@@ -11649,7 +13249,7 @@
                         <a:rPr lang="es-CO" sz="900" dirty="0">
                           <a:effectLst/>
                         </a:rPr>
-                        <a:t>0,6197</a:t>
+                        <a:t>0,5876</a:t>
                       </a:r>
                       <a:endParaRPr lang="es-CO" sz="1000" dirty="0">
                         <a:effectLst/>
@@ -11672,7 +13272,7 @@
                         <a:rPr lang="es-CO" sz="900">
                           <a:effectLst/>
                         </a:rPr>
-                        <a:t>0,5929</a:t>
+                        <a:t>0,5795</a:t>
                       </a:r>
                       <a:endParaRPr lang="es-CO" sz="1000">
                         <a:effectLst/>
@@ -11718,7 +13318,7 @@
                         <a:rPr lang="es-CO" sz="900">
                           <a:effectLst/>
                         </a:rPr>
-                        <a:t>1.792</a:t>
+                        <a:t>27.686</a:t>
                       </a:r>
                       <a:endParaRPr lang="es-CO" sz="1000">
                         <a:effectLst/>
@@ -11771,7 +13371,7 @@
                         <a:rPr lang="es-CO" sz="900">
                           <a:effectLst/>
                         </a:rPr>
-                        <a:t>0,5873</a:t>
+                        <a:t>0,6565</a:t>
                       </a:r>
                       <a:endParaRPr lang="es-CO" sz="1000">
                         <a:effectLst/>
@@ -11794,7 +13394,7 @@
                         <a:rPr lang="es-CO" sz="900">
                           <a:effectLst/>
                         </a:rPr>
-                        <a:t>0,6592</a:t>
+                        <a:t>0,7252</a:t>
                       </a:r>
                       <a:endParaRPr lang="es-CO" sz="1000">
                         <a:effectLst/>
@@ -11817,7 +13417,7 @@
                         <a:rPr lang="es-CO" sz="900">
                           <a:effectLst/>
                         </a:rPr>
-                        <a:t>0,5810</a:t>
+                        <a:t>0,6544</a:t>
                       </a:r>
                       <a:endParaRPr lang="es-CO" sz="1000">
                         <a:effectLst/>
@@ -11840,7 +13440,7 @@
                         <a:rPr lang="es-CO" sz="900">
                           <a:effectLst/>
                         </a:rPr>
-                        <a:t>0,5983</a:t>
+                        <a:t>0,6609</a:t>
                       </a:r>
                       <a:endParaRPr lang="es-CO" sz="1000">
                         <a:effectLst/>
@@ -11863,7 +13463,7 @@
                         <a:rPr lang="es-CO" sz="900">
                           <a:effectLst/>
                         </a:rPr>
-                        <a:t>109,9 M (7,7 M entrenables)</a:t>
+                        <a:t>109,9 M (21,9 M entrenables)</a:t>
                       </a:r>
                       <a:endParaRPr lang="es-CO" sz="1000">
                         <a:effectLst/>
@@ -11886,7 +13486,7 @@
                         <a:rPr lang="es-CO" sz="900" dirty="0">
                           <a:effectLst/>
                         </a:rPr>
-                        <a:t>676</a:t>
+                        <a:t>1.780</a:t>
                       </a:r>
                       <a:endParaRPr lang="es-CO" sz="1000" dirty="0">
                         <a:effectLst/>
@@ -11929,7 +13529,7 @@
         </p:nvGraphicFramePr>
         <p:xfrm>
           <a:off x="365524" y="3534087"/>
-          <a:ext cx="5730468" cy="955040"/>
+          <a:ext cx="6771258" cy="1463040"/>
         </p:xfrm>
         <a:graphic>
           <a:graphicData uri="http://schemas.openxmlformats.org/drawingml/2006/table">
@@ -11973,6 +13573,13 @@
                     </a:ext>
                   </a:extLst>
                 </a:gridCol>
+                <a:gridCol w="1040790">
+                  <a:extLst>
+                    <a:ext uri="{9D8B030D-6E8A-4147-A177-3AD203B41FA5}">
+                      <a16:colId xmlns:a16="http://schemas.microsoft.com/office/drawing/2014/main" val="514836883"/>
+                    </a:ext>
+                  </a:extLst>
+                </a:gridCol>
               </a:tblGrid>
               <a:tr h="0">
                 <a:tc>
@@ -12089,6 +13696,16 @@
                     </a:p>
                   </a:txBody>
                   <a:tcPr marL="76200" marR="76200" marT="50800" marB="50800" anchor="ctr"/>
+                </a:tc>
+                <a:tc>
+                  <a:txBody>
+                    <a:bodyPr/>
+                    <a:lstStyle/>
+                    <a:p>
+                      <a:endParaRPr lang="es-CO"/>
+                    </a:p>
+                  </a:txBody>
+                  <a:tcPr/>
                 </a:tc>
                 <a:extLst>
                   <a:ext uri="{0D108BD9-81ED-4DB2-BD59-A6C34878D82A}">
@@ -12212,6 +13829,16 @@
                   </a:txBody>
                   <a:tcPr marL="76200" marR="76200" marT="50800" marB="50800" anchor="ctr"/>
                 </a:tc>
+                <a:tc>
+                  <a:txBody>
+                    <a:bodyPr/>
+                    <a:lstStyle/>
+                    <a:p>
+                      <a:endParaRPr lang="es-CO"/>
+                    </a:p>
+                  </a:txBody>
+                  <a:tcPr/>
+                </a:tc>
                 <a:extLst>
                   <a:ext uri="{0D108BD9-81ED-4DB2-BD59-A6C34878D82A}">
                     <a16:rowId xmlns:a16="http://schemas.microsoft.com/office/drawing/2014/main" val="3551202138"/>
@@ -12254,7 +13881,7 @@
                         <a:rPr lang="es-CO" sz="900">
                           <a:effectLst/>
                         </a:rPr>
-                        <a:t>0,733</a:t>
+                        <a:t>0,716</a:t>
                       </a:r>
                       <a:endParaRPr lang="es-CO" sz="1000">
                         <a:effectLst/>
@@ -12277,7 +13904,7 @@
                         <a:rPr lang="es-CO" sz="900">
                           <a:effectLst/>
                         </a:rPr>
-                        <a:t>0,459</a:t>
+                        <a:t>0,202</a:t>
                       </a:r>
                       <a:endParaRPr lang="es-CO" sz="1000">
                         <a:effectLst/>
@@ -12300,7 +13927,7 @@
                         <a:rPr lang="es-CO" sz="900">
                           <a:effectLst/>
                         </a:rPr>
-                        <a:t>0,549</a:t>
+                        <a:t>0,564</a:t>
                       </a:r>
                       <a:endParaRPr lang="es-CO" sz="1000">
                         <a:effectLst/>
@@ -12323,7 +13950,7 @@
                         <a:rPr lang="es-CO" sz="900" dirty="0">
                           <a:effectLst/>
                         </a:rPr>
-                        <a:t>0,484</a:t>
+                        <a:t>0,572</a:t>
                       </a:r>
                       <a:endParaRPr lang="es-CO" sz="1000" dirty="0">
                         <a:effectLst/>
@@ -12333,6 +13960,16 @@
                     </a:p>
                   </a:txBody>
                   <a:tcPr marL="76200" marR="76200" marT="50800" marB="50800" anchor="ctr"/>
+                </a:tc>
+                <a:tc>
+                  <a:txBody>
+                    <a:bodyPr/>
+                    <a:lstStyle/>
+                    <a:p>
+                      <a:endParaRPr lang="es-CO"/>
+                    </a:p>
+                  </a:txBody>
+                  <a:tcPr/>
                 </a:tc>
                 <a:extLst>
                   <a:ext uri="{0D108BD9-81ED-4DB2-BD59-A6C34878D82A}">
@@ -12376,7 +14013,7 @@
                         <a:rPr lang="es-CO" sz="900">
                           <a:effectLst/>
                         </a:rPr>
-                        <a:t>0,729</a:t>
+                        <a:t>0,777</a:t>
                       </a:r>
                       <a:endParaRPr lang="es-CO" sz="1000">
                         <a:effectLst/>
@@ -12399,7 +14036,7 @@
                         <a:rPr lang="es-CO" sz="900" dirty="0">
                           <a:effectLst/>
                         </a:rPr>
-                        <a:t>0,386</a:t>
+                        <a:t>0,502</a:t>
                       </a:r>
                       <a:endParaRPr lang="es-CO" sz="1000" dirty="0">
                         <a:effectLst/>
@@ -12422,7 +14059,7 @@
                         <a:rPr lang="es-CO" sz="900" dirty="0">
                           <a:effectLst/>
                         </a:rPr>
-                        <a:t>0,514</a:t>
+                        <a:t>0,595</a:t>
                       </a:r>
                       <a:endParaRPr lang="es-CO" sz="1000" dirty="0">
                         <a:effectLst/>
@@ -12445,7 +14082,7 @@
                         <a:rPr lang="es-CO" sz="900" dirty="0">
                           <a:effectLst/>
                         </a:rPr>
-                        <a:t>0,514</a:t>
+                        <a:t>0,561</a:t>
                       </a:r>
                       <a:endParaRPr lang="es-CO" sz="1000" dirty="0">
                         <a:effectLst/>
@@ -12455,6 +14092,16 @@
                     </a:p>
                   </a:txBody>
                   <a:tcPr marL="76200" marR="76200" marT="50800" marB="50800" anchor="ctr"/>
+                </a:tc>
+                <a:tc>
+                  <a:txBody>
+                    <a:bodyPr/>
+                    <a:lstStyle/>
+                    <a:p>
+                      <a:endParaRPr lang="es-CO"/>
+                    </a:p>
+                  </a:txBody>
+                  <a:tcPr/>
                 </a:tc>
                 <a:extLst>
                   <a:ext uri="{0D108BD9-81ED-4DB2-BD59-A6C34878D82A}">
@@ -12539,6 +14186,548 @@
 </p:sld>
 </file>
 
+<file path=ppt/slides/slide19.xml><?xml version="1.0" encoding="utf-8"?>
+<p:sld xmlns:a="http://schemas.openxmlformats.org/drawingml/2006/main" xmlns:r="http://schemas.openxmlformats.org/officeDocument/2006/relationships" xmlns:p="http://schemas.openxmlformats.org/presentationml/2006/main">
+  <p:cSld>
+    <p:spTree>
+      <p:nvGrpSpPr>
+        <p:cNvPr id="1" name="">
+          <a:extLst>
+            <a:ext uri="{FF2B5EF4-FFF2-40B4-BE49-F238E27FC236}">
+              <a16:creationId xmlns:a16="http://schemas.microsoft.com/office/drawing/2014/main" id="{030CE5DA-58F8-8EDA-5966-DD4A972D7CB5}"/>
+            </a:ext>
+          </a:extLst>
+        </p:cNvPr>
+        <p:cNvGrpSpPr/>
+        <p:nvPr/>
+      </p:nvGrpSpPr>
+      <p:grpSpPr>
+        <a:xfrm>
+          <a:off x="0" y="0"/>
+          <a:ext cx="0" cy="0"/>
+          <a:chOff x="0" y="0"/>
+          <a:chExt cx="0" cy="0"/>
+        </a:xfrm>
+      </p:grpSpPr>
+      <p:pic>
+        <p:nvPicPr>
+          <p:cNvPr id="4" name="Marcador de contenido 3">
+            <a:extLst>
+              <a:ext uri="{FF2B5EF4-FFF2-40B4-BE49-F238E27FC236}">
+                <a16:creationId xmlns:a16="http://schemas.microsoft.com/office/drawing/2014/main" id="{1A42600E-E09E-C880-5BEE-2D62869C82B0}"/>
+              </a:ext>
+            </a:extLst>
+          </p:cNvPr>
+          <p:cNvPicPr>
+            <a:picLocks noGrp="1" noChangeAspect="1"/>
+          </p:cNvPicPr>
+          <p:nvPr>
+            <p:ph idx="1"/>
+          </p:nvPr>
+        </p:nvPicPr>
+        <p:blipFill>
+          <a:blip r:embed="rId2">
+            <a:extLst>
+              <a:ext uri="{28A0092B-C50C-407E-A947-70E740481C1C}">
+                <a14:useLocalDpi xmlns:a14="http://schemas.microsoft.com/office/drawing/2010/main" val="0"/>
+              </a:ext>
+            </a:extLst>
+          </a:blip>
+          <a:stretch>
+            <a:fillRect/>
+          </a:stretch>
+        </p:blipFill>
+        <p:spPr>
+          <a:xfrm>
+            <a:off x="0" y="0"/>
+            <a:ext cx="12201128" cy="6863135"/>
+          </a:xfrm>
+        </p:spPr>
+      </p:pic>
+      <p:sp>
+        <p:nvSpPr>
+          <p:cNvPr id="31" name="Rectángulo 30">
+            <a:extLst>
+              <a:ext uri="{FF2B5EF4-FFF2-40B4-BE49-F238E27FC236}">
+                <a16:creationId xmlns:a16="http://schemas.microsoft.com/office/drawing/2014/main" id="{3229A71A-120D-5CD3-E0DE-7616744E7C9C}"/>
+              </a:ext>
+            </a:extLst>
+          </p:cNvPr>
+          <p:cNvSpPr/>
+          <p:nvPr/>
+        </p:nvSpPr>
+        <p:spPr>
+          <a:xfrm>
+            <a:off x="1341913" y="583285"/>
+            <a:ext cx="7160820" cy="553998"/>
+          </a:xfrm>
+          <a:prstGeom prst="rect">
+            <a:avLst/>
+          </a:prstGeom>
+        </p:spPr>
+        <p:txBody>
+          <a:bodyPr wrap="square">
+            <a:spAutoFit/>
+          </a:bodyPr>
+          <a:lstStyle/>
+          <a:p>
+            <a:pPr algn="ctr"/>
+            <a:r>
+              <a:rPr lang="es-MX" sz="3000" b="1" dirty="0">
+                <a:solidFill>
+                  <a:schemeClr val="bg1"/>
+                </a:solidFill>
+                <a:latin typeface="Arial" charset="0"/>
+                <a:cs typeface="Arial" charset="0"/>
+              </a:rPr>
+              <a:t>Análisis crítico de resultados</a:t>
+            </a:r>
+            <a:endParaRPr lang="es-ES_tradnl" sz="3000" b="1" dirty="0">
+              <a:solidFill>
+                <a:schemeClr val="bg1"/>
+              </a:solidFill>
+              <a:latin typeface="Arial" charset="0"/>
+              <a:cs typeface="Arial" charset="0"/>
+            </a:endParaRPr>
+          </a:p>
+        </p:txBody>
+      </p:sp>
+      <p:sp>
+        <p:nvSpPr>
+          <p:cNvPr id="7" name="CuadroTexto 6">
+            <a:extLst>
+              <a:ext uri="{FF2B5EF4-FFF2-40B4-BE49-F238E27FC236}">
+                <a16:creationId xmlns:a16="http://schemas.microsoft.com/office/drawing/2014/main" id="{AE085148-9A2E-AF64-7D9B-A658E97FA351}"/>
+              </a:ext>
+            </a:extLst>
+          </p:cNvPr>
+          <p:cNvSpPr txBox="1"/>
+          <p:nvPr/>
+        </p:nvSpPr>
+        <p:spPr>
+          <a:xfrm>
+            <a:off x="571689" y="1522607"/>
+            <a:ext cx="11182346" cy="4401205"/>
+          </a:xfrm>
+          <a:prstGeom prst="rect">
+            <a:avLst/>
+          </a:prstGeom>
+          <a:noFill/>
+        </p:spPr>
+        <p:txBody>
+          <a:bodyPr wrap="square">
+            <a:spAutoFit/>
+          </a:bodyPr>
+          <a:lstStyle/>
+          <a:p>
+            <a:pPr>
+              <a:spcBef>
+                <a:spcPts val="1200"/>
+              </a:spcBef>
+            </a:pPr>
+            <a:r>
+              <a:rPr lang="es-CO" dirty="0">
+                <a:solidFill>
+                  <a:srgbClr val="FFC000"/>
+                </a:solidFill>
+                <a:latin typeface="Arial" charset="0"/>
+                <a:cs typeface="Arial" charset="0"/>
+              </a:rPr>
+              <a:t>Que funcionó</a:t>
+            </a:r>
+          </a:p>
+          <a:p>
+            <a:pPr indent="-342900">
+              <a:buFont typeface="Arial" panose="020B0604020202020204" pitchFamily="34" charset="0"/>
+              <a:buChar char="•"/>
+            </a:pPr>
+            <a:r>
+              <a:rPr lang="es-CO" b="1" dirty="0">
+                <a:latin typeface="Arial" charset="0"/>
+                <a:cs typeface="Arial" charset="0"/>
+              </a:rPr>
+              <a:t>Bidireccionalidad</a:t>
+            </a:r>
+            <a:r>
+              <a:rPr lang="es-CO" dirty="0">
+                <a:latin typeface="Arial" charset="0"/>
+                <a:cs typeface="Arial" charset="0"/>
+              </a:rPr>
+              <a:t>:  el </a:t>
+            </a:r>
+            <a:r>
+              <a:rPr lang="es-CO" dirty="0" err="1">
+                <a:latin typeface="Arial" charset="0"/>
+                <a:cs typeface="Arial" charset="0"/>
+              </a:rPr>
+              <a:t>BiLSTM</a:t>
+            </a:r>
+            <a:r>
+              <a:rPr lang="es-CO" dirty="0">
+                <a:latin typeface="Arial" charset="0"/>
+                <a:cs typeface="Arial" charset="0"/>
+              </a:rPr>
+              <a:t> supero al LSTM por +17.5pp de F1 macro al capturar contexto en ambas direcciones</a:t>
+            </a:r>
+          </a:p>
+          <a:p>
+            <a:pPr indent="-342900">
+              <a:buFont typeface="Arial" panose="020B0604020202020204" pitchFamily="34" charset="0"/>
+              <a:buChar char="•"/>
+            </a:pPr>
+            <a:r>
+              <a:rPr lang="es-CO" b="1" dirty="0">
+                <a:latin typeface="Arial" charset="0"/>
+                <a:cs typeface="Arial" charset="0"/>
+              </a:rPr>
+              <a:t>Multi-Head Self-</a:t>
+            </a:r>
+            <a:r>
+              <a:rPr lang="es-CO" b="1" dirty="0" err="1">
+                <a:latin typeface="Arial" charset="0"/>
+                <a:cs typeface="Arial" charset="0"/>
+              </a:rPr>
+              <a:t>Attention</a:t>
+            </a:r>
+            <a:r>
+              <a:rPr lang="es-CO" dirty="0">
+                <a:latin typeface="Arial" charset="0"/>
+                <a:cs typeface="Arial" charset="0"/>
+              </a:rPr>
+              <a:t>:  permitió enfocarse en aspectos lingüísticos distintos simultáneamente (+4.4pp F1 vs </a:t>
+            </a:r>
+            <a:r>
+              <a:rPr lang="es-CO" dirty="0" err="1">
+                <a:latin typeface="Arial" charset="0"/>
+                <a:cs typeface="Arial" charset="0"/>
+              </a:rPr>
+              <a:t>BiLSTM</a:t>
+            </a:r>
+            <a:r>
+              <a:rPr lang="es-CO" dirty="0">
+                <a:latin typeface="Arial" charset="0"/>
+                <a:cs typeface="Arial" charset="0"/>
+              </a:rPr>
+              <a:t> simple)</a:t>
+            </a:r>
+          </a:p>
+          <a:p>
+            <a:pPr indent="-342900">
+              <a:buFont typeface="Arial" panose="020B0604020202020204" pitchFamily="34" charset="0"/>
+              <a:buChar char="•"/>
+            </a:pPr>
+            <a:r>
+              <a:rPr lang="es-CO" dirty="0">
+                <a:latin typeface="Arial" charset="0"/>
+                <a:cs typeface="Arial" charset="0"/>
+              </a:rPr>
+              <a:t>Class </a:t>
+            </a:r>
+            <a:r>
+              <a:rPr lang="es-CO" dirty="0" err="1">
+                <a:latin typeface="Arial" charset="0"/>
+                <a:cs typeface="Arial" charset="0"/>
+              </a:rPr>
+              <a:t>weights</a:t>
+            </a:r>
+            <a:r>
+              <a:rPr lang="es-CO" dirty="0">
+                <a:latin typeface="Arial" charset="0"/>
+                <a:cs typeface="Arial" charset="0"/>
+              </a:rPr>
+              <a:t> (modelo combinado):  cruciales para atender clases minoritarias - clase 2 </a:t>
+            </a:r>
+            <a:r>
+              <a:rPr lang="es-CO" dirty="0" err="1">
+                <a:latin typeface="Arial" charset="0"/>
+                <a:cs typeface="Arial" charset="0"/>
+              </a:rPr>
+              <a:t>est</a:t>
+            </a:r>
+            <a:r>
+              <a:rPr lang="es-CO" dirty="0">
+                <a:latin typeface="Arial" charset="0"/>
+                <a:cs typeface="Arial" charset="0"/>
+              </a:rPr>
+              <a:t>. subió de 0.202 a 0.533 F1</a:t>
+            </a:r>
+          </a:p>
+          <a:p>
+            <a:pPr indent="-342900">
+              <a:buFont typeface="Arial" panose="020B0604020202020204" pitchFamily="34" charset="0"/>
+              <a:buChar char="•"/>
+            </a:pPr>
+            <a:r>
+              <a:rPr lang="es-CO" dirty="0">
+                <a:latin typeface="Arial" charset="0"/>
+                <a:cs typeface="Arial" charset="0"/>
+              </a:rPr>
+              <a:t>Stop </a:t>
+            </a:r>
+            <a:r>
+              <a:rPr lang="es-CO" dirty="0" err="1">
+                <a:latin typeface="Arial" charset="0"/>
+                <a:cs typeface="Arial" charset="0"/>
+              </a:rPr>
+              <a:t>words</a:t>
+            </a:r>
+            <a:r>
+              <a:rPr lang="es-CO" dirty="0">
+                <a:latin typeface="Arial" charset="0"/>
+                <a:cs typeface="Arial" charset="0"/>
+              </a:rPr>
+              <a:t> conservadas:  la negación 'no' aparece en 87% de reseñas 1 </a:t>
+            </a:r>
+            <a:r>
+              <a:rPr lang="es-CO" dirty="0" err="1">
+                <a:latin typeface="Arial" charset="0"/>
+                <a:cs typeface="Arial" charset="0"/>
+              </a:rPr>
+              <a:t>est</a:t>
+            </a:r>
+            <a:r>
+              <a:rPr lang="es-CO" dirty="0">
+                <a:latin typeface="Arial" charset="0"/>
+                <a:cs typeface="Arial" charset="0"/>
+              </a:rPr>
+              <a:t>. vs 33% de 5 </a:t>
+            </a:r>
+            <a:r>
+              <a:rPr lang="es-CO" dirty="0" err="1">
+                <a:latin typeface="Arial" charset="0"/>
+                <a:cs typeface="Arial" charset="0"/>
+              </a:rPr>
+              <a:t>est</a:t>
+            </a:r>
+            <a:r>
+              <a:rPr lang="es-CO" dirty="0">
+                <a:latin typeface="Arial" charset="0"/>
+                <a:cs typeface="Arial" charset="0"/>
+              </a:rPr>
+              <a:t>. Clave para sentimiento</a:t>
+            </a:r>
+          </a:p>
+          <a:p>
+            <a:pPr indent="0">
+              <a:spcBef>
+                <a:spcPts val="1200"/>
+              </a:spcBef>
+            </a:pPr>
+            <a:r>
+              <a:rPr lang="es-CO" dirty="0">
+                <a:solidFill>
+                  <a:srgbClr val="FFC000"/>
+                </a:solidFill>
+                <a:latin typeface="Arial" charset="0"/>
+                <a:cs typeface="Arial" charset="0"/>
+              </a:rPr>
+              <a:t>Que no funcionó / Limitaciones</a:t>
+            </a:r>
+          </a:p>
+          <a:p>
+            <a:pPr indent="-342900">
+              <a:buFont typeface="Arial" panose="020B0604020202020204" pitchFamily="34" charset="0"/>
+              <a:buChar char="•"/>
+            </a:pPr>
+            <a:r>
+              <a:rPr lang="es-CO" dirty="0">
+                <a:latin typeface="Arial" charset="0"/>
+                <a:cs typeface="Arial" charset="0"/>
+              </a:rPr>
+              <a:t>Class </a:t>
+            </a:r>
+            <a:r>
+              <a:rPr lang="es-CO" dirty="0" err="1">
+                <a:latin typeface="Arial" charset="0"/>
+                <a:cs typeface="Arial" charset="0"/>
+              </a:rPr>
+              <a:t>weights</a:t>
+            </a:r>
+            <a:r>
+              <a:rPr lang="es-CO" dirty="0">
+                <a:latin typeface="Arial" charset="0"/>
+                <a:cs typeface="Arial" charset="0"/>
+              </a:rPr>
+              <a:t> en LSTM sencillo:  empeoraron F1 macro (0.3830 vs 0.3996 sin </a:t>
+            </a:r>
+            <a:r>
+              <a:rPr lang="es-CO" dirty="0" err="1">
+                <a:latin typeface="Arial" charset="0"/>
+                <a:cs typeface="Arial" charset="0"/>
+              </a:rPr>
+              <a:t>weights</a:t>
+            </a:r>
+            <a:r>
+              <a:rPr lang="es-CO" dirty="0">
+                <a:latin typeface="Arial" charset="0"/>
+                <a:cs typeface="Arial" charset="0"/>
+              </a:rPr>
+              <a:t>)</a:t>
+            </a:r>
+          </a:p>
+          <a:p>
+            <a:pPr indent="-342900">
+              <a:buFont typeface="Arial" panose="020B0604020202020204" pitchFamily="34" charset="0"/>
+              <a:buChar char="•"/>
+            </a:pPr>
+            <a:r>
+              <a:rPr lang="es-CO" dirty="0">
+                <a:latin typeface="Arial" charset="0"/>
+                <a:cs typeface="Arial" charset="0"/>
+              </a:rPr>
+              <a:t>Clase 2 estrellas:  siempre la mas </a:t>
+            </a:r>
+            <a:r>
+              <a:rPr lang="es-CO" dirty="0" err="1">
+                <a:latin typeface="Arial" charset="0"/>
+                <a:cs typeface="Arial" charset="0"/>
+              </a:rPr>
+              <a:t>dificil</a:t>
+            </a:r>
+            <a:r>
+              <a:rPr lang="es-CO" dirty="0">
+                <a:latin typeface="Arial" charset="0"/>
+                <a:cs typeface="Arial" charset="0"/>
+              </a:rPr>
+              <a:t> (mejor F1=0.533). </a:t>
+            </a:r>
+            <a:r>
+              <a:rPr lang="es-CO" dirty="0" err="1">
+                <a:latin typeface="Arial" charset="0"/>
+                <a:cs typeface="Arial" charset="0"/>
+              </a:rPr>
+              <a:t>Ambiguedad</a:t>
+            </a:r>
+            <a:r>
+              <a:rPr lang="es-CO" dirty="0">
+                <a:latin typeface="Arial" charset="0"/>
+                <a:cs typeface="Arial" charset="0"/>
+              </a:rPr>
+              <a:t> semántica y pocos datos (5.5%)</a:t>
+            </a:r>
+          </a:p>
+          <a:p>
+            <a:pPr indent="-342900">
+              <a:buFont typeface="Arial" panose="020B0604020202020204" pitchFamily="34" charset="0"/>
+              <a:buChar char="•"/>
+            </a:pPr>
+            <a:r>
+              <a:rPr lang="es-CO" dirty="0">
+                <a:latin typeface="Arial" charset="0"/>
+                <a:cs typeface="Arial" charset="0"/>
+              </a:rPr>
+              <a:t>Data </a:t>
+            </a:r>
+            <a:r>
+              <a:rPr lang="es-CO" dirty="0" err="1">
+                <a:latin typeface="Arial" charset="0"/>
+                <a:cs typeface="Arial" charset="0"/>
+              </a:rPr>
+              <a:t>leakage</a:t>
+            </a:r>
+            <a:r>
+              <a:rPr lang="es-CO" dirty="0">
+                <a:latin typeface="Arial" charset="0"/>
+                <a:cs typeface="Arial" charset="0"/>
+              </a:rPr>
+              <a:t>:  21% duplicados en </a:t>
+            </a:r>
+            <a:r>
+              <a:rPr lang="es-CO" dirty="0" err="1">
+                <a:latin typeface="Arial" charset="0"/>
+                <a:cs typeface="Arial" charset="0"/>
+              </a:rPr>
+              <a:t>train</a:t>
+            </a:r>
+            <a:r>
+              <a:rPr lang="es-CO" dirty="0">
+                <a:latin typeface="Arial" charset="0"/>
+                <a:cs typeface="Arial" charset="0"/>
+              </a:rPr>
+              <a:t>, 902 reseñas compartidas </a:t>
+            </a:r>
+            <a:r>
+              <a:rPr lang="es-CO" dirty="0" err="1">
+                <a:latin typeface="Arial" charset="0"/>
+                <a:cs typeface="Arial" charset="0"/>
+              </a:rPr>
+              <a:t>train</a:t>
+            </a:r>
+            <a:r>
+              <a:rPr lang="es-CO" dirty="0">
+                <a:latin typeface="Arial" charset="0"/>
+                <a:cs typeface="Arial" charset="0"/>
+              </a:rPr>
+              <a:t>/test. Métricas potencialmente infladas</a:t>
+            </a:r>
+          </a:p>
+          <a:p>
+            <a:pPr indent="-342900">
+              <a:buFont typeface="Arial" panose="020B0604020202020204" pitchFamily="34" charset="0"/>
+              <a:buChar char="•"/>
+            </a:pPr>
+            <a:r>
+              <a:rPr lang="es-CO" dirty="0">
+                <a:latin typeface="Arial" charset="0"/>
+                <a:cs typeface="Arial" charset="0"/>
+              </a:rPr>
+              <a:t>LSTM colapsa clases intermedias:  F1=0.022 en clase 4 </a:t>
+            </a:r>
+            <a:r>
+              <a:rPr lang="es-CO" dirty="0" err="1">
+                <a:latin typeface="Arial" charset="0"/>
+                <a:cs typeface="Arial" charset="0"/>
+              </a:rPr>
+              <a:t>est</a:t>
+            </a:r>
+            <a:r>
+              <a:rPr lang="es-CO" dirty="0">
+                <a:latin typeface="Arial" charset="0"/>
+                <a:cs typeface="Arial" charset="0"/>
+              </a:rPr>
+              <a:t>. sin </a:t>
+            </a:r>
+            <a:r>
+              <a:rPr lang="es-CO" dirty="0" err="1">
+                <a:latin typeface="Arial" charset="0"/>
+                <a:cs typeface="Arial" charset="0"/>
+              </a:rPr>
+              <a:t>class</a:t>
+            </a:r>
+            <a:r>
+              <a:rPr lang="es-CO" dirty="0">
+                <a:latin typeface="Arial" charset="0"/>
+                <a:cs typeface="Arial" charset="0"/>
+              </a:rPr>
+              <a:t> </a:t>
+            </a:r>
+            <a:r>
+              <a:rPr lang="es-CO" dirty="0" err="1">
+                <a:latin typeface="Arial" charset="0"/>
+                <a:cs typeface="Arial" charset="0"/>
+              </a:rPr>
+              <a:t>weights</a:t>
+            </a:r>
+            <a:endParaRPr lang="es-CO" dirty="0">
+              <a:latin typeface="Arial" charset="0"/>
+              <a:cs typeface="Arial" charset="0"/>
+            </a:endParaRPr>
+          </a:p>
+        </p:txBody>
+      </p:sp>
+    </p:spTree>
+    <p:extLst>
+      <p:ext uri="{BB962C8B-B14F-4D97-AF65-F5344CB8AC3E}">
+        <p14:creationId xmlns:p14="http://schemas.microsoft.com/office/powerpoint/2010/main" val="156440924"/>
+      </p:ext>
+    </p:extLst>
+  </p:cSld>
+  <p:clrMapOvr>
+    <a:masterClrMapping/>
+  </p:clrMapOvr>
+</p:sld>
+</file>
+
 <file path=ppt/slides/slide2.xml><?xml version="1.0" encoding="utf-8"?>
 <p:sld xmlns:a="http://schemas.openxmlformats.org/drawingml/2006/main" xmlns:r="http://schemas.openxmlformats.org/officeDocument/2006/relationships" xmlns:p="http://schemas.openxmlformats.org/presentationml/2006/main">
   <p:cSld>
@@ -12640,7 +14829,7 @@
         <p:spPr bwMode="auto">
           <a:xfrm>
             <a:off x="994651" y="2820405"/>
-            <a:ext cx="5397296" cy="2009778"/>
+            <a:ext cx="5397296" cy="2433082"/>
           </a:xfrm>
           <a:prstGeom prst="rect">
             <a:avLst/>
@@ -12770,104 +14959,101 @@
             </a:lvl9pPr>
           </a:lstStyle>
           <a:p>
-            <a:pPr marL="0" indent="0" eaLnBrk="1" hangingPunct="1">
-              <a:spcBef>
-                <a:spcPct val="20000"/>
-              </a:spcBef>
-              <a:buClr>
-                <a:schemeClr val="hlink"/>
-              </a:buClr>
-              <a:buSzPct val="55000"/>
+            <a:pPr marL="457200" indent="-457200">
+              <a:buFont typeface="+mj-lt"/>
+              <a:buAutoNum type="arabicPeriod"/>
             </a:pPr>
             <a:r>
-              <a:rPr lang="es-CO" altLang="es-CO" sz="1600" dirty="0">
-                <a:solidFill>
-                  <a:srgbClr val="FFC000"/>
-                </a:solidFill>
-                <a:latin typeface="Arial" charset="0"/>
-                <a:cs typeface="Arial" charset="0"/>
-              </a:rPr>
-              <a:t>1. </a:t>
-            </a:r>
-            <a:r>
-              <a:rPr lang="es-CO" altLang="es-CO" sz="1600" dirty="0" err="1">
-                <a:solidFill>
-                  <a:srgbClr val="FFC000"/>
-                </a:solidFill>
-                <a:latin typeface="Arial" charset="0"/>
-                <a:cs typeface="Arial" charset="0"/>
+              <a:rPr lang="es-MX" sz="1800" dirty="0">
+                <a:latin typeface="Arial" panose="020B0604020202020204" pitchFamily="34" charset="0"/>
+                <a:cs typeface="Arial" panose="020B0604020202020204" pitchFamily="34" charset="0"/>
+              </a:rPr>
+              <a:t>Objetivos</a:t>
+            </a:r>
+          </a:p>
+          <a:p>
+            <a:pPr marL="457200" indent="-457200">
+              <a:buFont typeface="+mj-lt"/>
+              <a:buAutoNum type="arabicPeriod"/>
+            </a:pPr>
+            <a:r>
+              <a:rPr lang="es-MX" sz="1800" dirty="0" err="1">
+                <a:latin typeface="Arial" panose="020B0604020202020204" pitchFamily="34" charset="0"/>
+                <a:cs typeface="Arial" panose="020B0604020202020204" pitchFamily="34" charset="0"/>
               </a:rPr>
               <a:t>Dataset</a:t>
             </a:r>
             <a:r>
-              <a:rPr lang="es-CO" altLang="es-CO" sz="1600" dirty="0">
-                <a:solidFill>
-                  <a:srgbClr val="FFC000"/>
-                </a:solidFill>
-                <a:latin typeface="Arial" charset="0"/>
-                <a:cs typeface="Arial" charset="0"/>
+              <a:rPr lang="es-MX" sz="1800" dirty="0">
+                <a:latin typeface="Arial" panose="020B0604020202020204" pitchFamily="34" charset="0"/>
+                <a:cs typeface="Arial" panose="020B0604020202020204" pitchFamily="34" charset="0"/>
               </a:rPr>
               <a:t> y Problema</a:t>
             </a:r>
           </a:p>
           <a:p>
-            <a:r>
-              <a:rPr lang="es-CO" sz="1600" dirty="0">
-                <a:solidFill>
-                  <a:srgbClr val="FFC000"/>
-                </a:solidFill>
-                <a:latin typeface="Arial" charset="0"/>
-                <a:cs typeface="Arial" charset="0"/>
-              </a:rPr>
-              <a:t>2. Preprocesamiento e Infraestructura Compartida</a:t>
-            </a:r>
-          </a:p>
-          <a:p>
-            <a:r>
-              <a:rPr lang="es-CO" sz="1600" dirty="0">
-                <a:solidFill>
-                  <a:srgbClr val="FFC000"/>
-                </a:solidFill>
-                <a:latin typeface="Arial" charset="0"/>
-                <a:cs typeface="Arial" charset="0"/>
-              </a:rPr>
-              <a:t>3. Modelos Clásicos</a:t>
-            </a:r>
-          </a:p>
-          <a:p>
-            <a:r>
-              <a:rPr lang="es-CO" sz="1600" dirty="0">
-                <a:solidFill>
-                  <a:srgbClr val="FFC000"/>
-                </a:solidFill>
-                <a:latin typeface="Arial" charset="0"/>
-                <a:cs typeface="Arial" charset="0"/>
-              </a:rPr>
-              <a:t>4. Modelo Nuevo/Combinado</a:t>
-            </a:r>
-          </a:p>
-          <a:p>
-            <a:r>
-              <a:rPr lang="es-CO" sz="1600" dirty="0">
-                <a:solidFill>
-                  <a:srgbClr val="FFC000"/>
-                </a:solidFill>
-                <a:latin typeface="Arial" charset="0"/>
-                <a:cs typeface="Arial" charset="0"/>
-              </a:rPr>
-              <a:t>5. Resultados, Análisis y Conclusiones</a:t>
-            </a:r>
-          </a:p>
-          <a:p>
-            <a:r>
-              <a:rPr lang="es-CO" sz="1600" dirty="0">
-                <a:solidFill>
-                  <a:srgbClr val="FFC000"/>
-                </a:solidFill>
-                <a:latin typeface="Arial" charset="0"/>
-                <a:cs typeface="Arial" charset="0"/>
-              </a:rPr>
-              <a:t>6. Investigación</a:t>
+            <a:pPr marL="457200" indent="-457200">
+              <a:buFont typeface="+mj-lt"/>
+              <a:buAutoNum type="arabicPeriod"/>
+            </a:pPr>
+            <a:r>
+              <a:rPr lang="es-MX" sz="1800" dirty="0">
+                <a:latin typeface="Arial" panose="020B0604020202020204" pitchFamily="34" charset="0"/>
+                <a:cs typeface="Arial" panose="020B0604020202020204" pitchFamily="34" charset="0"/>
+              </a:rPr>
+              <a:t>Preprocesamiento e Infraestructura Compartida</a:t>
+            </a:r>
+          </a:p>
+          <a:p>
+            <a:pPr marL="457200" indent="-457200">
+              <a:buFont typeface="+mj-lt"/>
+              <a:buAutoNum type="arabicPeriod"/>
+            </a:pPr>
+            <a:r>
+              <a:rPr lang="es-MX" sz="1800" dirty="0">
+                <a:latin typeface="Arial" panose="020B0604020202020204" pitchFamily="34" charset="0"/>
+                <a:cs typeface="Arial" panose="020B0604020202020204" pitchFamily="34" charset="0"/>
+              </a:rPr>
+              <a:t>Modelos Clásicos</a:t>
+            </a:r>
+          </a:p>
+          <a:p>
+            <a:pPr marL="457200" indent="-457200">
+              <a:buFont typeface="+mj-lt"/>
+              <a:buAutoNum type="arabicPeriod"/>
+            </a:pPr>
+            <a:r>
+              <a:rPr lang="es-MX" sz="1800" dirty="0">
+                <a:latin typeface="Arial" panose="020B0604020202020204" pitchFamily="34" charset="0"/>
+                <a:cs typeface="Arial" panose="020B0604020202020204" pitchFamily="34" charset="0"/>
+              </a:rPr>
+              <a:t>Modelo Nuevo/Combinado</a:t>
+            </a:r>
+          </a:p>
+          <a:p>
+            <a:pPr marL="457200" indent="-457200">
+              <a:buFont typeface="+mj-lt"/>
+              <a:buAutoNum type="arabicPeriod"/>
+            </a:pPr>
+            <a:r>
+              <a:rPr lang="es-MX" sz="1800" dirty="0">
+                <a:latin typeface="Arial" panose="020B0604020202020204" pitchFamily="34" charset="0"/>
+                <a:cs typeface="Arial" panose="020B0604020202020204" pitchFamily="34" charset="0"/>
+              </a:rPr>
+              <a:t>Resultados, Análisis y Conclusiones</a:t>
+            </a:r>
+          </a:p>
+          <a:p>
+            <a:pPr marL="457200" indent="-457200">
+              <a:buFont typeface="+mj-lt"/>
+              <a:buAutoNum type="arabicPeriod"/>
+            </a:pPr>
+            <a:r>
+              <a:rPr lang="es-MX" sz="1800" dirty="0">
+                <a:latin typeface="Arial" panose="020B0604020202020204" pitchFamily="34" charset="0"/>
+                <a:cs typeface="Arial" panose="020B0604020202020204" pitchFamily="34" charset="0"/>
+              </a:rPr>
+              <a:t>Investigación</a:t>
             </a:r>
           </a:p>
           <a:p>
@@ -12969,7 +15155,1312 @@
 </p:sld>
 </file>
 
+<file path=ppt/slides/slide20.xml><?xml version="1.0" encoding="utf-8"?>
+<p:sld xmlns:a="http://schemas.openxmlformats.org/drawingml/2006/main" xmlns:r="http://schemas.openxmlformats.org/officeDocument/2006/relationships" xmlns:p="http://schemas.openxmlformats.org/presentationml/2006/main">
+  <p:cSld>
+    <p:spTree>
+      <p:nvGrpSpPr>
+        <p:cNvPr id="1" name="">
+          <a:extLst>
+            <a:ext uri="{FF2B5EF4-FFF2-40B4-BE49-F238E27FC236}">
+              <a16:creationId xmlns:a16="http://schemas.microsoft.com/office/drawing/2014/main" id="{C4015590-82B2-8C23-38ED-4BE7C6F8379A}"/>
+            </a:ext>
+          </a:extLst>
+        </p:cNvPr>
+        <p:cNvGrpSpPr/>
+        <p:nvPr/>
+      </p:nvGrpSpPr>
+      <p:grpSpPr>
+        <a:xfrm>
+          <a:off x="0" y="0"/>
+          <a:ext cx="0" cy="0"/>
+          <a:chOff x="0" y="0"/>
+          <a:chExt cx="0" cy="0"/>
+        </a:xfrm>
+      </p:grpSpPr>
+      <p:pic>
+        <p:nvPicPr>
+          <p:cNvPr id="4" name="Marcador de contenido 3">
+            <a:extLst>
+              <a:ext uri="{FF2B5EF4-FFF2-40B4-BE49-F238E27FC236}">
+                <a16:creationId xmlns:a16="http://schemas.microsoft.com/office/drawing/2014/main" id="{C47F972F-C7BF-CCA4-7C47-632E068057BF}"/>
+              </a:ext>
+            </a:extLst>
+          </p:cNvPr>
+          <p:cNvPicPr>
+            <a:picLocks noGrp="1" noChangeAspect="1"/>
+          </p:cNvPicPr>
+          <p:nvPr>
+            <p:ph idx="1"/>
+          </p:nvPr>
+        </p:nvPicPr>
+        <p:blipFill>
+          <a:blip r:embed="rId2">
+            <a:extLst>
+              <a:ext uri="{28A0092B-C50C-407E-A947-70E740481C1C}">
+                <a14:useLocalDpi xmlns:a14="http://schemas.microsoft.com/office/drawing/2010/main" val="0"/>
+              </a:ext>
+            </a:extLst>
+          </a:blip>
+          <a:stretch>
+            <a:fillRect/>
+          </a:stretch>
+        </p:blipFill>
+        <p:spPr>
+          <a:xfrm>
+            <a:off x="0" y="0"/>
+            <a:ext cx="12201128" cy="6863135"/>
+          </a:xfrm>
+        </p:spPr>
+      </p:pic>
+      <p:sp>
+        <p:nvSpPr>
+          <p:cNvPr id="31" name="Rectángulo 30">
+            <a:extLst>
+              <a:ext uri="{FF2B5EF4-FFF2-40B4-BE49-F238E27FC236}">
+                <a16:creationId xmlns:a16="http://schemas.microsoft.com/office/drawing/2014/main" id="{04DE59F5-4702-7FA0-B106-F1D50526EC79}"/>
+              </a:ext>
+            </a:extLst>
+          </p:cNvPr>
+          <p:cNvSpPr/>
+          <p:nvPr/>
+        </p:nvSpPr>
+        <p:spPr>
+          <a:xfrm>
+            <a:off x="1341913" y="583285"/>
+            <a:ext cx="7160820" cy="553998"/>
+          </a:xfrm>
+          <a:prstGeom prst="rect">
+            <a:avLst/>
+          </a:prstGeom>
+        </p:spPr>
+        <p:txBody>
+          <a:bodyPr wrap="square">
+            <a:spAutoFit/>
+          </a:bodyPr>
+          <a:lstStyle/>
+          <a:p>
+            <a:pPr algn="ctr"/>
+            <a:r>
+              <a:rPr lang="es-MX" sz="3000" b="1" dirty="0">
+                <a:solidFill>
+                  <a:schemeClr val="bg1"/>
+                </a:solidFill>
+                <a:latin typeface="Arial" charset="0"/>
+                <a:cs typeface="Arial" charset="0"/>
+              </a:rPr>
+              <a:t>Conclusiones</a:t>
+            </a:r>
+            <a:endParaRPr lang="es-ES_tradnl" sz="3000" b="1" dirty="0">
+              <a:solidFill>
+                <a:schemeClr val="bg1"/>
+              </a:solidFill>
+              <a:latin typeface="Arial" charset="0"/>
+              <a:cs typeface="Arial" charset="0"/>
+            </a:endParaRPr>
+          </a:p>
+        </p:txBody>
+      </p:sp>
+      <p:sp>
+        <p:nvSpPr>
+          <p:cNvPr id="7" name="CuadroTexto 6">
+            <a:extLst>
+              <a:ext uri="{FF2B5EF4-FFF2-40B4-BE49-F238E27FC236}">
+                <a16:creationId xmlns:a16="http://schemas.microsoft.com/office/drawing/2014/main" id="{6B6A8B0B-C117-CA28-F20C-81EAA0C900F4}"/>
+              </a:ext>
+            </a:extLst>
+          </p:cNvPr>
+          <p:cNvSpPr txBox="1"/>
+          <p:nvPr/>
+        </p:nvSpPr>
+        <p:spPr>
+          <a:xfrm>
+            <a:off x="373281" y="1720568"/>
+            <a:ext cx="11182346" cy="4801314"/>
+          </a:xfrm>
+          <a:prstGeom prst="rect">
+            <a:avLst/>
+          </a:prstGeom>
+          <a:noFill/>
+        </p:spPr>
+        <p:txBody>
+          <a:bodyPr wrap="square">
+            <a:spAutoFit/>
+          </a:bodyPr>
+          <a:lstStyle/>
+          <a:p>
+            <a:pPr indent="-342900">
+              <a:buFont typeface="Arial" panose="020B0604020202020204" pitchFamily="34" charset="0"/>
+              <a:buChar char="•"/>
+            </a:pPr>
+            <a:r>
+              <a:rPr lang="es-CO" b="1" dirty="0">
+                <a:latin typeface="Arial" charset="0"/>
+                <a:cs typeface="Arial" charset="0"/>
+              </a:rPr>
+              <a:t>Complejidad arquitectónica mejora rendimiento</a:t>
+            </a:r>
+            <a:r>
+              <a:rPr lang="es-CO" dirty="0">
+                <a:latin typeface="Arial" charset="0"/>
+                <a:cs typeface="Arial" charset="0"/>
+              </a:rPr>
+              <a:t>:  cada salto de complejidad aporta mejora medible (LSTM 0.40 &lt; </a:t>
+            </a:r>
+            <a:r>
+              <a:rPr lang="es-CO" dirty="0" err="1">
+                <a:latin typeface="Arial" charset="0"/>
+                <a:cs typeface="Arial" charset="0"/>
+              </a:rPr>
+              <a:t>BiLSTM</a:t>
+            </a:r>
+            <a:r>
+              <a:rPr lang="es-CO" dirty="0">
+                <a:latin typeface="Arial" charset="0"/>
+                <a:cs typeface="Arial" charset="0"/>
+              </a:rPr>
+              <a:t> 0.57 &lt; </a:t>
+            </a:r>
+            <a:r>
+              <a:rPr lang="es-CO" dirty="0" err="1">
+                <a:latin typeface="Arial" charset="0"/>
+                <a:cs typeface="Arial" charset="0"/>
+              </a:rPr>
+              <a:t>BiLSTM+MultiHead</a:t>
+            </a:r>
+            <a:r>
+              <a:rPr lang="es-CO" dirty="0">
+                <a:latin typeface="Arial" charset="0"/>
+                <a:cs typeface="Arial" charset="0"/>
+              </a:rPr>
+              <a:t> 0.62 F1 macro)</a:t>
+            </a:r>
+            <a:br>
+              <a:rPr lang="es-CO" dirty="0">
+                <a:latin typeface="Arial" charset="0"/>
+                <a:cs typeface="Arial" charset="0"/>
+              </a:rPr>
+            </a:br>
+            <a:endParaRPr lang="es-CO" dirty="0">
+              <a:latin typeface="Arial" charset="0"/>
+              <a:cs typeface="Arial" charset="0"/>
+            </a:endParaRPr>
+          </a:p>
+          <a:p>
+            <a:pPr indent="-342900">
+              <a:buFont typeface="Arial" panose="020B0604020202020204" pitchFamily="34" charset="0"/>
+              <a:buChar char="•"/>
+            </a:pPr>
+            <a:r>
+              <a:rPr lang="es-CO" b="1" dirty="0">
+                <a:latin typeface="Arial" charset="0"/>
+                <a:cs typeface="Arial" charset="0"/>
+              </a:rPr>
+              <a:t>El desbalance severo domina el problema</a:t>
+            </a:r>
+            <a:r>
+              <a:rPr lang="es-CO" dirty="0">
+                <a:latin typeface="Arial" charset="0"/>
+                <a:cs typeface="Arial" charset="0"/>
+              </a:rPr>
+              <a:t>:  sin manejo explicito, los modelos colapsan hacia la clase mayoritaria (5 </a:t>
+            </a:r>
+            <a:r>
+              <a:rPr lang="es-CO" dirty="0" err="1">
+                <a:latin typeface="Arial" charset="0"/>
+                <a:cs typeface="Arial" charset="0"/>
+              </a:rPr>
+              <a:t>est</a:t>
+            </a:r>
+            <a:r>
+              <a:rPr lang="es-CO" dirty="0">
+                <a:latin typeface="Arial" charset="0"/>
+                <a:cs typeface="Arial" charset="0"/>
+              </a:rPr>
+              <a:t>.)</a:t>
+            </a:r>
+            <a:br>
+              <a:rPr lang="es-CO" dirty="0">
+                <a:latin typeface="Arial" charset="0"/>
+                <a:cs typeface="Arial" charset="0"/>
+              </a:rPr>
+            </a:br>
+            <a:endParaRPr lang="es-CO" dirty="0">
+              <a:latin typeface="Arial" charset="0"/>
+              <a:cs typeface="Arial" charset="0"/>
+            </a:endParaRPr>
+          </a:p>
+          <a:p>
+            <a:pPr indent="-342900">
+              <a:buFont typeface="Arial" panose="020B0604020202020204" pitchFamily="34" charset="0"/>
+              <a:buChar char="•"/>
+            </a:pPr>
+            <a:r>
+              <a:rPr lang="es-CO" b="1" dirty="0">
+                <a:latin typeface="Arial" charset="0"/>
+                <a:cs typeface="Arial" charset="0"/>
+              </a:rPr>
+              <a:t>El efecto de </a:t>
+            </a:r>
+            <a:r>
+              <a:rPr lang="es-CO" b="1" dirty="0" err="1">
+                <a:latin typeface="Arial" charset="0"/>
+                <a:cs typeface="Arial" charset="0"/>
+              </a:rPr>
+              <a:t>class</a:t>
+            </a:r>
+            <a:r>
+              <a:rPr lang="es-CO" b="1" dirty="0">
+                <a:latin typeface="Arial" charset="0"/>
+                <a:cs typeface="Arial" charset="0"/>
+              </a:rPr>
+              <a:t> </a:t>
+            </a:r>
+            <a:r>
+              <a:rPr lang="es-CO" b="1" dirty="0" err="1">
+                <a:latin typeface="Arial" charset="0"/>
+                <a:cs typeface="Arial" charset="0"/>
+              </a:rPr>
+              <a:t>weights</a:t>
+            </a:r>
+            <a:r>
+              <a:rPr lang="es-CO" b="1" dirty="0">
+                <a:latin typeface="Arial" charset="0"/>
+                <a:cs typeface="Arial" charset="0"/>
+              </a:rPr>
+              <a:t> varia por modelo</a:t>
+            </a:r>
+            <a:r>
+              <a:rPr lang="es-CO" dirty="0">
+                <a:latin typeface="Arial" charset="0"/>
+                <a:cs typeface="Arial" charset="0"/>
+              </a:rPr>
+              <a:t>:  perjudican al LSTM, mejoran F1 del </a:t>
+            </a:r>
+            <a:r>
+              <a:rPr lang="es-CO" dirty="0" err="1">
+                <a:latin typeface="Arial" charset="0"/>
+                <a:cs typeface="Arial" charset="0"/>
+              </a:rPr>
+              <a:t>BiLSTM</a:t>
+            </a:r>
+            <a:r>
+              <a:rPr lang="es-CO" dirty="0">
+                <a:latin typeface="Arial" charset="0"/>
+                <a:cs typeface="Arial" charset="0"/>
+              </a:rPr>
+              <a:t> (+2.4pp), y son cruciales para el modelo combinado</a:t>
+            </a:r>
+            <a:br>
+              <a:rPr lang="es-CO" dirty="0">
+                <a:latin typeface="Arial" charset="0"/>
+                <a:cs typeface="Arial" charset="0"/>
+              </a:rPr>
+            </a:br>
+            <a:endParaRPr lang="es-CO" dirty="0">
+              <a:latin typeface="Arial" charset="0"/>
+              <a:cs typeface="Arial" charset="0"/>
+            </a:endParaRPr>
+          </a:p>
+          <a:p>
+            <a:pPr indent="-342900">
+              <a:buFont typeface="Arial" panose="020B0604020202020204" pitchFamily="34" charset="0"/>
+              <a:buChar char="•"/>
+            </a:pPr>
+            <a:r>
+              <a:rPr lang="es-CO" b="1" dirty="0">
+                <a:latin typeface="Arial" charset="0"/>
+                <a:cs typeface="Arial" charset="0"/>
+              </a:rPr>
+              <a:t>Las </a:t>
+            </a:r>
+            <a:r>
+              <a:rPr lang="es-CO" b="1" dirty="0" err="1">
+                <a:latin typeface="Arial" charset="0"/>
+                <a:cs typeface="Arial" charset="0"/>
+              </a:rPr>
+              <a:t>resenas</a:t>
+            </a:r>
+            <a:r>
+              <a:rPr lang="es-CO" b="1" dirty="0">
+                <a:latin typeface="Arial" charset="0"/>
+                <a:cs typeface="Arial" charset="0"/>
+              </a:rPr>
+              <a:t> negativas son mas largas</a:t>
+            </a:r>
+            <a:r>
+              <a:rPr lang="es-CO" dirty="0">
+                <a:latin typeface="Arial" charset="0"/>
+                <a:cs typeface="Arial" charset="0"/>
+              </a:rPr>
+              <a:t>:  los clientes detallan quejas (mediana 74 tokens en 1 </a:t>
+            </a:r>
+            <a:r>
+              <a:rPr lang="es-CO" dirty="0" err="1">
+                <a:latin typeface="Arial" charset="0"/>
+                <a:cs typeface="Arial" charset="0"/>
+              </a:rPr>
+              <a:t>est</a:t>
+            </a:r>
+            <a:r>
+              <a:rPr lang="es-CO" dirty="0">
+                <a:latin typeface="Arial" charset="0"/>
+                <a:cs typeface="Arial" charset="0"/>
+              </a:rPr>
+              <a:t>. vs 58 en 5 </a:t>
+            </a:r>
+            <a:r>
+              <a:rPr lang="es-CO" dirty="0" err="1">
+                <a:latin typeface="Arial" charset="0"/>
+                <a:cs typeface="Arial" charset="0"/>
+              </a:rPr>
+              <a:t>est</a:t>
+            </a:r>
+            <a:r>
+              <a:rPr lang="es-CO" dirty="0">
+                <a:latin typeface="Arial" charset="0"/>
+                <a:cs typeface="Arial" charset="0"/>
+              </a:rPr>
+              <a:t>.)</a:t>
+            </a:r>
+            <a:br>
+              <a:rPr lang="es-CO" dirty="0">
+                <a:latin typeface="Arial" charset="0"/>
+                <a:cs typeface="Arial" charset="0"/>
+              </a:rPr>
+            </a:br>
+            <a:endParaRPr lang="es-CO" dirty="0">
+              <a:latin typeface="Arial" charset="0"/>
+              <a:cs typeface="Arial" charset="0"/>
+            </a:endParaRPr>
+          </a:p>
+          <a:p>
+            <a:pPr indent="-342900">
+              <a:buFont typeface="Arial" panose="020B0604020202020204" pitchFamily="34" charset="0"/>
+              <a:buChar char="•"/>
+            </a:pPr>
+            <a:r>
+              <a:rPr lang="es-CO" b="1" dirty="0">
+                <a:latin typeface="Arial" charset="0"/>
+                <a:cs typeface="Arial" charset="0"/>
+              </a:rPr>
+              <a:t>El mejor modelo del Proyecto Principal</a:t>
+            </a:r>
+            <a:r>
+              <a:rPr lang="es-CO" dirty="0">
+                <a:latin typeface="Arial" charset="0"/>
+                <a:cs typeface="Arial" charset="0"/>
+              </a:rPr>
+              <a:t> (</a:t>
+            </a:r>
+            <a:r>
+              <a:rPr lang="es-CO" dirty="0" err="1">
+                <a:latin typeface="Arial" charset="0"/>
+                <a:cs typeface="Arial" charset="0"/>
+              </a:rPr>
+              <a:t>BiLSTM+MultiHead</a:t>
+            </a:r>
+            <a:r>
+              <a:rPr lang="es-CO" dirty="0">
+                <a:latin typeface="Arial" charset="0"/>
+                <a:cs typeface="Arial" charset="0"/>
+              </a:rPr>
+              <a:t>, F1=0.6193) demuestra que la combinación de representación secuencial y atención es efectiva aun sin </a:t>
+            </a:r>
+            <a:r>
+              <a:rPr lang="es-CO" dirty="0" err="1">
+                <a:latin typeface="Arial" charset="0"/>
+                <a:cs typeface="Arial" charset="0"/>
+              </a:rPr>
+              <a:t>pre-entrenamiento</a:t>
+            </a:r>
+            <a:br>
+              <a:rPr lang="es-CO" dirty="0">
+                <a:latin typeface="Arial" charset="0"/>
+                <a:cs typeface="Arial" charset="0"/>
+              </a:rPr>
+            </a:br>
+            <a:endParaRPr lang="es-CO" dirty="0">
+              <a:latin typeface="Arial" charset="0"/>
+              <a:cs typeface="Arial" charset="0"/>
+            </a:endParaRPr>
+          </a:p>
+          <a:p>
+            <a:pPr indent="-342900">
+              <a:buFont typeface="Arial" panose="020B0604020202020204" pitchFamily="34" charset="0"/>
+              <a:buChar char="•"/>
+            </a:pPr>
+            <a:r>
+              <a:rPr lang="es-CO" b="1" dirty="0">
+                <a:latin typeface="Arial" charset="0"/>
+                <a:cs typeface="Arial" charset="0"/>
+              </a:rPr>
+              <a:t>BETO fine-</a:t>
+            </a:r>
+            <a:r>
+              <a:rPr lang="es-CO" b="1" dirty="0" err="1">
+                <a:latin typeface="Arial" charset="0"/>
+                <a:cs typeface="Arial" charset="0"/>
+              </a:rPr>
+              <a:t>tuned</a:t>
+            </a:r>
+            <a:r>
+              <a:rPr lang="es-CO" b="1" dirty="0">
+                <a:latin typeface="Arial" charset="0"/>
+                <a:cs typeface="Arial" charset="0"/>
+              </a:rPr>
+              <a:t> </a:t>
+            </a:r>
+            <a:r>
+              <a:rPr lang="es-CO" dirty="0">
+                <a:latin typeface="Arial" charset="0"/>
+                <a:cs typeface="Arial" charset="0"/>
+              </a:rPr>
+              <a:t>(Tarea de Investigación) supera al mejor clásico por +8.2% F1 macro, validando el valor de </a:t>
+            </a:r>
+            <a:r>
+              <a:rPr lang="es-CO" dirty="0" err="1">
+                <a:latin typeface="Arial" charset="0"/>
+                <a:cs typeface="Arial" charset="0"/>
+              </a:rPr>
+              <a:t>embeddings</a:t>
+            </a:r>
+            <a:r>
+              <a:rPr lang="es-CO" dirty="0">
+                <a:latin typeface="Arial" charset="0"/>
+                <a:cs typeface="Arial" charset="0"/>
+              </a:rPr>
+              <a:t> contextuales </a:t>
+            </a:r>
+            <a:r>
+              <a:rPr lang="es-CO" dirty="0" err="1">
+                <a:latin typeface="Arial" charset="0"/>
+                <a:cs typeface="Arial" charset="0"/>
+              </a:rPr>
+              <a:t>pre-entrenados</a:t>
+            </a:r>
+            <a:r>
+              <a:rPr lang="es-CO" dirty="0">
+                <a:latin typeface="Arial" charset="0"/>
+                <a:cs typeface="Arial" charset="0"/>
+              </a:rPr>
+              <a:t> para español</a:t>
+            </a:r>
+          </a:p>
+        </p:txBody>
+      </p:sp>
+    </p:spTree>
+    <p:extLst>
+      <p:ext uri="{BB962C8B-B14F-4D97-AF65-F5344CB8AC3E}">
+        <p14:creationId xmlns:p14="http://schemas.microsoft.com/office/powerpoint/2010/main" val="1758945070"/>
+      </p:ext>
+    </p:extLst>
+  </p:cSld>
+  <p:clrMapOvr>
+    <a:masterClrMapping/>
+  </p:clrMapOvr>
+</p:sld>
+</file>
+
+<file path=ppt/slides/slide21.xml><?xml version="1.0" encoding="utf-8"?>
+<p:sld xmlns:a="http://schemas.openxmlformats.org/drawingml/2006/main" xmlns:r="http://schemas.openxmlformats.org/officeDocument/2006/relationships" xmlns:p="http://schemas.openxmlformats.org/presentationml/2006/main">
+  <p:cSld>
+    <p:spTree>
+      <p:nvGrpSpPr>
+        <p:cNvPr id="1" name="">
+          <a:extLst>
+            <a:ext uri="{FF2B5EF4-FFF2-40B4-BE49-F238E27FC236}">
+              <a16:creationId xmlns:a16="http://schemas.microsoft.com/office/drawing/2014/main" id="{440309FA-0293-19C4-A094-3C81300BA9D0}"/>
+            </a:ext>
+          </a:extLst>
+        </p:cNvPr>
+        <p:cNvGrpSpPr/>
+        <p:nvPr/>
+      </p:nvGrpSpPr>
+      <p:grpSpPr>
+        <a:xfrm>
+          <a:off x="0" y="0"/>
+          <a:ext cx="0" cy="0"/>
+          <a:chOff x="0" y="0"/>
+          <a:chExt cx="0" cy="0"/>
+        </a:xfrm>
+      </p:grpSpPr>
+      <p:pic>
+        <p:nvPicPr>
+          <p:cNvPr id="4" name="Marcador de contenido 3">
+            <a:extLst>
+              <a:ext uri="{FF2B5EF4-FFF2-40B4-BE49-F238E27FC236}">
+                <a16:creationId xmlns:a16="http://schemas.microsoft.com/office/drawing/2014/main" id="{2A36A694-B7CA-55AA-FF58-B9D3FE03D830}"/>
+              </a:ext>
+            </a:extLst>
+          </p:cNvPr>
+          <p:cNvPicPr>
+            <a:picLocks noGrp="1" noChangeAspect="1"/>
+          </p:cNvPicPr>
+          <p:nvPr>
+            <p:ph idx="1"/>
+          </p:nvPr>
+        </p:nvPicPr>
+        <p:blipFill>
+          <a:blip r:embed="rId2">
+            <a:extLst>
+              <a:ext uri="{28A0092B-C50C-407E-A947-70E740481C1C}">
+                <a14:useLocalDpi xmlns:a14="http://schemas.microsoft.com/office/drawing/2010/main" val="0"/>
+              </a:ext>
+            </a:extLst>
+          </a:blip>
+          <a:stretch>
+            <a:fillRect/>
+          </a:stretch>
+        </p:blipFill>
+        <p:spPr>
+          <a:xfrm>
+            <a:off x="0" y="0"/>
+            <a:ext cx="12201128" cy="6863135"/>
+          </a:xfrm>
+        </p:spPr>
+      </p:pic>
+      <p:sp>
+        <p:nvSpPr>
+          <p:cNvPr id="31" name="Rectángulo 30">
+            <a:extLst>
+              <a:ext uri="{FF2B5EF4-FFF2-40B4-BE49-F238E27FC236}">
+                <a16:creationId xmlns:a16="http://schemas.microsoft.com/office/drawing/2014/main" id="{E267601E-5BEE-EA3C-D4CC-896BC2FA9B1A}"/>
+              </a:ext>
+            </a:extLst>
+          </p:cNvPr>
+          <p:cNvSpPr/>
+          <p:nvPr/>
+        </p:nvSpPr>
+        <p:spPr>
+          <a:xfrm>
+            <a:off x="1341913" y="583285"/>
+            <a:ext cx="7160820" cy="553998"/>
+          </a:xfrm>
+          <a:prstGeom prst="rect">
+            <a:avLst/>
+          </a:prstGeom>
+        </p:spPr>
+        <p:txBody>
+          <a:bodyPr wrap="square">
+            <a:spAutoFit/>
+          </a:bodyPr>
+          <a:lstStyle/>
+          <a:p>
+            <a:pPr algn="ctr"/>
+            <a:r>
+              <a:rPr lang="es-MX" sz="3000" b="1" dirty="0">
+                <a:solidFill>
+                  <a:schemeClr val="bg1"/>
+                </a:solidFill>
+                <a:latin typeface="Arial" charset="0"/>
+                <a:cs typeface="Arial" charset="0"/>
+              </a:rPr>
+              <a:t>Trabajo Futuro… </a:t>
+            </a:r>
+            <a:endParaRPr lang="es-ES_tradnl" sz="3000" b="1" dirty="0">
+              <a:solidFill>
+                <a:schemeClr val="bg1"/>
+              </a:solidFill>
+              <a:latin typeface="Arial" charset="0"/>
+              <a:cs typeface="Arial" charset="0"/>
+            </a:endParaRPr>
+          </a:p>
+        </p:txBody>
+      </p:sp>
+      <p:sp>
+        <p:nvSpPr>
+          <p:cNvPr id="7" name="CuadroTexto 6">
+            <a:extLst>
+              <a:ext uri="{FF2B5EF4-FFF2-40B4-BE49-F238E27FC236}">
+                <a16:creationId xmlns:a16="http://schemas.microsoft.com/office/drawing/2014/main" id="{F80F6576-8991-259D-5D07-4FB2BACBB078}"/>
+              </a:ext>
+            </a:extLst>
+          </p:cNvPr>
+          <p:cNvSpPr txBox="1"/>
+          <p:nvPr/>
+        </p:nvSpPr>
+        <p:spPr>
+          <a:xfrm>
+            <a:off x="373281" y="2136338"/>
+            <a:ext cx="11182346" cy="2585323"/>
+          </a:xfrm>
+          <a:prstGeom prst="rect">
+            <a:avLst/>
+          </a:prstGeom>
+          <a:noFill/>
+        </p:spPr>
+        <p:txBody>
+          <a:bodyPr wrap="square">
+            <a:spAutoFit/>
+          </a:bodyPr>
+          <a:lstStyle/>
+          <a:p>
+            <a:pPr indent="-342900">
+              <a:buFont typeface="Arial" panose="020B0604020202020204" pitchFamily="34" charset="0"/>
+              <a:buChar char="•"/>
+            </a:pPr>
+            <a:r>
+              <a:rPr lang="es-CO" dirty="0" err="1">
+                <a:latin typeface="Arial" charset="0"/>
+                <a:cs typeface="Arial" charset="0"/>
+              </a:rPr>
+              <a:t>Deduplicar</a:t>
+            </a:r>
+            <a:r>
+              <a:rPr lang="es-CO" dirty="0">
+                <a:latin typeface="Arial" charset="0"/>
+                <a:cs typeface="Arial" charset="0"/>
+              </a:rPr>
+              <a:t> el </a:t>
+            </a:r>
+            <a:r>
+              <a:rPr lang="es-CO" dirty="0" err="1">
+                <a:latin typeface="Arial" charset="0"/>
+                <a:cs typeface="Arial" charset="0"/>
+              </a:rPr>
+              <a:t>dataset</a:t>
+            </a:r>
+            <a:r>
+              <a:rPr lang="es-CO" dirty="0">
+                <a:latin typeface="Arial" charset="0"/>
+                <a:cs typeface="Arial" charset="0"/>
+              </a:rPr>
+              <a:t> antes de generar </a:t>
+            </a:r>
+            <a:r>
+              <a:rPr lang="es-CO" dirty="0" err="1">
+                <a:latin typeface="Arial" charset="0"/>
+                <a:cs typeface="Arial" charset="0"/>
+              </a:rPr>
+              <a:t>splits</a:t>
+            </a:r>
+            <a:r>
+              <a:rPr lang="es-CO" dirty="0">
+                <a:latin typeface="Arial" charset="0"/>
+                <a:cs typeface="Arial" charset="0"/>
+              </a:rPr>
+              <a:t> para eliminar data </a:t>
+            </a:r>
+            <a:r>
+              <a:rPr lang="es-CO" dirty="0" err="1">
+                <a:latin typeface="Arial" charset="0"/>
+                <a:cs typeface="Arial" charset="0"/>
+              </a:rPr>
+              <a:t>leakage</a:t>
+            </a:r>
+            <a:r>
+              <a:rPr lang="es-CO" dirty="0">
+                <a:latin typeface="Arial" charset="0"/>
+                <a:cs typeface="Arial" charset="0"/>
+              </a:rPr>
+              <a:t> y obtener métricas reales</a:t>
+            </a:r>
+            <a:br>
+              <a:rPr lang="es-CO" dirty="0">
+                <a:latin typeface="Arial" charset="0"/>
+                <a:cs typeface="Arial" charset="0"/>
+              </a:rPr>
+            </a:br>
+            <a:endParaRPr lang="es-CO" dirty="0">
+              <a:latin typeface="Arial" charset="0"/>
+              <a:cs typeface="Arial" charset="0"/>
+            </a:endParaRPr>
+          </a:p>
+          <a:p>
+            <a:pPr indent="-342900">
+              <a:buFont typeface="Arial" panose="020B0604020202020204" pitchFamily="34" charset="0"/>
+              <a:buChar char="•"/>
+            </a:pPr>
+            <a:r>
+              <a:rPr lang="es-CO" dirty="0">
+                <a:latin typeface="Arial" charset="0"/>
+                <a:cs typeface="Arial" charset="0"/>
+              </a:rPr>
+              <a:t>Explorar otros </a:t>
+            </a:r>
+            <a:r>
+              <a:rPr lang="es-CO" dirty="0" err="1">
+                <a:latin typeface="Arial" charset="0"/>
+                <a:cs typeface="Arial" charset="0"/>
+              </a:rPr>
+              <a:t>transformers</a:t>
+            </a:r>
+            <a:r>
+              <a:rPr lang="es-CO" dirty="0">
+                <a:latin typeface="Arial" charset="0"/>
+                <a:cs typeface="Arial" charset="0"/>
+              </a:rPr>
+              <a:t> en español: </a:t>
+            </a:r>
+            <a:r>
+              <a:rPr lang="es-CO" dirty="0" err="1">
+                <a:latin typeface="Arial" charset="0"/>
+                <a:cs typeface="Arial" charset="0"/>
+              </a:rPr>
+              <a:t>RoBERTa</a:t>
+            </a:r>
+            <a:r>
+              <a:rPr lang="es-CO" dirty="0">
+                <a:latin typeface="Arial" charset="0"/>
+                <a:cs typeface="Arial" charset="0"/>
+              </a:rPr>
+              <a:t>-BNE (</a:t>
+            </a:r>
+            <a:r>
+              <a:rPr lang="es-CO" dirty="0" err="1">
+                <a:latin typeface="Arial" charset="0"/>
+                <a:cs typeface="Arial" charset="0"/>
+              </a:rPr>
+              <a:t>MarIA</a:t>
+            </a:r>
+            <a:r>
+              <a:rPr lang="es-CO" dirty="0">
+                <a:latin typeface="Arial" charset="0"/>
+                <a:cs typeface="Arial" charset="0"/>
+              </a:rPr>
+              <a:t>), BERTIN, XLM-</a:t>
+            </a:r>
+            <a:r>
+              <a:rPr lang="es-CO" dirty="0" err="1">
+                <a:latin typeface="Arial" charset="0"/>
+                <a:cs typeface="Arial" charset="0"/>
+              </a:rPr>
+              <a:t>RoBERTa</a:t>
+            </a:r>
+            <a:br>
+              <a:rPr lang="es-CO" dirty="0">
+                <a:latin typeface="Arial" charset="0"/>
+                <a:cs typeface="Arial" charset="0"/>
+              </a:rPr>
+            </a:br>
+            <a:endParaRPr lang="es-CO" dirty="0">
+              <a:latin typeface="Arial" charset="0"/>
+              <a:cs typeface="Arial" charset="0"/>
+            </a:endParaRPr>
+          </a:p>
+          <a:p>
+            <a:pPr indent="-342900">
+              <a:buFont typeface="Arial" panose="020B0604020202020204" pitchFamily="34" charset="0"/>
+              <a:buChar char="•"/>
+            </a:pPr>
+            <a:r>
+              <a:rPr lang="es-CO" dirty="0">
+                <a:latin typeface="Arial" charset="0"/>
+                <a:cs typeface="Arial" charset="0"/>
+              </a:rPr>
+              <a:t>Evaluar técnicas de aumento de datos (back-</a:t>
+            </a:r>
+            <a:r>
+              <a:rPr lang="es-CO" dirty="0" err="1">
+                <a:latin typeface="Arial" charset="0"/>
+                <a:cs typeface="Arial" charset="0"/>
+              </a:rPr>
+              <a:t>translation</a:t>
+            </a:r>
+            <a:r>
+              <a:rPr lang="es-CO" dirty="0">
+                <a:latin typeface="Arial" charset="0"/>
+                <a:cs typeface="Arial" charset="0"/>
+              </a:rPr>
+              <a:t>, parafraseo) para clases minoritarias</a:t>
+            </a:r>
+            <a:br>
+              <a:rPr lang="es-CO" dirty="0">
+                <a:latin typeface="Arial" charset="0"/>
+                <a:cs typeface="Arial" charset="0"/>
+              </a:rPr>
+            </a:br>
+            <a:endParaRPr lang="es-CO" dirty="0">
+              <a:latin typeface="Arial" charset="0"/>
+              <a:cs typeface="Arial" charset="0"/>
+            </a:endParaRPr>
+          </a:p>
+          <a:p>
+            <a:pPr indent="-342900">
+              <a:buFont typeface="Arial" panose="020B0604020202020204" pitchFamily="34" charset="0"/>
+              <a:buChar char="•"/>
+            </a:pPr>
+            <a:r>
+              <a:rPr lang="es-CO" dirty="0">
+                <a:latin typeface="Arial" charset="0"/>
+                <a:cs typeface="Arial" charset="0"/>
+              </a:rPr>
+              <a:t>Implementar interpretabilidad: visualización de pesos de atención sobre reseñas representativas</a:t>
+            </a:r>
+            <a:br>
+              <a:rPr lang="es-CO" dirty="0">
+                <a:latin typeface="Arial" charset="0"/>
+                <a:cs typeface="Arial" charset="0"/>
+              </a:rPr>
+            </a:br>
+            <a:endParaRPr lang="es-CO" dirty="0">
+              <a:latin typeface="Arial" charset="0"/>
+              <a:cs typeface="Arial" charset="0"/>
+            </a:endParaRPr>
+          </a:p>
+          <a:p>
+            <a:pPr indent="-342900">
+              <a:buFont typeface="Arial" panose="020B0604020202020204" pitchFamily="34" charset="0"/>
+              <a:buChar char="•"/>
+            </a:pPr>
+            <a:r>
+              <a:rPr lang="es-CO" dirty="0">
+                <a:latin typeface="Arial" charset="0"/>
+                <a:cs typeface="Arial" charset="0"/>
+              </a:rPr>
+              <a:t>Considerar reducción de clases (3 clases: negativo/neutro/positivo) para mejorar rendimiento</a:t>
+            </a:r>
+          </a:p>
+        </p:txBody>
+      </p:sp>
+    </p:spTree>
+    <p:extLst>
+      <p:ext uri="{BB962C8B-B14F-4D97-AF65-F5344CB8AC3E}">
+        <p14:creationId xmlns:p14="http://schemas.microsoft.com/office/powerpoint/2010/main" val="4265947759"/>
+      </p:ext>
+    </p:extLst>
+  </p:cSld>
+  <p:clrMapOvr>
+    <a:masterClrMapping/>
+  </p:clrMapOvr>
+</p:sld>
+</file>
+
 <file path=ppt/slides/slide3.xml><?xml version="1.0" encoding="utf-8"?>
+<p:sld xmlns:a="http://schemas.openxmlformats.org/drawingml/2006/main" xmlns:r="http://schemas.openxmlformats.org/officeDocument/2006/relationships" xmlns:p="http://schemas.openxmlformats.org/presentationml/2006/main">
+  <p:cSld>
+    <p:spTree>
+      <p:nvGrpSpPr>
+        <p:cNvPr id="1" name="">
+          <a:extLst>
+            <a:ext uri="{FF2B5EF4-FFF2-40B4-BE49-F238E27FC236}">
+              <a16:creationId xmlns:a16="http://schemas.microsoft.com/office/drawing/2014/main" id="{EA83A34E-F075-A0FF-7025-EAA3420270DB}"/>
+            </a:ext>
+          </a:extLst>
+        </p:cNvPr>
+        <p:cNvGrpSpPr/>
+        <p:nvPr/>
+      </p:nvGrpSpPr>
+      <p:grpSpPr>
+        <a:xfrm>
+          <a:off x="0" y="0"/>
+          <a:ext cx="0" cy="0"/>
+          <a:chOff x="0" y="0"/>
+          <a:chExt cx="0" cy="0"/>
+        </a:xfrm>
+      </p:grpSpPr>
+      <p:pic>
+        <p:nvPicPr>
+          <p:cNvPr id="4" name="Marcador de contenido 3">
+            <a:extLst>
+              <a:ext uri="{FF2B5EF4-FFF2-40B4-BE49-F238E27FC236}">
+                <a16:creationId xmlns:a16="http://schemas.microsoft.com/office/drawing/2014/main" id="{D2FC2708-A0F9-43BC-4736-B2F5B6B78A59}"/>
+              </a:ext>
+            </a:extLst>
+          </p:cNvPr>
+          <p:cNvPicPr>
+            <a:picLocks noGrp="1" noChangeAspect="1"/>
+          </p:cNvPicPr>
+          <p:nvPr>
+            <p:ph idx="1"/>
+          </p:nvPr>
+        </p:nvPicPr>
+        <p:blipFill>
+          <a:blip r:embed="rId2">
+            <a:extLst>
+              <a:ext uri="{28A0092B-C50C-407E-A947-70E740481C1C}">
+                <a14:useLocalDpi xmlns:a14="http://schemas.microsoft.com/office/drawing/2010/main" val="0"/>
+              </a:ext>
+            </a:extLst>
+          </a:blip>
+          <a:stretch>
+            <a:fillRect/>
+          </a:stretch>
+        </p:blipFill>
+        <p:spPr>
+          <a:xfrm>
+            <a:off x="0" y="0"/>
+            <a:ext cx="12201128" cy="6863135"/>
+          </a:xfrm>
+        </p:spPr>
+      </p:pic>
+      <p:sp>
+        <p:nvSpPr>
+          <p:cNvPr id="31" name="Rectángulo 30">
+            <a:extLst>
+              <a:ext uri="{FF2B5EF4-FFF2-40B4-BE49-F238E27FC236}">
+                <a16:creationId xmlns:a16="http://schemas.microsoft.com/office/drawing/2014/main" id="{914C404C-3963-D58A-E1B8-99496ABE49AF}"/>
+              </a:ext>
+            </a:extLst>
+          </p:cNvPr>
+          <p:cNvSpPr/>
+          <p:nvPr/>
+        </p:nvSpPr>
+        <p:spPr>
+          <a:xfrm>
+            <a:off x="1341913" y="583285"/>
+            <a:ext cx="7160820" cy="1015663"/>
+          </a:xfrm>
+          <a:prstGeom prst="rect">
+            <a:avLst/>
+          </a:prstGeom>
+        </p:spPr>
+        <p:txBody>
+          <a:bodyPr wrap="square">
+            <a:spAutoFit/>
+          </a:bodyPr>
+          <a:lstStyle/>
+          <a:p>
+            <a:pPr algn="ctr"/>
+            <a:r>
+              <a:rPr lang="es-CO" sz="3000" b="1" dirty="0">
+                <a:solidFill>
+                  <a:schemeClr val="bg1"/>
+                </a:solidFill>
+                <a:latin typeface="Arial" charset="0"/>
+                <a:cs typeface="Arial" charset="0"/>
+              </a:rPr>
+              <a:t>Objetivos</a:t>
+            </a:r>
+          </a:p>
+          <a:p>
+            <a:pPr algn="ctr"/>
+            <a:endParaRPr lang="es-ES_tradnl" sz="3000" b="1" dirty="0">
+              <a:solidFill>
+                <a:schemeClr val="bg1"/>
+              </a:solidFill>
+              <a:latin typeface="Arial" charset="0"/>
+              <a:cs typeface="Arial" charset="0"/>
+            </a:endParaRPr>
+          </a:p>
+        </p:txBody>
+      </p:sp>
+      <p:sp>
+        <p:nvSpPr>
+          <p:cNvPr id="6" name="CuadroTexto 5">
+            <a:extLst>
+              <a:ext uri="{FF2B5EF4-FFF2-40B4-BE49-F238E27FC236}">
+                <a16:creationId xmlns:a16="http://schemas.microsoft.com/office/drawing/2014/main" id="{F1FD13BD-CF74-A907-3A35-FBC9FA904467}"/>
+              </a:ext>
+            </a:extLst>
+          </p:cNvPr>
+          <p:cNvSpPr txBox="1"/>
+          <p:nvPr/>
+        </p:nvSpPr>
+        <p:spPr>
+          <a:xfrm>
+            <a:off x="1431985" y="1762849"/>
+            <a:ext cx="9817093" cy="4124206"/>
+          </a:xfrm>
+          <a:prstGeom prst="rect">
+            <a:avLst/>
+          </a:prstGeom>
+          <a:noFill/>
+        </p:spPr>
+        <p:txBody>
+          <a:bodyPr wrap="square">
+            <a:spAutoFit/>
+          </a:bodyPr>
+          <a:lstStyle/>
+          <a:p>
+            <a:pPr indent="0">
+              <a:spcBef>
+                <a:spcPts val="1200"/>
+              </a:spcBef>
+            </a:pPr>
+            <a:r>
+              <a:rPr lang="es-CO" dirty="0">
+                <a:solidFill>
+                  <a:srgbClr val="FFC000"/>
+                </a:solidFill>
+                <a:latin typeface="Arial" charset="0"/>
+                <a:cs typeface="Arial" charset="0"/>
+              </a:rPr>
+              <a:t>Objetivo General</a:t>
+            </a:r>
+          </a:p>
+          <a:p>
+            <a:r>
+              <a:rPr lang="es-CO" dirty="0">
+                <a:latin typeface="Arial" charset="0"/>
+                <a:cs typeface="Arial" charset="0"/>
+              </a:rPr>
+              <a:t>Desarrollar y comparar modelos de Deep </a:t>
+            </a:r>
+            <a:r>
+              <a:rPr lang="es-CO" dirty="0" err="1">
+                <a:latin typeface="Arial" charset="0"/>
+                <a:cs typeface="Arial" charset="0"/>
+              </a:rPr>
+              <a:t>Learning</a:t>
+            </a:r>
+            <a:r>
+              <a:rPr lang="es-CO" dirty="0">
+                <a:latin typeface="Arial" charset="0"/>
+                <a:cs typeface="Arial" charset="0"/>
+              </a:rPr>
+              <a:t> (RNN) para clasificación de sentimiento en reseñas de hoteles en español, demostrando profundidad técnica y alcance experimental</a:t>
+            </a:r>
+          </a:p>
+          <a:p>
+            <a:endParaRPr lang="es-CO" dirty="0">
+              <a:latin typeface="Arial" charset="0"/>
+              <a:cs typeface="Arial" charset="0"/>
+            </a:endParaRPr>
+          </a:p>
+          <a:p>
+            <a:pPr>
+              <a:spcBef>
+                <a:spcPts val="1200"/>
+              </a:spcBef>
+            </a:pPr>
+            <a:r>
+              <a:rPr lang="es-CO" dirty="0">
+                <a:solidFill>
+                  <a:srgbClr val="FFC000"/>
+                </a:solidFill>
+                <a:latin typeface="Arial" charset="0"/>
+                <a:cs typeface="Arial" charset="0"/>
+              </a:rPr>
+              <a:t>Objetivos </a:t>
+            </a:r>
+            <a:r>
+              <a:rPr lang="es-CO" dirty="0" err="1">
+                <a:solidFill>
+                  <a:srgbClr val="FFC000"/>
+                </a:solidFill>
+                <a:latin typeface="Arial" charset="0"/>
+                <a:cs typeface="Arial" charset="0"/>
+              </a:rPr>
+              <a:t>Especificos</a:t>
+            </a:r>
+            <a:endParaRPr lang="es-CO" dirty="0">
+              <a:solidFill>
+                <a:srgbClr val="FFC000"/>
+              </a:solidFill>
+              <a:latin typeface="Arial" charset="0"/>
+              <a:cs typeface="Arial" charset="0"/>
+            </a:endParaRPr>
+          </a:p>
+          <a:p>
+            <a:pPr indent="-342900">
+              <a:buFont typeface="Arial" panose="020B0604020202020204" pitchFamily="34" charset="0"/>
+              <a:buChar char="•"/>
+            </a:pPr>
+            <a:r>
+              <a:rPr lang="es-CO" dirty="0">
+                <a:latin typeface="Arial" charset="0"/>
+                <a:cs typeface="Arial" charset="0"/>
+              </a:rPr>
+              <a:t>Realizar un EDA completo del </a:t>
+            </a:r>
+            <a:r>
+              <a:rPr lang="es-CO" dirty="0" err="1">
+                <a:latin typeface="Arial" charset="0"/>
+                <a:cs typeface="Arial" charset="0"/>
+              </a:rPr>
+              <a:t>dataset</a:t>
+            </a:r>
+            <a:r>
+              <a:rPr lang="es-CO" dirty="0">
+                <a:latin typeface="Arial" charset="0"/>
+                <a:cs typeface="Arial" charset="0"/>
+              </a:rPr>
+              <a:t>: dimensionalidad, distribución de clases, longitud de reseñas, vocabulario y detección de sesgos</a:t>
+            </a:r>
+          </a:p>
+          <a:p>
+            <a:pPr indent="-342900">
+              <a:buFont typeface="Arial" panose="020B0604020202020204" pitchFamily="34" charset="0"/>
+              <a:buChar char="•"/>
+            </a:pPr>
+            <a:r>
+              <a:rPr lang="es-CO" dirty="0">
+                <a:latin typeface="Arial" charset="0"/>
+                <a:cs typeface="Arial" charset="0"/>
+              </a:rPr>
+              <a:t>Implementar 2 modelos clásicos de RNN (LSTM unidireccional y </a:t>
+            </a:r>
+            <a:r>
+              <a:rPr lang="es-CO" dirty="0" err="1">
+                <a:latin typeface="Arial" charset="0"/>
+                <a:cs typeface="Arial" charset="0"/>
+              </a:rPr>
+              <a:t>BiLSTM</a:t>
+            </a:r>
+            <a:r>
+              <a:rPr lang="es-CO" dirty="0">
+                <a:latin typeface="Arial" charset="0"/>
+                <a:cs typeface="Arial" charset="0"/>
+              </a:rPr>
+              <a:t> bidireccional) como líneas base</a:t>
+            </a:r>
+          </a:p>
+          <a:p>
+            <a:pPr indent="-342900">
+              <a:buFont typeface="Arial" panose="020B0604020202020204" pitchFamily="34" charset="0"/>
+              <a:buChar char="•"/>
+            </a:pPr>
+            <a:r>
+              <a:rPr lang="es-CO" dirty="0">
+                <a:latin typeface="Arial" charset="0"/>
+                <a:cs typeface="Arial" charset="0"/>
+              </a:rPr>
+              <a:t>Diseñar un modelo nuevo/combinado (</a:t>
+            </a:r>
+            <a:r>
+              <a:rPr lang="es-CO" dirty="0" err="1">
+                <a:latin typeface="Arial" charset="0"/>
+                <a:cs typeface="Arial" charset="0"/>
+              </a:rPr>
+              <a:t>BiLSTM</a:t>
+            </a:r>
+            <a:r>
+              <a:rPr lang="es-CO" dirty="0">
+                <a:latin typeface="Arial" charset="0"/>
+                <a:cs typeface="Arial" charset="0"/>
+              </a:rPr>
+              <a:t> + Multi-Head </a:t>
+            </a:r>
+            <a:r>
+              <a:rPr lang="es-CO" dirty="0" err="1">
+                <a:latin typeface="Arial" charset="0"/>
+                <a:cs typeface="Arial" charset="0"/>
+              </a:rPr>
+              <a:t>Attention</a:t>
+            </a:r>
+            <a:r>
+              <a:rPr lang="es-CO" dirty="0">
+                <a:latin typeface="Arial" charset="0"/>
+                <a:cs typeface="Arial" charset="0"/>
+              </a:rPr>
+              <a:t>) que combine técnicas sin usar redes </a:t>
+            </a:r>
+            <a:r>
+              <a:rPr lang="es-CO" dirty="0" err="1">
+                <a:latin typeface="Arial" charset="0"/>
+                <a:cs typeface="Arial" charset="0"/>
+              </a:rPr>
+              <a:t>pre-entrenadas</a:t>
+            </a:r>
+            <a:endParaRPr lang="es-CO" dirty="0">
+              <a:latin typeface="Arial" charset="0"/>
+              <a:cs typeface="Arial" charset="0"/>
+            </a:endParaRPr>
+          </a:p>
+          <a:p>
+            <a:pPr indent="-342900">
+              <a:buFont typeface="Arial" panose="020B0604020202020204" pitchFamily="34" charset="0"/>
+              <a:buChar char="•"/>
+            </a:pPr>
+            <a:r>
+              <a:rPr lang="es-CO" dirty="0">
+                <a:latin typeface="Arial" charset="0"/>
+                <a:cs typeface="Arial" charset="0"/>
+              </a:rPr>
+              <a:t>Evaluar el impacto del desbalance de clases y estrategias de </a:t>
+            </a:r>
+            <a:r>
+              <a:rPr lang="es-CO" dirty="0" err="1">
+                <a:latin typeface="Arial" charset="0"/>
+                <a:cs typeface="Arial" charset="0"/>
+              </a:rPr>
+              <a:t>mitigacion</a:t>
+            </a:r>
+            <a:r>
+              <a:rPr lang="es-CO" dirty="0">
+                <a:latin typeface="Arial" charset="0"/>
+                <a:cs typeface="Arial" charset="0"/>
+              </a:rPr>
+              <a:t> (</a:t>
+            </a:r>
+            <a:r>
+              <a:rPr lang="es-CO" dirty="0" err="1">
+                <a:latin typeface="Arial" charset="0"/>
+                <a:cs typeface="Arial" charset="0"/>
+              </a:rPr>
+              <a:t>class</a:t>
+            </a:r>
+            <a:r>
+              <a:rPr lang="es-CO" dirty="0">
+                <a:latin typeface="Arial" charset="0"/>
+                <a:cs typeface="Arial" charset="0"/>
+              </a:rPr>
+              <a:t> </a:t>
+            </a:r>
+            <a:r>
+              <a:rPr lang="es-CO" dirty="0" err="1">
+                <a:latin typeface="Arial" charset="0"/>
+                <a:cs typeface="Arial" charset="0"/>
+              </a:rPr>
+              <a:t>weights</a:t>
+            </a:r>
+            <a:r>
+              <a:rPr lang="es-CO" dirty="0">
+                <a:latin typeface="Arial" charset="0"/>
+                <a:cs typeface="Arial" charset="0"/>
+              </a:rPr>
+              <a:t>)</a:t>
+            </a:r>
+          </a:p>
+          <a:p>
+            <a:pPr indent="-342900">
+              <a:buFont typeface="Arial" panose="020B0604020202020204" pitchFamily="34" charset="0"/>
+              <a:buChar char="•"/>
+            </a:pPr>
+            <a:r>
+              <a:rPr lang="es-CO" dirty="0">
+                <a:latin typeface="Arial" charset="0"/>
+                <a:cs typeface="Arial" charset="0"/>
+              </a:rPr>
+              <a:t>Comparar los 3 modelos con métricas robustas: F1 macro, F1 por clase, </a:t>
+            </a:r>
+            <a:r>
+              <a:rPr lang="es-CO" dirty="0" err="1">
+                <a:latin typeface="Arial" charset="0"/>
+                <a:cs typeface="Arial" charset="0"/>
+              </a:rPr>
+              <a:t>precision</a:t>
+            </a:r>
+            <a:r>
+              <a:rPr lang="es-CO" dirty="0">
+                <a:latin typeface="Arial" charset="0"/>
+                <a:cs typeface="Arial" charset="0"/>
+              </a:rPr>
+              <a:t>, </a:t>
+            </a:r>
+            <a:r>
+              <a:rPr lang="es-CO" dirty="0" err="1">
+                <a:latin typeface="Arial" charset="0"/>
+                <a:cs typeface="Arial" charset="0"/>
+              </a:rPr>
+              <a:t>recall</a:t>
+            </a:r>
+            <a:r>
+              <a:rPr lang="es-CO" dirty="0">
+                <a:latin typeface="Arial" charset="0"/>
+                <a:cs typeface="Arial" charset="0"/>
+              </a:rPr>
+              <a:t> y matrices de confusión</a:t>
+            </a:r>
+          </a:p>
+        </p:txBody>
+      </p:sp>
+    </p:spTree>
+    <p:extLst>
+      <p:ext uri="{BB962C8B-B14F-4D97-AF65-F5344CB8AC3E}">
+        <p14:creationId xmlns:p14="http://schemas.microsoft.com/office/powerpoint/2010/main" val="3886717497"/>
+      </p:ext>
+    </p:extLst>
+  </p:cSld>
+  <p:clrMapOvr>
+    <a:masterClrMapping/>
+  </p:clrMapOvr>
+</p:sld>
+</file>
+
+<file path=ppt/slides/slide4.xml><?xml version="1.0" encoding="utf-8"?>
 <p:sld xmlns:a="http://schemas.openxmlformats.org/drawingml/2006/main" xmlns:r="http://schemas.openxmlformats.org/officeDocument/2006/relationships" xmlns:p="http://schemas.openxmlformats.org/presentationml/2006/main">
   <p:cSld>
     <p:bg>
@@ -13385,12 +16876,22 @@
                 <a:latin typeface="Arial" charset="0"/>
                 <a:cs typeface="Arial" charset="0"/>
               </a:rPr>
-              <a:t> 0-4 en PyTorch)</a:t>
-            </a:r>
-            <a:br>
-              <a:rPr lang="es-CO" dirty="0"/>
-            </a:br>
-            <a:endParaRPr lang="es-CO" dirty="0"/>
+              <a:t> 0-4 en </a:t>
+            </a:r>
+            <a:r>
+              <a:rPr lang="es-MX" sz="1600" b="0" dirty="0" err="1">
+                <a:latin typeface="Arial" charset="0"/>
+                <a:cs typeface="Arial" charset="0"/>
+              </a:rPr>
+              <a:t>PyTorch</a:t>
+            </a:r>
+            <a:r>
+              <a:rPr lang="es-MX" sz="1600" b="0" dirty="0">
+                <a:latin typeface="Arial" charset="0"/>
+                <a:cs typeface="Arial" charset="0"/>
+              </a:rPr>
+              <a:t>)</a:t>
+            </a:r>
           </a:p>
           <a:p>
             <a:pPr>
@@ -13398,9 +16899,15 @@
               <a:buChar char="•"/>
             </a:pPr>
             <a:r>
-              <a:rPr lang="es-CO" b="0"/>
-              <a:t>ss</a:t>
-            </a:r>
+              <a:rPr lang="es-MX" sz="1600" b="0" dirty="0">
+                <a:latin typeface="Arial" charset="0"/>
+                <a:cs typeface="Arial" charset="0"/>
+              </a:rPr>
+              <a:t>Desbalance severo: clase 5 estrellas tiene 49.6% de las muestras vs 5.5% de 2 estrellas (ratio 9.1:1)</a:t>
+            </a:r>
+            <a:br>
+              <a:rPr lang="es-CO" dirty="0"/>
+            </a:br>
             <a:endParaRPr lang="es-CO" b="0" dirty="0"/>
           </a:p>
           <a:p>
@@ -13561,7 +17068,7 @@
 </p:sld>
 </file>
 
-<file path=ppt/slides/slide4.xml><?xml version="1.0" encoding="utf-8"?>
+<file path=ppt/slides/slide5.xml><?xml version="1.0" encoding="utf-8"?>
 <p:sld xmlns:a="http://schemas.openxmlformats.org/drawingml/2006/main" xmlns:r="http://schemas.openxmlformats.org/officeDocument/2006/relationships" xmlns:p="http://schemas.openxmlformats.org/presentationml/2006/main">
   <p:cSld>
     <p:spTree>
@@ -14645,7 +18152,7 @@
 </p:sld>
 </file>
 
-<file path=ppt/slides/slide5.xml><?xml version="1.0" encoding="utf-8"?>
+<file path=ppt/slides/slide6.xml><?xml version="1.0" encoding="utf-8"?>
 <p:sld xmlns:a="http://schemas.openxmlformats.org/drawingml/2006/main" xmlns:r="http://schemas.openxmlformats.org/officeDocument/2006/relationships" xmlns:p="http://schemas.openxmlformats.org/presentationml/2006/main">
   <p:cSld>
     <p:spTree>
@@ -15471,7 +18978,251 @@
 </p:sld>
 </file>
 
-<file path=ppt/slides/slide6.xml><?xml version="1.0" encoding="utf-8"?>
+<file path=ppt/slides/slide7.xml><?xml version="1.0" encoding="utf-8"?>
+<p:sld xmlns:a="http://schemas.openxmlformats.org/drawingml/2006/main" xmlns:r="http://schemas.openxmlformats.org/officeDocument/2006/relationships" xmlns:p="http://schemas.openxmlformats.org/presentationml/2006/main">
+  <p:cSld>
+    <p:spTree>
+      <p:nvGrpSpPr>
+        <p:cNvPr id="1" name="">
+          <a:extLst>
+            <a:ext uri="{FF2B5EF4-FFF2-40B4-BE49-F238E27FC236}">
+              <a16:creationId xmlns:a16="http://schemas.microsoft.com/office/drawing/2014/main" id="{2FB30FC2-4ADA-1ECB-2B5F-00C6B747F6AF}"/>
+            </a:ext>
+          </a:extLst>
+        </p:cNvPr>
+        <p:cNvGrpSpPr/>
+        <p:nvPr/>
+      </p:nvGrpSpPr>
+      <p:grpSpPr>
+        <a:xfrm>
+          <a:off x="0" y="0"/>
+          <a:ext cx="0" cy="0"/>
+          <a:chOff x="0" y="0"/>
+          <a:chExt cx="0" cy="0"/>
+        </a:xfrm>
+      </p:grpSpPr>
+      <p:pic>
+        <p:nvPicPr>
+          <p:cNvPr id="4" name="Marcador de contenido 3">
+            <a:extLst>
+              <a:ext uri="{FF2B5EF4-FFF2-40B4-BE49-F238E27FC236}">
+                <a16:creationId xmlns:a16="http://schemas.microsoft.com/office/drawing/2014/main" id="{13FFB714-04DC-06AA-7CFE-1046D6DD06A9}"/>
+              </a:ext>
+            </a:extLst>
+          </p:cNvPr>
+          <p:cNvPicPr>
+            <a:picLocks noGrp="1" noChangeAspect="1"/>
+          </p:cNvPicPr>
+          <p:nvPr>
+            <p:ph idx="1"/>
+          </p:nvPr>
+        </p:nvPicPr>
+        <p:blipFill>
+          <a:blip r:embed="rId2">
+            <a:extLst>
+              <a:ext uri="{28A0092B-C50C-407E-A947-70E740481C1C}">
+                <a14:useLocalDpi xmlns:a14="http://schemas.microsoft.com/office/drawing/2010/main" val="0"/>
+              </a:ext>
+            </a:extLst>
+          </a:blip>
+          <a:stretch>
+            <a:fillRect/>
+          </a:stretch>
+        </p:blipFill>
+        <p:spPr>
+          <a:xfrm>
+            <a:off x="0" y="0"/>
+            <a:ext cx="12201128" cy="6863135"/>
+          </a:xfrm>
+        </p:spPr>
+      </p:pic>
+      <p:sp>
+        <p:nvSpPr>
+          <p:cNvPr id="31" name="Rectángulo 30">
+            <a:extLst>
+              <a:ext uri="{FF2B5EF4-FFF2-40B4-BE49-F238E27FC236}">
+                <a16:creationId xmlns:a16="http://schemas.microsoft.com/office/drawing/2014/main" id="{427CA7D1-9546-AE43-E587-7625A0ECE5CE}"/>
+              </a:ext>
+            </a:extLst>
+          </p:cNvPr>
+          <p:cNvSpPr/>
+          <p:nvPr/>
+        </p:nvSpPr>
+        <p:spPr>
+          <a:xfrm>
+            <a:off x="1341913" y="583285"/>
+            <a:ext cx="7160820" cy="553998"/>
+          </a:xfrm>
+          <a:prstGeom prst="rect">
+            <a:avLst/>
+          </a:prstGeom>
+        </p:spPr>
+        <p:txBody>
+          <a:bodyPr wrap="square">
+            <a:spAutoFit/>
+          </a:bodyPr>
+          <a:lstStyle/>
+          <a:p>
+            <a:pPr algn="ctr"/>
+            <a:r>
+              <a:rPr lang="es-MX" sz="3000" b="1" dirty="0" err="1">
+                <a:solidFill>
+                  <a:schemeClr val="bg1"/>
+                </a:solidFill>
+                <a:latin typeface="Arial" charset="0"/>
+                <a:cs typeface="Arial" charset="0"/>
+              </a:rPr>
+              <a:t>Dataset</a:t>
+            </a:r>
+            <a:r>
+              <a:rPr lang="es-MX" sz="3000" b="1" dirty="0">
+                <a:solidFill>
+                  <a:schemeClr val="bg1"/>
+                </a:solidFill>
+                <a:latin typeface="Arial" charset="0"/>
+                <a:cs typeface="Arial" charset="0"/>
+              </a:rPr>
+              <a:t> – Distribución de Clases</a:t>
+            </a:r>
+            <a:endParaRPr lang="es-ES_tradnl" sz="3000" b="1" dirty="0">
+              <a:solidFill>
+                <a:schemeClr val="bg1"/>
+              </a:solidFill>
+              <a:latin typeface="Arial" charset="0"/>
+              <a:cs typeface="Arial" charset="0"/>
+            </a:endParaRPr>
+          </a:p>
+        </p:txBody>
+      </p:sp>
+      <p:sp>
+        <p:nvSpPr>
+          <p:cNvPr id="6" name="CuadroTexto 5">
+            <a:extLst>
+              <a:ext uri="{FF2B5EF4-FFF2-40B4-BE49-F238E27FC236}">
+                <a16:creationId xmlns:a16="http://schemas.microsoft.com/office/drawing/2014/main" id="{7C75B5F5-AB80-B384-6C23-B467AB3DEA07}"/>
+              </a:ext>
+            </a:extLst>
+          </p:cNvPr>
+          <p:cNvSpPr txBox="1"/>
+          <p:nvPr/>
+        </p:nvSpPr>
+        <p:spPr>
+          <a:xfrm>
+            <a:off x="5538157" y="5202713"/>
+            <a:ext cx="6159260" cy="738664"/>
+          </a:xfrm>
+          <a:prstGeom prst="rect">
+            <a:avLst/>
+          </a:prstGeom>
+          <a:noFill/>
+        </p:spPr>
+        <p:txBody>
+          <a:bodyPr wrap="square">
+            <a:spAutoFit/>
+          </a:bodyPr>
+          <a:lstStyle/>
+          <a:p>
+            <a:r>
+              <a:rPr lang="es-CO" sz="1400" i="1" dirty="0">
+                <a:latin typeface="Arial" charset="0"/>
+              </a:rPr>
+              <a:t>Desbalance severo: ratio 9.1:1 entre clase mayoritaria (5 </a:t>
+            </a:r>
+            <a:r>
+              <a:rPr lang="es-CO" sz="1400" i="1" dirty="0" err="1">
+                <a:latin typeface="Arial" charset="0"/>
+              </a:rPr>
+              <a:t>est</a:t>
+            </a:r>
+            <a:r>
+              <a:rPr lang="es-CO" sz="1400" i="1" dirty="0">
+                <a:latin typeface="Arial" charset="0"/>
+              </a:rPr>
+              <a:t>.) y minoritaria (2 </a:t>
+            </a:r>
+            <a:r>
+              <a:rPr lang="es-CO" sz="1400" i="1" dirty="0" err="1">
+                <a:latin typeface="Arial" charset="0"/>
+              </a:rPr>
+              <a:t>est</a:t>
+            </a:r>
+            <a:r>
+              <a:rPr lang="es-CO" sz="1400" i="1" dirty="0">
+                <a:latin typeface="Arial" charset="0"/>
+              </a:rPr>
+              <a:t>.). Un clasificador trivial que prediga siempre 5 </a:t>
+            </a:r>
+            <a:r>
+              <a:rPr lang="es-CO" sz="1400" i="1" dirty="0" err="1">
+                <a:latin typeface="Arial" charset="0"/>
+              </a:rPr>
+              <a:t>est</a:t>
+            </a:r>
+            <a:r>
+              <a:rPr lang="es-CO" sz="1400" i="1" dirty="0">
+                <a:latin typeface="Arial" charset="0"/>
+              </a:rPr>
+              <a:t>. obtiene 49.6% </a:t>
+            </a:r>
+            <a:r>
+              <a:rPr lang="es-CO" sz="1400" i="1" dirty="0" err="1">
+                <a:latin typeface="Arial" charset="0"/>
+              </a:rPr>
+              <a:t>accuracy</a:t>
+            </a:r>
+            <a:r>
+              <a:rPr lang="es-CO" sz="1400" i="1" dirty="0">
+                <a:latin typeface="Arial" charset="0"/>
+              </a:rPr>
+              <a:t> pero ~0 F1 macro.</a:t>
+            </a:r>
+          </a:p>
+        </p:txBody>
+      </p:sp>
+      <p:pic>
+        <p:nvPicPr>
+          <p:cNvPr id="10" name="Imagen 9">
+            <a:extLst>
+              <a:ext uri="{FF2B5EF4-FFF2-40B4-BE49-F238E27FC236}">
+                <a16:creationId xmlns:a16="http://schemas.microsoft.com/office/drawing/2014/main" id="{C36DA8FB-FD7A-D1A2-96C7-8CA92B58CF02}"/>
+              </a:ext>
+            </a:extLst>
+          </p:cNvPr>
+          <p:cNvPicPr>
+            <a:picLocks noChangeAspect="1"/>
+          </p:cNvPicPr>
+          <p:nvPr/>
+        </p:nvPicPr>
+        <p:blipFill>
+          <a:blip r:embed="rId3"/>
+          <a:stretch>
+            <a:fillRect/>
+          </a:stretch>
+        </p:blipFill>
+        <p:spPr>
+          <a:xfrm>
+            <a:off x="583764" y="1441564"/>
+            <a:ext cx="10782932" cy="3578056"/>
+          </a:xfrm>
+          <a:prstGeom prst="rect">
+            <a:avLst/>
+          </a:prstGeom>
+        </p:spPr>
+      </p:pic>
+    </p:spTree>
+    <p:extLst>
+      <p:ext uri="{BB962C8B-B14F-4D97-AF65-F5344CB8AC3E}">
+        <p14:creationId xmlns:p14="http://schemas.microsoft.com/office/powerpoint/2010/main" val="1002900212"/>
+      </p:ext>
+    </p:extLst>
+  </p:cSld>
+  <p:clrMapOvr>
+    <a:masterClrMapping/>
+  </p:clrMapOvr>
+</p:sld>
+</file>
+
+<file path=ppt/slides/slide8.xml><?xml version="1.0" encoding="utf-8"?>
 <p:sld xmlns:a="http://schemas.openxmlformats.org/drawingml/2006/main" xmlns:r="http://schemas.openxmlformats.org/officeDocument/2006/relationships" xmlns:p="http://schemas.openxmlformats.org/presentationml/2006/main">
   <p:cSld>
     <p:spTree>
@@ -15990,7 +19741,7 @@
                         <a:rPr lang="es-CO" sz="1000">
                           <a:effectLst/>
                         </a:rPr>
-                        <a:t>Lowercase → normalización NFC (preserva tildes y ñ) → elimina URLs/emails/números → elimina caracteres especiales → normaliza espacios</a:t>
+                        <a:t>Lowercase → normalización NFKD (preserva tildes y ñ) → elimina URLs/emails/números → elimina caracteres especiales → normaliza espacios</a:t>
                       </a:r>
                       <a:endParaRPr lang="es-CO" sz="1100">
                         <a:effectLst/>
@@ -16396,7 +20147,7 @@
 </p:sld>
 </file>
 
-<file path=ppt/slides/slide7.xml><?xml version="1.0" encoding="utf-8"?>
+<file path=ppt/slides/slide9.xml><?xml version="1.0" encoding="utf-8"?>
 <p:sld xmlns:a="http://schemas.openxmlformats.org/drawingml/2006/main" xmlns:r="http://schemas.openxmlformats.org/officeDocument/2006/relationships" xmlns:p="http://schemas.openxmlformats.org/presentationml/2006/main">
   <p:cSld>
     <p:spTree>
@@ -17352,1601 +21103,6 @@
     <p:extLst>
       <p:ext uri="{BB962C8B-B14F-4D97-AF65-F5344CB8AC3E}">
         <p14:creationId xmlns:p14="http://schemas.microsoft.com/office/powerpoint/2010/main" val="416484614"/>
-      </p:ext>
-    </p:extLst>
-  </p:cSld>
-  <p:clrMapOvr>
-    <a:masterClrMapping/>
-  </p:clrMapOvr>
-</p:sld>
-</file>
-
-<file path=ppt/slides/slide8.xml><?xml version="1.0" encoding="utf-8"?>
-<p:sld xmlns:a="http://schemas.openxmlformats.org/drawingml/2006/main" xmlns:r="http://schemas.openxmlformats.org/officeDocument/2006/relationships" xmlns:p="http://schemas.openxmlformats.org/presentationml/2006/main">
-  <p:cSld>
-    <p:spTree>
-      <p:nvGrpSpPr>
-        <p:cNvPr id="1" name="">
-          <a:extLst>
-            <a:ext uri="{FF2B5EF4-FFF2-40B4-BE49-F238E27FC236}">
-              <a16:creationId xmlns:a16="http://schemas.microsoft.com/office/drawing/2014/main" id="{7C45A64A-FE20-029D-C8B7-692D2207ED19}"/>
-            </a:ext>
-          </a:extLst>
-        </p:cNvPr>
-        <p:cNvGrpSpPr/>
-        <p:nvPr/>
-      </p:nvGrpSpPr>
-      <p:grpSpPr>
-        <a:xfrm>
-          <a:off x="0" y="0"/>
-          <a:ext cx="0" cy="0"/>
-          <a:chOff x="0" y="0"/>
-          <a:chExt cx="0" cy="0"/>
-        </a:xfrm>
-      </p:grpSpPr>
-      <p:pic>
-        <p:nvPicPr>
-          <p:cNvPr id="4" name="Marcador de contenido 3">
-            <a:extLst>
-              <a:ext uri="{FF2B5EF4-FFF2-40B4-BE49-F238E27FC236}">
-                <a16:creationId xmlns:a16="http://schemas.microsoft.com/office/drawing/2014/main" id="{E3DF2B21-DAB3-AB93-D6A6-AF79F7F38115}"/>
-              </a:ext>
-            </a:extLst>
-          </p:cNvPr>
-          <p:cNvPicPr>
-            <a:picLocks noGrp="1" noChangeAspect="1"/>
-          </p:cNvPicPr>
-          <p:nvPr>
-            <p:ph idx="1"/>
-          </p:nvPr>
-        </p:nvPicPr>
-        <p:blipFill>
-          <a:blip r:embed="rId2">
-            <a:extLst>
-              <a:ext uri="{28A0092B-C50C-407E-A947-70E740481C1C}">
-                <a14:useLocalDpi xmlns:a14="http://schemas.microsoft.com/office/drawing/2010/main" val="0"/>
-              </a:ext>
-            </a:extLst>
-          </a:blip>
-          <a:stretch>
-            <a:fillRect/>
-          </a:stretch>
-        </p:blipFill>
-        <p:spPr>
-          <a:xfrm>
-            <a:off x="0" y="0"/>
-            <a:ext cx="12201128" cy="6863135"/>
-          </a:xfrm>
-        </p:spPr>
-      </p:pic>
-      <p:sp>
-        <p:nvSpPr>
-          <p:cNvPr id="31" name="Rectángulo 30">
-            <a:extLst>
-              <a:ext uri="{FF2B5EF4-FFF2-40B4-BE49-F238E27FC236}">
-                <a16:creationId xmlns:a16="http://schemas.microsoft.com/office/drawing/2014/main" id="{5A14C184-FE17-4DDB-42C9-1F517F4106D8}"/>
-              </a:ext>
-            </a:extLst>
-          </p:cNvPr>
-          <p:cNvSpPr/>
-          <p:nvPr/>
-        </p:nvSpPr>
-        <p:spPr>
-          <a:xfrm>
-            <a:off x="877078" y="583285"/>
-            <a:ext cx="7625655" cy="461665"/>
-          </a:xfrm>
-          <a:prstGeom prst="rect">
-            <a:avLst/>
-          </a:prstGeom>
-        </p:spPr>
-        <p:txBody>
-          <a:bodyPr wrap="square">
-            <a:spAutoFit/>
-          </a:bodyPr>
-          <a:lstStyle/>
-          <a:p>
-            <a:pPr algn="ctr"/>
-            <a:r>
-              <a:rPr lang="es-MX" sz="2400" b="1" dirty="0">
-                <a:solidFill>
-                  <a:schemeClr val="bg1"/>
-                </a:solidFill>
-                <a:latin typeface="Arial" charset="0"/>
-                <a:cs typeface="Arial" charset="0"/>
-              </a:rPr>
-              <a:t>Modelo Clásico 1 — LSTM Unidireccional </a:t>
-            </a:r>
-            <a:endParaRPr lang="es-ES_tradnl" sz="2400" b="1" dirty="0">
-              <a:solidFill>
-                <a:schemeClr val="bg1"/>
-              </a:solidFill>
-              <a:latin typeface="Arial" charset="0"/>
-              <a:cs typeface="Arial" charset="0"/>
-            </a:endParaRPr>
-          </a:p>
-        </p:txBody>
-      </p:sp>
-      <p:graphicFrame>
-        <p:nvGraphicFramePr>
-          <p:cNvPr id="3" name="Tabla 2">
-            <a:extLst>
-              <a:ext uri="{FF2B5EF4-FFF2-40B4-BE49-F238E27FC236}">
-                <a16:creationId xmlns:a16="http://schemas.microsoft.com/office/drawing/2014/main" id="{3F9C8900-793E-EBD8-E4BA-5296782D8E78}"/>
-              </a:ext>
-            </a:extLst>
-          </p:cNvPr>
-          <p:cNvGraphicFramePr>
-            <a:graphicFrameLocks noGrp="1"/>
-          </p:cNvGraphicFramePr>
-          <p:nvPr>
-            <p:extLst>
-              <p:ext uri="{D42A27DB-BD31-4B8C-83A1-F6EECF244321}">
-                <p14:modId xmlns:p14="http://schemas.microsoft.com/office/powerpoint/2010/main" val="1174582248"/>
-              </p:ext>
-            </p:extLst>
-          </p:nvPr>
-        </p:nvGraphicFramePr>
-        <p:xfrm>
-          <a:off x="1012682" y="2009208"/>
-          <a:ext cx="9792167" cy="1524000"/>
-        </p:xfrm>
-        <a:graphic>
-          <a:graphicData uri="http://schemas.openxmlformats.org/drawingml/2006/table">
-            <a:tbl>
-              <a:tblPr>
-                <a:tableStyleId>{8EC20E35-A176-4012-BC5E-935CFFF8708E}</a:tableStyleId>
-              </a:tblPr>
-              <a:tblGrid>
-                <a:gridCol w="763705">
-                  <a:extLst>
-                    <a:ext uri="{9D8B030D-6E8A-4147-A177-3AD203B41FA5}">
-                      <a16:colId xmlns:a16="http://schemas.microsoft.com/office/drawing/2014/main" val="4228599379"/>
-                    </a:ext>
-                  </a:extLst>
-                </a:gridCol>
-                <a:gridCol w="1663413">
-                  <a:extLst>
-                    <a:ext uri="{9D8B030D-6E8A-4147-A177-3AD203B41FA5}">
-                      <a16:colId xmlns:a16="http://schemas.microsoft.com/office/drawing/2014/main" val="4265681645"/>
-                    </a:ext>
-                  </a:extLst>
-                </a:gridCol>
-                <a:gridCol w="2279608">
-                  <a:extLst>
-                    <a:ext uri="{9D8B030D-6E8A-4147-A177-3AD203B41FA5}">
-                      <a16:colId xmlns:a16="http://schemas.microsoft.com/office/drawing/2014/main" val="1293582237"/>
-                    </a:ext>
-                  </a:extLst>
-                </a:gridCol>
-                <a:gridCol w="5085441">
-                  <a:extLst>
-                    <a:ext uri="{9D8B030D-6E8A-4147-A177-3AD203B41FA5}">
-                      <a16:colId xmlns:a16="http://schemas.microsoft.com/office/drawing/2014/main" val="2915196035"/>
-                    </a:ext>
-                  </a:extLst>
-                </a:gridCol>
-              </a:tblGrid>
-              <a:tr h="0">
-                <a:tc>
-                  <a:txBody>
-                    <a:bodyPr/>
-                    <a:lstStyle/>
-                    <a:p>
-                      <a:pPr algn="ctr">
-                        <a:buNone/>
-                      </a:pPr>
-                      <a:r>
-                        <a:rPr lang="es-CO" sz="1000">
-                          <a:effectLst/>
-                        </a:rPr>
-                        <a:t>Capa</a:t>
-                      </a:r>
-                      <a:endParaRPr lang="es-CO" sz="1100">
-                        <a:effectLst/>
-                        <a:latin typeface="Arial" panose="020B0604020202020204" pitchFamily="34" charset="0"/>
-                        <a:ea typeface="Arial" panose="020B0604020202020204" pitchFamily="34" charset="0"/>
-                      </a:endParaRPr>
-                    </a:p>
-                  </a:txBody>
-                  <a:tcPr marL="76200" marR="76200" marT="50800" marB="50800" anchor="ctr"/>
-                </a:tc>
-                <a:tc>
-                  <a:txBody>
-                    <a:bodyPr/>
-                    <a:lstStyle/>
-                    <a:p>
-                      <a:pPr algn="ctr">
-                        <a:buNone/>
-                      </a:pPr>
-                      <a:r>
-                        <a:rPr lang="es-CO" sz="1000">
-                          <a:effectLst/>
-                        </a:rPr>
-                        <a:t>Tipo</a:t>
-                      </a:r>
-                      <a:endParaRPr lang="es-CO" sz="1100">
-                        <a:effectLst/>
-                        <a:latin typeface="Arial" panose="020B0604020202020204" pitchFamily="34" charset="0"/>
-                        <a:ea typeface="Arial" panose="020B0604020202020204" pitchFamily="34" charset="0"/>
-                      </a:endParaRPr>
-                    </a:p>
-                  </a:txBody>
-                  <a:tcPr marL="76200" marR="76200" marT="50800" marB="50800" anchor="ctr"/>
-                </a:tc>
-                <a:tc>
-                  <a:txBody>
-                    <a:bodyPr/>
-                    <a:lstStyle/>
-                    <a:p>
-                      <a:pPr algn="ctr">
-                        <a:buNone/>
-                      </a:pPr>
-                      <a:r>
-                        <a:rPr lang="es-CO" sz="1000">
-                          <a:effectLst/>
-                        </a:rPr>
-                        <a:t>Dimensiones</a:t>
-                      </a:r>
-                      <a:endParaRPr lang="es-CO" sz="1100">
-                        <a:effectLst/>
-                        <a:latin typeface="Arial" panose="020B0604020202020204" pitchFamily="34" charset="0"/>
-                        <a:ea typeface="Arial" panose="020B0604020202020204" pitchFamily="34" charset="0"/>
-                      </a:endParaRPr>
-                    </a:p>
-                  </a:txBody>
-                  <a:tcPr marL="76200" marR="76200" marT="50800" marB="50800" anchor="ctr"/>
-                </a:tc>
-                <a:tc>
-                  <a:txBody>
-                    <a:bodyPr/>
-                    <a:lstStyle/>
-                    <a:p>
-                      <a:pPr algn="ctr">
-                        <a:buNone/>
-                      </a:pPr>
-                      <a:r>
-                        <a:rPr lang="es-CO" sz="1000">
-                          <a:effectLst/>
-                        </a:rPr>
-                        <a:t>Descripción</a:t>
-                      </a:r>
-                      <a:endParaRPr lang="es-CO" sz="1100">
-                        <a:effectLst/>
-                        <a:latin typeface="Arial" panose="020B0604020202020204" pitchFamily="34" charset="0"/>
-                        <a:ea typeface="Arial" panose="020B0604020202020204" pitchFamily="34" charset="0"/>
-                      </a:endParaRPr>
-                    </a:p>
-                  </a:txBody>
-                  <a:tcPr marL="76200" marR="76200" marT="50800" marB="50800" anchor="ctr"/>
-                </a:tc>
-                <a:extLst>
-                  <a:ext uri="{0D108BD9-81ED-4DB2-BD59-A6C34878D82A}">
-                    <a16:rowId xmlns:a16="http://schemas.microsoft.com/office/drawing/2014/main" val="1463678229"/>
-                  </a:ext>
-                </a:extLst>
-              </a:tr>
-              <a:tr h="0">
-                <a:tc>
-                  <a:txBody>
-                    <a:bodyPr/>
-                    <a:lstStyle/>
-                    <a:p>
-                      <a:pPr>
-                        <a:buNone/>
-                      </a:pPr>
-                      <a:r>
-                        <a:rPr lang="es-CO" sz="1000">
-                          <a:effectLst/>
-                        </a:rPr>
-                        <a:t>1</a:t>
-                      </a:r>
-                      <a:endParaRPr lang="es-CO" sz="1100">
-                        <a:effectLst/>
-                        <a:latin typeface="Arial" panose="020B0604020202020204" pitchFamily="34" charset="0"/>
-                        <a:ea typeface="Arial" panose="020B0604020202020204" pitchFamily="34" charset="0"/>
-                      </a:endParaRPr>
-                    </a:p>
-                  </a:txBody>
-                  <a:tcPr marL="76200" marR="76200" marT="50800" marB="50800"/>
-                </a:tc>
-                <a:tc>
-                  <a:txBody>
-                    <a:bodyPr/>
-                    <a:lstStyle/>
-                    <a:p>
-                      <a:pPr algn="ctr">
-                        <a:buNone/>
-                      </a:pPr>
-                      <a:r>
-                        <a:rPr lang="es-CO" sz="1000">
-                          <a:effectLst/>
-                        </a:rPr>
-                        <a:t>Embedding</a:t>
-                      </a:r>
-                      <a:endParaRPr lang="es-CO" sz="1100">
-                        <a:effectLst/>
-                        <a:latin typeface="Arial" panose="020B0604020202020204" pitchFamily="34" charset="0"/>
-                        <a:ea typeface="Arial" panose="020B0604020202020204" pitchFamily="34" charset="0"/>
-                      </a:endParaRPr>
-                    </a:p>
-                  </a:txBody>
-                  <a:tcPr marL="76200" marR="76200" marT="50800" marB="50800"/>
-                </a:tc>
-                <a:tc>
-                  <a:txBody>
-                    <a:bodyPr/>
-                    <a:lstStyle/>
-                    <a:p>
-                      <a:pPr algn="ctr">
-                        <a:buNone/>
-                      </a:pPr>
-                      <a:r>
-                        <a:rPr lang="es-CO" sz="1000">
-                          <a:effectLst/>
-                        </a:rPr>
-                        <a:t>20,000 × 128</a:t>
-                      </a:r>
-                      <a:endParaRPr lang="es-CO" sz="1100">
-                        <a:effectLst/>
-                        <a:latin typeface="Arial" panose="020B0604020202020204" pitchFamily="34" charset="0"/>
-                        <a:ea typeface="Arial" panose="020B0604020202020204" pitchFamily="34" charset="0"/>
-                      </a:endParaRPr>
-                    </a:p>
-                  </a:txBody>
-                  <a:tcPr marL="76200" marR="76200" marT="50800" marB="50800"/>
-                </a:tc>
-                <a:tc>
-                  <a:txBody>
-                    <a:bodyPr/>
-                    <a:lstStyle/>
-                    <a:p>
-                      <a:pPr algn="ctr">
-                        <a:buNone/>
-                      </a:pPr>
-                      <a:r>
-                        <a:rPr lang="es-CO" sz="1000">
-                          <a:effectLst/>
-                        </a:rPr>
-                        <a:t>Entrenables desde cero. padding_idx=0 para ignorar tokens de relleno</a:t>
-                      </a:r>
-                      <a:endParaRPr lang="es-CO" sz="1100">
-                        <a:effectLst/>
-                        <a:latin typeface="Arial" panose="020B0604020202020204" pitchFamily="34" charset="0"/>
-                        <a:ea typeface="Arial" panose="020B0604020202020204" pitchFamily="34" charset="0"/>
-                      </a:endParaRPr>
-                    </a:p>
-                  </a:txBody>
-                  <a:tcPr marL="76200" marR="76200" marT="50800" marB="50800"/>
-                </a:tc>
-                <a:extLst>
-                  <a:ext uri="{0D108BD9-81ED-4DB2-BD59-A6C34878D82A}">
-                    <a16:rowId xmlns:a16="http://schemas.microsoft.com/office/drawing/2014/main" val="2097924961"/>
-                  </a:ext>
-                </a:extLst>
-              </a:tr>
-              <a:tr h="0">
-                <a:tc>
-                  <a:txBody>
-                    <a:bodyPr/>
-                    <a:lstStyle/>
-                    <a:p>
-                      <a:pPr>
-                        <a:buNone/>
-                      </a:pPr>
-                      <a:r>
-                        <a:rPr lang="es-CO" sz="1000">
-                          <a:effectLst/>
-                        </a:rPr>
-                        <a:t>2</a:t>
-                      </a:r>
-                      <a:endParaRPr lang="es-CO" sz="1100">
-                        <a:effectLst/>
-                        <a:latin typeface="Arial" panose="020B0604020202020204" pitchFamily="34" charset="0"/>
-                        <a:ea typeface="Arial" panose="020B0604020202020204" pitchFamily="34" charset="0"/>
-                      </a:endParaRPr>
-                    </a:p>
-                  </a:txBody>
-                  <a:tcPr marL="76200" marR="76200" marT="50800" marB="50800"/>
-                </a:tc>
-                <a:tc>
-                  <a:txBody>
-                    <a:bodyPr/>
-                    <a:lstStyle/>
-                    <a:p>
-                      <a:pPr algn="ctr">
-                        <a:buNone/>
-                      </a:pPr>
-                      <a:r>
-                        <a:rPr lang="es-CO" sz="1000">
-                          <a:effectLst/>
-                        </a:rPr>
-                        <a:t>LSTM</a:t>
-                      </a:r>
-                      <a:endParaRPr lang="es-CO" sz="1100">
-                        <a:effectLst/>
-                        <a:latin typeface="Arial" panose="020B0604020202020204" pitchFamily="34" charset="0"/>
-                        <a:ea typeface="Arial" panose="020B0604020202020204" pitchFamily="34" charset="0"/>
-                      </a:endParaRPr>
-                    </a:p>
-                  </a:txBody>
-                  <a:tcPr marL="76200" marR="76200" marT="50800" marB="50800"/>
-                </a:tc>
-                <a:tc>
-                  <a:txBody>
-                    <a:bodyPr/>
-                    <a:lstStyle/>
-                    <a:p>
-                      <a:pPr algn="ctr">
-                        <a:buNone/>
-                      </a:pPr>
-                      <a:r>
-                        <a:rPr lang="es-CO" sz="1000">
-                          <a:effectLst/>
-                        </a:rPr>
-                        <a:t>128 → 128 (1 capa)</a:t>
-                      </a:r>
-                      <a:endParaRPr lang="es-CO" sz="1100">
-                        <a:effectLst/>
-                        <a:latin typeface="Arial" panose="020B0604020202020204" pitchFamily="34" charset="0"/>
-                        <a:ea typeface="Arial" panose="020B0604020202020204" pitchFamily="34" charset="0"/>
-                      </a:endParaRPr>
-                    </a:p>
-                  </a:txBody>
-                  <a:tcPr marL="76200" marR="76200" marT="50800" marB="50800"/>
-                </a:tc>
-                <a:tc>
-                  <a:txBody>
-                    <a:bodyPr/>
-                    <a:lstStyle/>
-                    <a:p>
-                      <a:pPr algn="ctr">
-                        <a:buNone/>
-                      </a:pPr>
-                      <a:r>
-                        <a:rPr lang="es-CO" sz="1000">
-                          <a:effectLst/>
-                        </a:rPr>
-                        <a:t>Unidireccional. Se toma el hidden state del último token no-padding</a:t>
-                      </a:r>
-                      <a:endParaRPr lang="es-CO" sz="1100">
-                        <a:effectLst/>
-                        <a:latin typeface="Arial" panose="020B0604020202020204" pitchFamily="34" charset="0"/>
-                        <a:ea typeface="Arial" panose="020B0604020202020204" pitchFamily="34" charset="0"/>
-                      </a:endParaRPr>
-                    </a:p>
-                  </a:txBody>
-                  <a:tcPr marL="76200" marR="76200" marT="50800" marB="50800"/>
-                </a:tc>
-                <a:extLst>
-                  <a:ext uri="{0D108BD9-81ED-4DB2-BD59-A6C34878D82A}">
-                    <a16:rowId xmlns:a16="http://schemas.microsoft.com/office/drawing/2014/main" val="2179560515"/>
-                  </a:ext>
-                </a:extLst>
-              </a:tr>
-              <a:tr h="0">
-                <a:tc>
-                  <a:txBody>
-                    <a:bodyPr/>
-                    <a:lstStyle/>
-                    <a:p>
-                      <a:pPr>
-                        <a:buNone/>
-                      </a:pPr>
-                      <a:r>
-                        <a:rPr lang="es-CO" sz="1000">
-                          <a:effectLst/>
-                        </a:rPr>
-                        <a:t>3</a:t>
-                      </a:r>
-                      <a:endParaRPr lang="es-CO" sz="1100">
-                        <a:effectLst/>
-                        <a:latin typeface="Arial" panose="020B0604020202020204" pitchFamily="34" charset="0"/>
-                        <a:ea typeface="Arial" panose="020B0604020202020204" pitchFamily="34" charset="0"/>
-                      </a:endParaRPr>
-                    </a:p>
-                  </a:txBody>
-                  <a:tcPr marL="76200" marR="76200" marT="50800" marB="50800"/>
-                </a:tc>
-                <a:tc>
-                  <a:txBody>
-                    <a:bodyPr/>
-                    <a:lstStyle/>
-                    <a:p>
-                      <a:pPr algn="ctr">
-                        <a:buNone/>
-                      </a:pPr>
-                      <a:r>
-                        <a:rPr lang="es-CO" sz="1000">
-                          <a:effectLst/>
-                        </a:rPr>
-                        <a:t>Linear + ReLU</a:t>
-                      </a:r>
-                      <a:endParaRPr lang="es-CO" sz="1100">
-                        <a:effectLst/>
-                        <a:latin typeface="Arial" panose="020B0604020202020204" pitchFamily="34" charset="0"/>
-                        <a:ea typeface="Arial" panose="020B0604020202020204" pitchFamily="34" charset="0"/>
-                      </a:endParaRPr>
-                    </a:p>
-                  </a:txBody>
-                  <a:tcPr marL="76200" marR="76200" marT="50800" marB="50800"/>
-                </a:tc>
-                <a:tc>
-                  <a:txBody>
-                    <a:bodyPr/>
-                    <a:lstStyle/>
-                    <a:p>
-                      <a:pPr algn="ctr">
-                        <a:buNone/>
-                      </a:pPr>
-                      <a:r>
-                        <a:rPr lang="es-CO" sz="1000">
-                          <a:effectLst/>
-                        </a:rPr>
-                        <a:t>128 → 64</a:t>
-                      </a:r>
-                      <a:endParaRPr lang="es-CO" sz="1100">
-                        <a:effectLst/>
-                        <a:latin typeface="Arial" panose="020B0604020202020204" pitchFamily="34" charset="0"/>
-                        <a:ea typeface="Arial" panose="020B0604020202020204" pitchFamily="34" charset="0"/>
-                      </a:endParaRPr>
-                    </a:p>
-                  </a:txBody>
-                  <a:tcPr marL="76200" marR="76200" marT="50800" marB="50800"/>
-                </a:tc>
-                <a:tc>
-                  <a:txBody>
-                    <a:bodyPr/>
-                    <a:lstStyle/>
-                    <a:p>
-                      <a:pPr algn="ctr">
-                        <a:buNone/>
-                      </a:pPr>
-                      <a:r>
-                        <a:rPr lang="es-CO" sz="1000">
-                          <a:effectLst/>
-                        </a:rPr>
-                        <a:t>Capa de reducción con activación ReLU</a:t>
-                      </a:r>
-                      <a:endParaRPr lang="es-CO" sz="1100">
-                        <a:effectLst/>
-                        <a:latin typeface="Arial" panose="020B0604020202020204" pitchFamily="34" charset="0"/>
-                        <a:ea typeface="Arial" panose="020B0604020202020204" pitchFamily="34" charset="0"/>
-                      </a:endParaRPr>
-                    </a:p>
-                  </a:txBody>
-                  <a:tcPr marL="76200" marR="76200" marT="50800" marB="50800"/>
-                </a:tc>
-                <a:extLst>
-                  <a:ext uri="{0D108BD9-81ED-4DB2-BD59-A6C34878D82A}">
-                    <a16:rowId xmlns:a16="http://schemas.microsoft.com/office/drawing/2014/main" val="97985812"/>
-                  </a:ext>
-                </a:extLst>
-              </a:tr>
-              <a:tr h="0">
-                <a:tc>
-                  <a:txBody>
-                    <a:bodyPr/>
-                    <a:lstStyle/>
-                    <a:p>
-                      <a:pPr>
-                        <a:buNone/>
-                      </a:pPr>
-                      <a:r>
-                        <a:rPr lang="es-CO" sz="1000">
-                          <a:effectLst/>
-                        </a:rPr>
-                        <a:t>4</a:t>
-                      </a:r>
-                      <a:endParaRPr lang="es-CO" sz="1100">
-                        <a:effectLst/>
-                        <a:latin typeface="Arial" panose="020B0604020202020204" pitchFamily="34" charset="0"/>
-                        <a:ea typeface="Arial" panose="020B0604020202020204" pitchFamily="34" charset="0"/>
-                      </a:endParaRPr>
-                    </a:p>
-                  </a:txBody>
-                  <a:tcPr marL="76200" marR="76200" marT="50800" marB="50800"/>
-                </a:tc>
-                <a:tc>
-                  <a:txBody>
-                    <a:bodyPr/>
-                    <a:lstStyle/>
-                    <a:p>
-                      <a:pPr algn="ctr">
-                        <a:buNone/>
-                      </a:pPr>
-                      <a:r>
-                        <a:rPr lang="es-CO" sz="1000">
-                          <a:effectLst/>
-                        </a:rPr>
-                        <a:t>Dropout</a:t>
-                      </a:r>
-                      <a:endParaRPr lang="es-CO" sz="1100">
-                        <a:effectLst/>
-                        <a:latin typeface="Arial" panose="020B0604020202020204" pitchFamily="34" charset="0"/>
-                        <a:ea typeface="Arial" panose="020B0604020202020204" pitchFamily="34" charset="0"/>
-                      </a:endParaRPr>
-                    </a:p>
-                  </a:txBody>
-                  <a:tcPr marL="76200" marR="76200" marT="50800" marB="50800"/>
-                </a:tc>
-                <a:tc>
-                  <a:txBody>
-                    <a:bodyPr/>
-                    <a:lstStyle/>
-                    <a:p>
-                      <a:pPr algn="ctr">
-                        <a:buNone/>
-                      </a:pPr>
-                      <a:r>
-                        <a:rPr lang="es-CO" sz="1000">
-                          <a:effectLst/>
-                        </a:rPr>
-                        <a:t>p=0.3</a:t>
-                      </a:r>
-                      <a:endParaRPr lang="es-CO" sz="1100">
-                        <a:effectLst/>
-                        <a:latin typeface="Arial" panose="020B0604020202020204" pitchFamily="34" charset="0"/>
-                        <a:ea typeface="Arial" panose="020B0604020202020204" pitchFamily="34" charset="0"/>
-                      </a:endParaRPr>
-                    </a:p>
-                  </a:txBody>
-                  <a:tcPr marL="76200" marR="76200" marT="50800" marB="50800"/>
-                </a:tc>
-                <a:tc>
-                  <a:txBody>
-                    <a:bodyPr/>
-                    <a:lstStyle/>
-                    <a:p>
-                      <a:pPr algn="ctr">
-                        <a:buNone/>
-                      </a:pPr>
-                      <a:r>
-                        <a:rPr lang="es-CO" sz="1000">
-                          <a:effectLst/>
-                        </a:rPr>
-                        <a:t>Regularización para prevenir overfitting</a:t>
-                      </a:r>
-                      <a:endParaRPr lang="es-CO" sz="1100">
-                        <a:effectLst/>
-                        <a:latin typeface="Arial" panose="020B0604020202020204" pitchFamily="34" charset="0"/>
-                        <a:ea typeface="Arial" panose="020B0604020202020204" pitchFamily="34" charset="0"/>
-                      </a:endParaRPr>
-                    </a:p>
-                  </a:txBody>
-                  <a:tcPr marL="76200" marR="76200" marT="50800" marB="50800"/>
-                </a:tc>
-                <a:extLst>
-                  <a:ext uri="{0D108BD9-81ED-4DB2-BD59-A6C34878D82A}">
-                    <a16:rowId xmlns:a16="http://schemas.microsoft.com/office/drawing/2014/main" val="811060634"/>
-                  </a:ext>
-                </a:extLst>
-              </a:tr>
-              <a:tr h="0">
-                <a:tc>
-                  <a:txBody>
-                    <a:bodyPr/>
-                    <a:lstStyle/>
-                    <a:p>
-                      <a:pPr>
-                        <a:buNone/>
-                      </a:pPr>
-                      <a:r>
-                        <a:rPr lang="es-CO" sz="1000">
-                          <a:effectLst/>
-                        </a:rPr>
-                        <a:t>5</a:t>
-                      </a:r>
-                      <a:endParaRPr lang="es-CO" sz="1100">
-                        <a:effectLst/>
-                        <a:latin typeface="Arial" panose="020B0604020202020204" pitchFamily="34" charset="0"/>
-                        <a:ea typeface="Arial" panose="020B0604020202020204" pitchFamily="34" charset="0"/>
-                      </a:endParaRPr>
-                    </a:p>
-                  </a:txBody>
-                  <a:tcPr marL="76200" marR="76200" marT="50800" marB="50800"/>
-                </a:tc>
-                <a:tc>
-                  <a:txBody>
-                    <a:bodyPr/>
-                    <a:lstStyle/>
-                    <a:p>
-                      <a:pPr algn="ctr">
-                        <a:buNone/>
-                      </a:pPr>
-                      <a:r>
-                        <a:rPr lang="es-CO" sz="1000">
-                          <a:effectLst/>
-                        </a:rPr>
-                        <a:t>Linear (logits)</a:t>
-                      </a:r>
-                      <a:endParaRPr lang="es-CO" sz="1100">
-                        <a:effectLst/>
-                        <a:latin typeface="Arial" panose="020B0604020202020204" pitchFamily="34" charset="0"/>
-                        <a:ea typeface="Arial" panose="020B0604020202020204" pitchFamily="34" charset="0"/>
-                      </a:endParaRPr>
-                    </a:p>
-                  </a:txBody>
-                  <a:tcPr marL="76200" marR="76200" marT="50800" marB="50800"/>
-                </a:tc>
-                <a:tc>
-                  <a:txBody>
-                    <a:bodyPr/>
-                    <a:lstStyle/>
-                    <a:p>
-                      <a:pPr algn="ctr">
-                        <a:buNone/>
-                      </a:pPr>
-                      <a:r>
-                        <a:rPr lang="es-CO" sz="1000">
-                          <a:effectLst/>
-                        </a:rPr>
-                        <a:t>64 → 5</a:t>
-                      </a:r>
-                      <a:endParaRPr lang="es-CO" sz="1100">
-                        <a:effectLst/>
-                        <a:latin typeface="Arial" panose="020B0604020202020204" pitchFamily="34" charset="0"/>
-                        <a:ea typeface="Arial" panose="020B0604020202020204" pitchFamily="34" charset="0"/>
-                      </a:endParaRPr>
-                    </a:p>
-                  </a:txBody>
-                  <a:tcPr marL="76200" marR="76200" marT="50800" marB="50800"/>
-                </a:tc>
-                <a:tc>
-                  <a:txBody>
-                    <a:bodyPr/>
-                    <a:lstStyle/>
-                    <a:p>
-                      <a:pPr algn="ctr">
-                        <a:buNone/>
-                      </a:pPr>
-                      <a:r>
-                        <a:rPr lang="es-CO" sz="1000" dirty="0">
-                          <a:effectLst/>
-                        </a:rPr>
-                        <a:t>Capa de clasificación final</a:t>
-                      </a:r>
-                      <a:endParaRPr lang="es-CO" sz="1100" dirty="0">
-                        <a:effectLst/>
-                        <a:latin typeface="Arial" panose="020B0604020202020204" pitchFamily="34" charset="0"/>
-                        <a:ea typeface="Arial" panose="020B0604020202020204" pitchFamily="34" charset="0"/>
-                      </a:endParaRPr>
-                    </a:p>
-                  </a:txBody>
-                  <a:tcPr marL="76200" marR="76200" marT="50800" marB="50800"/>
-                </a:tc>
-                <a:extLst>
-                  <a:ext uri="{0D108BD9-81ED-4DB2-BD59-A6C34878D82A}">
-                    <a16:rowId xmlns:a16="http://schemas.microsoft.com/office/drawing/2014/main" val="3341753289"/>
-                  </a:ext>
-                </a:extLst>
-              </a:tr>
-            </a:tbl>
-          </a:graphicData>
-        </a:graphic>
-      </p:graphicFrame>
-      <p:graphicFrame>
-        <p:nvGraphicFramePr>
-          <p:cNvPr id="5" name="Tabla 4">
-            <a:extLst>
-              <a:ext uri="{FF2B5EF4-FFF2-40B4-BE49-F238E27FC236}">
-                <a16:creationId xmlns:a16="http://schemas.microsoft.com/office/drawing/2014/main" id="{9ECBF916-2564-0D3B-6E16-D2B78DE4BCE4}"/>
-              </a:ext>
-            </a:extLst>
-          </p:cNvPr>
-          <p:cNvGraphicFramePr>
-            <a:graphicFrameLocks noGrp="1"/>
-          </p:cNvGraphicFramePr>
-          <p:nvPr>
-            <p:extLst>
-              <p:ext uri="{D42A27DB-BD31-4B8C-83A1-F6EECF244321}">
-                <p14:modId xmlns:p14="http://schemas.microsoft.com/office/powerpoint/2010/main" val="365668460"/>
-              </p:ext>
-            </p:extLst>
-          </p:nvPr>
-        </p:nvGraphicFramePr>
-        <p:xfrm>
-          <a:off x="1012681" y="3733298"/>
-          <a:ext cx="9792168" cy="2794000"/>
-        </p:xfrm>
-        <a:graphic>
-          <a:graphicData uri="http://schemas.openxmlformats.org/drawingml/2006/table">
-            <a:tbl>
-              <a:tblPr>
-                <a:tableStyleId>{8EC20E35-A176-4012-BC5E-935CFFF8708E}</a:tableStyleId>
-              </a:tblPr>
-              <a:tblGrid>
-                <a:gridCol w="4896084">
-                  <a:extLst>
-                    <a:ext uri="{9D8B030D-6E8A-4147-A177-3AD203B41FA5}">
-                      <a16:colId xmlns:a16="http://schemas.microsoft.com/office/drawing/2014/main" val="3188416917"/>
-                    </a:ext>
-                  </a:extLst>
-                </a:gridCol>
-                <a:gridCol w="4896084">
-                  <a:extLst>
-                    <a:ext uri="{9D8B030D-6E8A-4147-A177-3AD203B41FA5}">
-                      <a16:colId xmlns:a16="http://schemas.microsoft.com/office/drawing/2014/main" val="2155380259"/>
-                    </a:ext>
-                  </a:extLst>
-                </a:gridCol>
-              </a:tblGrid>
-              <a:tr h="0">
-                <a:tc>
-                  <a:txBody>
-                    <a:bodyPr/>
-                    <a:lstStyle/>
-                    <a:p>
-                      <a:pPr algn="ctr">
-                        <a:buNone/>
-                      </a:pPr>
-                      <a:r>
-                        <a:rPr lang="es-CO" sz="1000">
-                          <a:effectLst/>
-                        </a:rPr>
-                        <a:t>Hiperparámetro</a:t>
-                      </a:r>
-                      <a:endParaRPr lang="es-CO" sz="1100">
-                        <a:effectLst/>
-                        <a:latin typeface="Arial" panose="020B0604020202020204" pitchFamily="34" charset="0"/>
-                        <a:ea typeface="Arial" panose="020B0604020202020204" pitchFamily="34" charset="0"/>
-                      </a:endParaRPr>
-                    </a:p>
-                  </a:txBody>
-                  <a:tcPr marL="76200" marR="76200" marT="50800" marB="50800" anchor="ctr"/>
-                </a:tc>
-                <a:tc>
-                  <a:txBody>
-                    <a:bodyPr/>
-                    <a:lstStyle/>
-                    <a:p>
-                      <a:pPr algn="ctr">
-                        <a:buNone/>
-                      </a:pPr>
-                      <a:r>
-                        <a:rPr lang="es-CO" sz="1000">
-                          <a:effectLst/>
-                        </a:rPr>
-                        <a:t>Valor (versión definitiva)</a:t>
-                      </a:r>
-                      <a:endParaRPr lang="es-CO" sz="1100">
-                        <a:effectLst/>
-                        <a:latin typeface="Arial" panose="020B0604020202020204" pitchFamily="34" charset="0"/>
-                        <a:ea typeface="Arial" panose="020B0604020202020204" pitchFamily="34" charset="0"/>
-                      </a:endParaRPr>
-                    </a:p>
-                  </a:txBody>
-                  <a:tcPr marL="76200" marR="76200" marT="50800" marB="50800" anchor="ctr"/>
-                </a:tc>
-                <a:extLst>
-                  <a:ext uri="{0D108BD9-81ED-4DB2-BD59-A6C34878D82A}">
-                    <a16:rowId xmlns:a16="http://schemas.microsoft.com/office/drawing/2014/main" val="2684361449"/>
-                  </a:ext>
-                </a:extLst>
-              </a:tr>
-              <a:tr h="0">
-                <a:tc>
-                  <a:txBody>
-                    <a:bodyPr/>
-                    <a:lstStyle/>
-                    <a:p>
-                      <a:pPr>
-                        <a:buNone/>
-                      </a:pPr>
-                      <a:r>
-                        <a:rPr lang="es-CO" sz="1000">
-                          <a:effectLst/>
-                        </a:rPr>
-                        <a:t>Embedding dim</a:t>
-                      </a:r>
-                      <a:endParaRPr lang="es-CO" sz="1100">
-                        <a:effectLst/>
-                        <a:latin typeface="Arial" panose="020B0604020202020204" pitchFamily="34" charset="0"/>
-                        <a:ea typeface="Arial" panose="020B0604020202020204" pitchFamily="34" charset="0"/>
-                      </a:endParaRPr>
-                    </a:p>
-                  </a:txBody>
-                  <a:tcPr marL="76200" marR="76200" marT="50800" marB="50800"/>
-                </a:tc>
-                <a:tc>
-                  <a:txBody>
-                    <a:bodyPr/>
-                    <a:lstStyle/>
-                    <a:p>
-                      <a:pPr algn="ctr">
-                        <a:buNone/>
-                      </a:pPr>
-                      <a:r>
-                        <a:rPr lang="es-CO" sz="1000">
-                          <a:effectLst/>
-                        </a:rPr>
-                        <a:t>128</a:t>
-                      </a:r>
-                      <a:endParaRPr lang="es-CO" sz="1100">
-                        <a:effectLst/>
-                        <a:latin typeface="Arial" panose="020B0604020202020204" pitchFamily="34" charset="0"/>
-                        <a:ea typeface="Arial" panose="020B0604020202020204" pitchFamily="34" charset="0"/>
-                      </a:endParaRPr>
-                    </a:p>
-                  </a:txBody>
-                  <a:tcPr marL="76200" marR="76200" marT="50800" marB="50800"/>
-                </a:tc>
-                <a:extLst>
-                  <a:ext uri="{0D108BD9-81ED-4DB2-BD59-A6C34878D82A}">
-                    <a16:rowId xmlns:a16="http://schemas.microsoft.com/office/drawing/2014/main" val="140633709"/>
-                  </a:ext>
-                </a:extLst>
-              </a:tr>
-              <a:tr h="0">
-                <a:tc>
-                  <a:txBody>
-                    <a:bodyPr/>
-                    <a:lstStyle/>
-                    <a:p>
-                      <a:pPr>
-                        <a:buNone/>
-                      </a:pPr>
-                      <a:r>
-                        <a:rPr lang="es-CO" sz="1000" dirty="0">
-                          <a:effectLst/>
-                        </a:rPr>
-                        <a:t>Hidden </a:t>
-                      </a:r>
-                      <a:r>
-                        <a:rPr lang="es-CO" sz="1000" dirty="0" err="1">
-                          <a:effectLst/>
-                        </a:rPr>
-                        <a:t>size</a:t>
-                      </a:r>
-                      <a:endParaRPr lang="es-CO" sz="1100" dirty="0">
-                        <a:effectLst/>
-                        <a:latin typeface="Arial" panose="020B0604020202020204" pitchFamily="34" charset="0"/>
-                        <a:ea typeface="Arial" panose="020B0604020202020204" pitchFamily="34" charset="0"/>
-                      </a:endParaRPr>
-                    </a:p>
-                  </a:txBody>
-                  <a:tcPr marL="76200" marR="76200" marT="50800" marB="50800"/>
-                </a:tc>
-                <a:tc>
-                  <a:txBody>
-                    <a:bodyPr/>
-                    <a:lstStyle/>
-                    <a:p>
-                      <a:pPr algn="ctr">
-                        <a:buNone/>
-                      </a:pPr>
-                      <a:r>
-                        <a:rPr lang="es-CO" sz="1000">
-                          <a:effectLst/>
-                        </a:rPr>
-                        <a:t>128</a:t>
-                      </a:r>
-                      <a:endParaRPr lang="es-CO" sz="1100">
-                        <a:effectLst/>
-                        <a:latin typeface="Arial" panose="020B0604020202020204" pitchFamily="34" charset="0"/>
-                        <a:ea typeface="Arial" panose="020B0604020202020204" pitchFamily="34" charset="0"/>
-                      </a:endParaRPr>
-                    </a:p>
-                  </a:txBody>
-                  <a:tcPr marL="76200" marR="76200" marT="50800" marB="50800"/>
-                </a:tc>
-                <a:extLst>
-                  <a:ext uri="{0D108BD9-81ED-4DB2-BD59-A6C34878D82A}">
-                    <a16:rowId xmlns:a16="http://schemas.microsoft.com/office/drawing/2014/main" val="2265269115"/>
-                  </a:ext>
-                </a:extLst>
-              </a:tr>
-              <a:tr h="0">
-                <a:tc>
-                  <a:txBody>
-                    <a:bodyPr/>
-                    <a:lstStyle/>
-                    <a:p>
-                      <a:pPr>
-                        <a:buNone/>
-                      </a:pPr>
-                      <a:r>
-                        <a:rPr lang="es-CO" sz="1000">
-                          <a:effectLst/>
-                        </a:rPr>
-                        <a:t>Dropout</a:t>
-                      </a:r>
-                      <a:endParaRPr lang="es-CO" sz="1100">
-                        <a:effectLst/>
-                        <a:latin typeface="Arial" panose="020B0604020202020204" pitchFamily="34" charset="0"/>
-                        <a:ea typeface="Arial" panose="020B0604020202020204" pitchFamily="34" charset="0"/>
-                      </a:endParaRPr>
-                    </a:p>
-                  </a:txBody>
-                  <a:tcPr marL="76200" marR="76200" marT="50800" marB="50800"/>
-                </a:tc>
-                <a:tc>
-                  <a:txBody>
-                    <a:bodyPr/>
-                    <a:lstStyle/>
-                    <a:p>
-                      <a:pPr algn="ctr">
-                        <a:buNone/>
-                      </a:pPr>
-                      <a:r>
-                        <a:rPr lang="es-CO" sz="1000">
-                          <a:effectLst/>
-                        </a:rPr>
-                        <a:t>0.3</a:t>
-                      </a:r>
-                      <a:endParaRPr lang="es-CO" sz="1100">
-                        <a:effectLst/>
-                        <a:latin typeface="Arial" panose="020B0604020202020204" pitchFamily="34" charset="0"/>
-                        <a:ea typeface="Arial" panose="020B0604020202020204" pitchFamily="34" charset="0"/>
-                      </a:endParaRPr>
-                    </a:p>
-                  </a:txBody>
-                  <a:tcPr marL="76200" marR="76200" marT="50800" marB="50800"/>
-                </a:tc>
-                <a:extLst>
-                  <a:ext uri="{0D108BD9-81ED-4DB2-BD59-A6C34878D82A}">
-                    <a16:rowId xmlns:a16="http://schemas.microsoft.com/office/drawing/2014/main" val="3422328683"/>
-                  </a:ext>
-                </a:extLst>
-              </a:tr>
-              <a:tr h="0">
-                <a:tc>
-                  <a:txBody>
-                    <a:bodyPr/>
-                    <a:lstStyle/>
-                    <a:p>
-                      <a:pPr>
-                        <a:buNone/>
-                      </a:pPr>
-                      <a:r>
-                        <a:rPr lang="es-CO" sz="1000">
-                          <a:effectLst/>
-                        </a:rPr>
-                        <a:t>Learning rate</a:t>
-                      </a:r>
-                      <a:endParaRPr lang="es-CO" sz="1100">
-                        <a:effectLst/>
-                        <a:latin typeface="Arial" panose="020B0604020202020204" pitchFamily="34" charset="0"/>
-                        <a:ea typeface="Arial" panose="020B0604020202020204" pitchFamily="34" charset="0"/>
-                      </a:endParaRPr>
-                    </a:p>
-                  </a:txBody>
-                  <a:tcPr marL="76200" marR="76200" marT="50800" marB="50800"/>
-                </a:tc>
-                <a:tc>
-                  <a:txBody>
-                    <a:bodyPr/>
-                    <a:lstStyle/>
-                    <a:p>
-                      <a:pPr algn="ctr">
-                        <a:buNone/>
-                      </a:pPr>
-                      <a:r>
-                        <a:rPr lang="es-CO" sz="1000">
-                          <a:effectLst/>
-                        </a:rPr>
-                        <a:t>3e-4</a:t>
-                      </a:r>
-                      <a:endParaRPr lang="es-CO" sz="1100">
-                        <a:effectLst/>
-                        <a:latin typeface="Arial" panose="020B0604020202020204" pitchFamily="34" charset="0"/>
-                        <a:ea typeface="Arial" panose="020B0604020202020204" pitchFamily="34" charset="0"/>
-                      </a:endParaRPr>
-                    </a:p>
-                  </a:txBody>
-                  <a:tcPr marL="76200" marR="76200" marT="50800" marB="50800"/>
-                </a:tc>
-                <a:extLst>
-                  <a:ext uri="{0D108BD9-81ED-4DB2-BD59-A6C34878D82A}">
-                    <a16:rowId xmlns:a16="http://schemas.microsoft.com/office/drawing/2014/main" val="289188683"/>
-                  </a:ext>
-                </a:extLst>
-              </a:tr>
-              <a:tr h="0">
-                <a:tc>
-                  <a:txBody>
-                    <a:bodyPr/>
-                    <a:lstStyle/>
-                    <a:p>
-                      <a:pPr>
-                        <a:buNone/>
-                      </a:pPr>
-                      <a:r>
-                        <a:rPr lang="es-CO" sz="1000">
-                          <a:effectLst/>
-                        </a:rPr>
-                        <a:t>MAX_LEN</a:t>
-                      </a:r>
-                      <a:endParaRPr lang="es-CO" sz="1100">
-                        <a:effectLst/>
-                        <a:latin typeface="Arial" panose="020B0604020202020204" pitchFamily="34" charset="0"/>
-                        <a:ea typeface="Arial" panose="020B0604020202020204" pitchFamily="34" charset="0"/>
-                      </a:endParaRPr>
-                    </a:p>
-                  </a:txBody>
-                  <a:tcPr marL="76200" marR="76200" marT="50800" marB="50800"/>
-                </a:tc>
-                <a:tc>
-                  <a:txBody>
-                    <a:bodyPr/>
-                    <a:lstStyle/>
-                    <a:p>
-                      <a:pPr algn="ctr">
-                        <a:buNone/>
-                      </a:pPr>
-                      <a:r>
-                        <a:rPr lang="es-CO" sz="1000">
-                          <a:effectLst/>
-                        </a:rPr>
-                        <a:t>150</a:t>
-                      </a:r>
-                      <a:endParaRPr lang="es-CO" sz="1100">
-                        <a:effectLst/>
-                        <a:latin typeface="Arial" panose="020B0604020202020204" pitchFamily="34" charset="0"/>
-                        <a:ea typeface="Arial" panose="020B0604020202020204" pitchFamily="34" charset="0"/>
-                      </a:endParaRPr>
-                    </a:p>
-                  </a:txBody>
-                  <a:tcPr marL="76200" marR="76200" marT="50800" marB="50800"/>
-                </a:tc>
-                <a:extLst>
-                  <a:ext uri="{0D108BD9-81ED-4DB2-BD59-A6C34878D82A}">
-                    <a16:rowId xmlns:a16="http://schemas.microsoft.com/office/drawing/2014/main" val="3287636937"/>
-                  </a:ext>
-                </a:extLst>
-              </a:tr>
-              <a:tr h="0">
-                <a:tc>
-                  <a:txBody>
-                    <a:bodyPr/>
-                    <a:lstStyle/>
-                    <a:p>
-                      <a:pPr>
-                        <a:buNone/>
-                      </a:pPr>
-                      <a:r>
-                        <a:rPr lang="es-CO" sz="1000">
-                          <a:effectLst/>
-                        </a:rPr>
-                        <a:t>Class weights</a:t>
-                      </a:r>
-                      <a:endParaRPr lang="es-CO" sz="1100">
-                        <a:effectLst/>
-                        <a:latin typeface="Arial" panose="020B0604020202020204" pitchFamily="34" charset="0"/>
-                        <a:ea typeface="Arial" panose="020B0604020202020204" pitchFamily="34" charset="0"/>
-                      </a:endParaRPr>
-                    </a:p>
-                  </a:txBody>
-                  <a:tcPr marL="76200" marR="76200" marT="50800" marB="50800"/>
-                </a:tc>
-                <a:tc>
-                  <a:txBody>
-                    <a:bodyPr/>
-                    <a:lstStyle/>
-                    <a:p>
-                      <a:pPr algn="ctr">
-                        <a:buNone/>
-                      </a:pPr>
-                      <a:r>
-                        <a:rPr lang="es-CO" sz="1000">
-                          <a:effectLst/>
-                        </a:rPr>
-                        <a:t>No</a:t>
-                      </a:r>
-                      <a:endParaRPr lang="es-CO" sz="1100">
-                        <a:effectLst/>
-                        <a:latin typeface="Arial" panose="020B0604020202020204" pitchFamily="34" charset="0"/>
-                        <a:ea typeface="Arial" panose="020B0604020202020204" pitchFamily="34" charset="0"/>
-                      </a:endParaRPr>
-                    </a:p>
-                  </a:txBody>
-                  <a:tcPr marL="76200" marR="76200" marT="50800" marB="50800"/>
-                </a:tc>
-                <a:extLst>
-                  <a:ext uri="{0D108BD9-81ED-4DB2-BD59-A6C34878D82A}">
-                    <a16:rowId xmlns:a16="http://schemas.microsoft.com/office/drawing/2014/main" val="1613163192"/>
-                  </a:ext>
-                </a:extLst>
-              </a:tr>
-              <a:tr h="0">
-                <a:tc>
-                  <a:txBody>
-                    <a:bodyPr/>
-                    <a:lstStyle/>
-                    <a:p>
-                      <a:pPr>
-                        <a:buNone/>
-                      </a:pPr>
-                      <a:r>
-                        <a:rPr lang="es-CO" sz="1000">
-                          <a:effectLst/>
-                        </a:rPr>
-                        <a:t>Épocas ejecutadas</a:t>
-                      </a:r>
-                      <a:endParaRPr lang="es-CO" sz="1100">
-                        <a:effectLst/>
-                        <a:latin typeface="Arial" panose="020B0604020202020204" pitchFamily="34" charset="0"/>
-                        <a:ea typeface="Arial" panose="020B0604020202020204" pitchFamily="34" charset="0"/>
-                      </a:endParaRPr>
-                    </a:p>
-                  </a:txBody>
-                  <a:tcPr marL="76200" marR="76200" marT="50800" marB="50800"/>
-                </a:tc>
-                <a:tc>
-                  <a:txBody>
-                    <a:bodyPr/>
-                    <a:lstStyle/>
-                    <a:p>
-                      <a:pPr algn="ctr">
-                        <a:buNone/>
-                      </a:pPr>
-                      <a:r>
-                        <a:rPr lang="es-CO" sz="1000">
-                          <a:effectLst/>
-                        </a:rPr>
-                        <a:t>24</a:t>
-                      </a:r>
-                      <a:endParaRPr lang="es-CO" sz="1100">
-                        <a:effectLst/>
-                        <a:latin typeface="Arial" panose="020B0604020202020204" pitchFamily="34" charset="0"/>
-                        <a:ea typeface="Arial" panose="020B0604020202020204" pitchFamily="34" charset="0"/>
-                      </a:endParaRPr>
-                    </a:p>
-                  </a:txBody>
-                  <a:tcPr marL="76200" marR="76200" marT="50800" marB="50800"/>
-                </a:tc>
-                <a:extLst>
-                  <a:ext uri="{0D108BD9-81ED-4DB2-BD59-A6C34878D82A}">
-                    <a16:rowId xmlns:a16="http://schemas.microsoft.com/office/drawing/2014/main" val="977724792"/>
-                  </a:ext>
-                </a:extLst>
-              </a:tr>
-              <a:tr h="0">
-                <a:tc>
-                  <a:txBody>
-                    <a:bodyPr/>
-                    <a:lstStyle/>
-                    <a:p>
-                      <a:pPr>
-                        <a:buNone/>
-                      </a:pPr>
-                      <a:r>
-                        <a:rPr lang="es-CO" sz="1000">
-                          <a:effectLst/>
-                        </a:rPr>
-                        <a:t>Mejor época</a:t>
-                      </a:r>
-                      <a:endParaRPr lang="es-CO" sz="1100">
-                        <a:effectLst/>
-                        <a:latin typeface="Arial" panose="020B0604020202020204" pitchFamily="34" charset="0"/>
-                        <a:ea typeface="Arial" panose="020B0604020202020204" pitchFamily="34" charset="0"/>
-                      </a:endParaRPr>
-                    </a:p>
-                  </a:txBody>
-                  <a:tcPr marL="76200" marR="76200" marT="50800" marB="50800"/>
-                </a:tc>
-                <a:tc>
-                  <a:txBody>
-                    <a:bodyPr/>
-                    <a:lstStyle/>
-                    <a:p>
-                      <a:pPr algn="ctr">
-                        <a:buNone/>
-                      </a:pPr>
-                      <a:r>
-                        <a:rPr lang="es-CO" sz="1000">
-                          <a:effectLst/>
-                        </a:rPr>
-                        <a:t>19</a:t>
-                      </a:r>
-                      <a:endParaRPr lang="es-CO" sz="1100">
-                        <a:effectLst/>
-                        <a:latin typeface="Arial" panose="020B0604020202020204" pitchFamily="34" charset="0"/>
-                        <a:ea typeface="Arial" panose="020B0604020202020204" pitchFamily="34" charset="0"/>
-                      </a:endParaRPr>
-                    </a:p>
-                  </a:txBody>
-                  <a:tcPr marL="76200" marR="76200" marT="50800" marB="50800"/>
-                </a:tc>
-                <a:extLst>
-                  <a:ext uri="{0D108BD9-81ED-4DB2-BD59-A6C34878D82A}">
-                    <a16:rowId xmlns:a16="http://schemas.microsoft.com/office/drawing/2014/main" val="1518633011"/>
-                  </a:ext>
-                </a:extLst>
-              </a:tr>
-              <a:tr h="0">
-                <a:tc>
-                  <a:txBody>
-                    <a:bodyPr/>
-                    <a:lstStyle/>
-                    <a:p>
-                      <a:pPr>
-                        <a:buNone/>
-                      </a:pPr>
-                      <a:r>
-                        <a:rPr lang="es-CO" sz="1000">
-                          <a:effectLst/>
-                        </a:rPr>
-                        <a:t>Tiempo</a:t>
-                      </a:r>
-                      <a:endParaRPr lang="es-CO" sz="1100">
-                        <a:effectLst/>
-                        <a:latin typeface="Arial" panose="020B0604020202020204" pitchFamily="34" charset="0"/>
-                        <a:ea typeface="Arial" panose="020B0604020202020204" pitchFamily="34" charset="0"/>
-                      </a:endParaRPr>
-                    </a:p>
-                  </a:txBody>
-                  <a:tcPr marL="76200" marR="76200" marT="50800" marB="50800"/>
-                </a:tc>
-                <a:tc>
-                  <a:txBody>
-                    <a:bodyPr/>
-                    <a:lstStyle/>
-                    <a:p>
-                      <a:pPr algn="ctr">
-                        <a:buNone/>
-                      </a:pPr>
-                      <a:r>
-                        <a:rPr lang="es-CO" sz="1000">
-                          <a:effectLst/>
-                        </a:rPr>
-                        <a:t>321.2 s</a:t>
-                      </a:r>
-                      <a:endParaRPr lang="es-CO" sz="1100">
-                        <a:effectLst/>
-                        <a:latin typeface="Arial" panose="020B0604020202020204" pitchFamily="34" charset="0"/>
-                        <a:ea typeface="Arial" panose="020B0604020202020204" pitchFamily="34" charset="0"/>
-                      </a:endParaRPr>
-                    </a:p>
-                  </a:txBody>
-                  <a:tcPr marL="76200" marR="76200" marT="50800" marB="50800"/>
-                </a:tc>
-                <a:extLst>
-                  <a:ext uri="{0D108BD9-81ED-4DB2-BD59-A6C34878D82A}">
-                    <a16:rowId xmlns:a16="http://schemas.microsoft.com/office/drawing/2014/main" val="1177769815"/>
-                  </a:ext>
-                </a:extLst>
-              </a:tr>
-              <a:tr h="0">
-                <a:tc>
-                  <a:txBody>
-                    <a:bodyPr/>
-                    <a:lstStyle/>
-                    <a:p>
-                      <a:pPr>
-                        <a:buNone/>
-                      </a:pPr>
-                      <a:r>
-                        <a:rPr lang="es-CO" sz="1000">
-                          <a:effectLst/>
-                        </a:rPr>
-                        <a:t>Parámetros</a:t>
-                      </a:r>
-                      <a:endParaRPr lang="es-CO" sz="1100">
-                        <a:effectLst/>
-                        <a:latin typeface="Arial" panose="020B0604020202020204" pitchFamily="34" charset="0"/>
-                        <a:ea typeface="Arial" panose="020B0604020202020204" pitchFamily="34" charset="0"/>
-                      </a:endParaRPr>
-                    </a:p>
-                  </a:txBody>
-                  <a:tcPr marL="76200" marR="76200" marT="50800" marB="50800"/>
-                </a:tc>
-                <a:tc>
-                  <a:txBody>
-                    <a:bodyPr/>
-                    <a:lstStyle/>
-                    <a:p>
-                      <a:pPr algn="ctr">
-                        <a:buNone/>
-                      </a:pPr>
-                      <a:r>
-                        <a:rPr lang="es-CO" sz="1000" dirty="0">
-                          <a:effectLst/>
-                        </a:rPr>
-                        <a:t>2,700,933</a:t>
-                      </a:r>
-                      <a:endParaRPr lang="es-CO" sz="1100" dirty="0">
-                        <a:effectLst/>
-                        <a:latin typeface="Arial" panose="020B0604020202020204" pitchFamily="34" charset="0"/>
-                        <a:ea typeface="Arial" panose="020B0604020202020204" pitchFamily="34" charset="0"/>
-                      </a:endParaRPr>
-                    </a:p>
-                  </a:txBody>
-                  <a:tcPr marL="76200" marR="76200" marT="50800" marB="50800"/>
-                </a:tc>
-                <a:extLst>
-                  <a:ext uri="{0D108BD9-81ED-4DB2-BD59-A6C34878D82A}">
-                    <a16:rowId xmlns:a16="http://schemas.microsoft.com/office/drawing/2014/main" val="2868292860"/>
-                  </a:ext>
-                </a:extLst>
-              </a:tr>
-            </a:tbl>
-          </a:graphicData>
-        </a:graphic>
-      </p:graphicFrame>
-    </p:spTree>
-    <p:extLst>
-      <p:ext uri="{BB962C8B-B14F-4D97-AF65-F5344CB8AC3E}">
-        <p14:creationId xmlns:p14="http://schemas.microsoft.com/office/powerpoint/2010/main" val="144129432"/>
-      </p:ext>
-    </p:extLst>
-  </p:cSld>
-  <p:clrMapOvr>
-    <a:masterClrMapping/>
-  </p:clrMapOvr>
-</p:sld>
-</file>
-
-<file path=ppt/slides/slide9.xml><?xml version="1.0" encoding="utf-8"?>
-<p:sld xmlns:a="http://schemas.openxmlformats.org/drawingml/2006/main" xmlns:r="http://schemas.openxmlformats.org/officeDocument/2006/relationships" xmlns:p="http://schemas.openxmlformats.org/presentationml/2006/main">
-  <p:cSld>
-    <p:spTree>
-      <p:nvGrpSpPr>
-        <p:cNvPr id="1" name="">
-          <a:extLst>
-            <a:ext uri="{FF2B5EF4-FFF2-40B4-BE49-F238E27FC236}">
-              <a16:creationId xmlns:a16="http://schemas.microsoft.com/office/drawing/2014/main" id="{6F853475-B41F-601F-C8AF-5A2C9C6E396D}"/>
-            </a:ext>
-          </a:extLst>
-        </p:cNvPr>
-        <p:cNvGrpSpPr/>
-        <p:nvPr/>
-      </p:nvGrpSpPr>
-      <p:grpSpPr>
-        <a:xfrm>
-          <a:off x="0" y="0"/>
-          <a:ext cx="0" cy="0"/>
-          <a:chOff x="0" y="0"/>
-          <a:chExt cx="0" cy="0"/>
-        </a:xfrm>
-      </p:grpSpPr>
-      <p:pic>
-        <p:nvPicPr>
-          <p:cNvPr id="4" name="Marcador de contenido 3">
-            <a:extLst>
-              <a:ext uri="{FF2B5EF4-FFF2-40B4-BE49-F238E27FC236}">
-                <a16:creationId xmlns:a16="http://schemas.microsoft.com/office/drawing/2014/main" id="{5F6E331B-5413-9C62-55A7-01243B9A6EA9}"/>
-              </a:ext>
-            </a:extLst>
-          </p:cNvPr>
-          <p:cNvPicPr>
-            <a:picLocks noGrp="1" noChangeAspect="1"/>
-          </p:cNvPicPr>
-          <p:nvPr>
-            <p:ph idx="1"/>
-          </p:nvPr>
-        </p:nvPicPr>
-        <p:blipFill>
-          <a:blip r:embed="rId2">
-            <a:extLst>
-              <a:ext uri="{28A0092B-C50C-407E-A947-70E740481C1C}">
-                <a14:useLocalDpi xmlns:a14="http://schemas.microsoft.com/office/drawing/2010/main" val="0"/>
-              </a:ext>
-            </a:extLst>
-          </a:blip>
-          <a:stretch>
-            <a:fillRect/>
-          </a:stretch>
-        </p:blipFill>
-        <p:spPr>
-          <a:xfrm>
-            <a:off x="0" y="0"/>
-            <a:ext cx="12201128" cy="6863135"/>
-          </a:xfrm>
-        </p:spPr>
-      </p:pic>
-      <p:sp>
-        <p:nvSpPr>
-          <p:cNvPr id="31" name="Rectángulo 30">
-            <a:extLst>
-              <a:ext uri="{FF2B5EF4-FFF2-40B4-BE49-F238E27FC236}">
-                <a16:creationId xmlns:a16="http://schemas.microsoft.com/office/drawing/2014/main" id="{FC2E64D1-AA65-F47B-C67A-6F1E1558775A}"/>
-              </a:ext>
-            </a:extLst>
-          </p:cNvPr>
-          <p:cNvSpPr/>
-          <p:nvPr/>
-        </p:nvSpPr>
-        <p:spPr>
-          <a:xfrm>
-            <a:off x="877078" y="583285"/>
-            <a:ext cx="7625655" cy="461665"/>
-          </a:xfrm>
-          <a:prstGeom prst="rect">
-            <a:avLst/>
-          </a:prstGeom>
-        </p:spPr>
-        <p:txBody>
-          <a:bodyPr wrap="square">
-            <a:spAutoFit/>
-          </a:bodyPr>
-          <a:lstStyle/>
-          <a:p>
-            <a:pPr algn="ctr"/>
-            <a:r>
-              <a:rPr lang="es-MX" sz="2400" b="1" dirty="0">
-                <a:solidFill>
-                  <a:schemeClr val="bg1"/>
-                </a:solidFill>
-                <a:latin typeface="Arial" charset="0"/>
-                <a:cs typeface="Arial" charset="0"/>
-              </a:rPr>
-              <a:t>Modelo Clásico 1 — LSTM Unidireccional </a:t>
-            </a:r>
-            <a:endParaRPr lang="es-ES_tradnl" sz="2400" b="1" dirty="0">
-              <a:solidFill>
-                <a:schemeClr val="bg1"/>
-              </a:solidFill>
-              <a:latin typeface="Arial" charset="0"/>
-              <a:cs typeface="Arial" charset="0"/>
-            </a:endParaRPr>
-          </a:p>
-        </p:txBody>
-      </p:sp>
-      <p:pic>
-        <p:nvPicPr>
-          <p:cNvPr id="2" name="image4.png" descr="Figura 10. Curvas de entrenamiento LSTM v3 (versión definitiva, lr=3e-4, MAX_LEN=150). El val_loss se estabiliza alrededor de la época 19.">
-            <a:extLst>
-              <a:ext uri="{FF2B5EF4-FFF2-40B4-BE49-F238E27FC236}">
-                <a16:creationId xmlns:a16="http://schemas.microsoft.com/office/drawing/2014/main" id="{FF025C04-5BCD-C681-30AD-F08218011797}"/>
-              </a:ext>
-            </a:extLst>
-          </p:cNvPr>
-          <p:cNvPicPr/>
-          <p:nvPr/>
-        </p:nvPicPr>
-        <p:blipFill>
-          <a:blip r:embed="rId3"/>
-          <a:srcRect/>
-          <a:stretch>
-            <a:fillRect/>
-          </a:stretch>
-        </p:blipFill>
-        <p:spPr>
-          <a:xfrm>
-            <a:off x="578303" y="2398011"/>
-            <a:ext cx="6407409" cy="2332750"/>
-          </a:xfrm>
-          <a:prstGeom prst="rect">
-            <a:avLst/>
-          </a:prstGeom>
-          <a:ln/>
-        </p:spPr>
-      </p:pic>
-      <p:pic>
-        <p:nvPicPr>
-          <p:cNvPr id="6" name="image10.png" descr="Figura 11. Matriz de confusión LSTM v3. El modelo clasifica bien 1★ y 5★ pero presenta F1≈0 en clase 4★ (casi todo predito como 5★).">
-            <a:extLst>
-              <a:ext uri="{FF2B5EF4-FFF2-40B4-BE49-F238E27FC236}">
-                <a16:creationId xmlns:a16="http://schemas.microsoft.com/office/drawing/2014/main" id="{69B637E7-7EFC-5CAB-220B-BE4DA491F332}"/>
-              </a:ext>
-            </a:extLst>
-          </p:cNvPr>
-          <p:cNvPicPr/>
-          <p:nvPr/>
-        </p:nvPicPr>
-        <p:blipFill>
-          <a:blip r:embed="rId4"/>
-          <a:srcRect/>
-          <a:stretch>
-            <a:fillRect/>
-          </a:stretch>
-        </p:blipFill>
-        <p:spPr>
-          <a:xfrm>
-            <a:off x="8129536" y="1992630"/>
-            <a:ext cx="3192145" cy="2872740"/>
-          </a:xfrm>
-          <a:prstGeom prst="rect">
-            <a:avLst/>
-          </a:prstGeom>
-          <a:ln/>
-        </p:spPr>
-      </p:pic>
-    </p:spTree>
-    <p:extLst>
-      <p:ext uri="{BB962C8B-B14F-4D97-AF65-F5344CB8AC3E}">
-        <p14:creationId xmlns:p14="http://schemas.microsoft.com/office/powerpoint/2010/main" val="805762893"/>
       </p:ext>
     </p:extLst>
   </p:cSld>
@@ -19522,20 +21678,20 @@
 </file>
 
 <file path=customXml/item1.xml><?xml version="1.0" encoding="utf-8"?>
-<p:properties xmlns:p="http://schemas.microsoft.com/office/2006/metadata/properties" xmlns:xsi="http://www.w3.org/2001/XMLSchema-instance" xmlns:pc="http://schemas.microsoft.com/office/infopath/2007/PartnerControls">
-  <documentManagement>
-    <_activity xmlns="d6b2e044-6a54-4cb7-a441-36a5fc0f35b5" xsi:nil="true"/>
-  </documentManagement>
-</p:properties>
-</file>
-
-<file path=customXml/item2.xml><?xml version="1.0" encoding="utf-8"?>
 <?mso-contentType ?>
 <FormTemplates xmlns="http://schemas.microsoft.com/sharepoint/v3/contenttype/forms">
   <Display>DocumentLibraryForm</Display>
   <Edit>DocumentLibraryForm</Edit>
   <New>DocumentLibraryForm</New>
 </FormTemplates>
+</file>
+
+<file path=customXml/item2.xml><?xml version="1.0" encoding="utf-8"?>
+<p:properties xmlns:p="http://schemas.microsoft.com/office/2006/metadata/properties" xmlns:xsi="http://www.w3.org/2001/XMLSchema-instance" xmlns:pc="http://schemas.microsoft.com/office/infopath/2007/PartnerControls">
+  <documentManagement>
+    <_activity xmlns="d6b2e044-6a54-4cb7-a441-36a5fc0f35b5" xsi:nil="true"/>
+  </documentManagement>
+</p:properties>
 </file>
 
 <file path=customXml/item3.xml><?xml version="1.0" encoding="utf-8"?>
@@ -19758,6 +21914,14 @@
 </file>
 
 <file path=customXml/itemProps1.xml><?xml version="1.0" encoding="utf-8"?>
+<ds:datastoreItem xmlns:ds="http://schemas.openxmlformats.org/officeDocument/2006/customXml" ds:itemID="{3903E9B0-7CDF-4882-93FC-F791BEF38EC3}">
+  <ds:schemaRefs>
+    <ds:schemaRef ds:uri="http://schemas.microsoft.com/sharepoint/v3/contenttype/forms"/>
+  </ds:schemaRefs>
+</ds:datastoreItem>
+</file>
+
+<file path=customXml/itemProps2.xml><?xml version="1.0" encoding="utf-8"?>
 <ds:datastoreItem xmlns:ds="http://schemas.openxmlformats.org/officeDocument/2006/customXml" ds:itemID="{799D330E-5CBA-419E-8F25-A3D3F794F61E}">
   <ds:schemaRefs>
     <ds:schemaRef ds:uri="e71c23b1-50b5-4f23-b9fe-833da4dd8ba4"/>
@@ -19770,14 +21934,6 @@
     <ds:schemaRef ds:uri="d6b2e044-6a54-4cb7-a441-36a5fc0f35b5"/>
     <ds:schemaRef ds:uri="http://schemas.microsoft.com/office/2006/documentManagement/types"/>
     <ds:schemaRef ds:uri="http://schemas.microsoft.com/office/infopath/2007/PartnerControls"/>
-  </ds:schemaRefs>
-</ds:datastoreItem>
-</file>
-
-<file path=customXml/itemProps2.xml><?xml version="1.0" encoding="utf-8"?>
-<ds:datastoreItem xmlns:ds="http://schemas.openxmlformats.org/officeDocument/2006/customXml" ds:itemID="{3903E9B0-7CDF-4882-93FC-F791BEF38EC3}">
-  <ds:schemaRefs>
-    <ds:schemaRef ds:uri="http://schemas.microsoft.com/sharepoint/v3/contenttype/forms"/>
   </ds:schemaRefs>
 </ds:datastoreItem>
 </file>
